--- a/lessons/logisticheskaya_regressiya/presentation.pptx
+++ b/lessons/logisticheskaya_regressiya/presentation.pptx
@@ -24,6 +24,7 @@
     <p:sldId id="272" r:id="rId24"/>
     <p:sldId id="273" r:id="rId25"/>
     <p:sldId id="274" r:id="rId26"/>
+    <p:sldId id="275" r:id="rId27"/>
   </p:sldIdLst>
   <p:sldSz cx="12191695" cy="6858000" type="screen4x3"/>
   <p:notesSz cx="6858000" cy="9144000"/>
@@ -1151,6 +1152,76 @@
           <a:p>
             <a:r>
               <a:t>Можно раздать чек-лист одним слайдом в конце.</a:t>
+            </a:r>
+          </a:p>
+        </p:txBody>
+      </p:sp>
+      <p:sp>
+        <p:nvSpPr>
+          <p:cNvPr id="4" name="Slide Number Placeholder 3"/>
+          <p:cNvSpPr>
+            <a:spLocks noGrp="1"/>
+          </p:cNvSpPr>
+          <p:nvPr>
+            <p:ph type="sldNum" idx="5" sz="quarter"/>
+          </p:nvPr>
+        </p:nvSpPr>
+        <p:spPr/>
+      </p:sp>
+    </p:spTree>
+  </p:cSld>
+  <p:clrMapOvr>
+    <a:masterClrMapping/>
+  </p:clrMapOvr>
+</p:notes>
+</file>
+
+<file path=ppt/notesSlides/notesSlide19.xml><?xml version="1.0" encoding="utf-8"?>
+<p:notes xmlns:a="http://schemas.openxmlformats.org/drawingml/2006/main" xmlns:p="http://schemas.openxmlformats.org/presentationml/2006/main" xmlns:r="http://schemas.openxmlformats.org/officeDocument/2006/relationships">
+  <p:cSld>
+    <p:spTree>
+      <p:nvGrpSpPr>
+        <p:cNvPr id="1" name=""/>
+        <p:cNvGrpSpPr/>
+        <p:nvPr/>
+      </p:nvGrpSpPr>
+      <p:grpSpPr>
+        <a:xfrm>
+          <a:off x="0" y="0"/>
+          <a:ext cx="0" cy="0"/>
+          <a:chOff x="0" y="0"/>
+          <a:chExt cx="0" cy="0"/>
+        </a:xfrm>
+      </p:grpSpPr>
+      <p:sp>
+        <p:nvSpPr>
+          <p:cNvPr id="2" name="Slide Image Placeholder 1"/>
+          <p:cNvSpPr>
+            <a:spLocks noGrp="1"/>
+          </p:cNvSpPr>
+          <p:nvPr>
+            <p:ph type="sldImg" idx="2"/>
+          </p:nvPr>
+        </p:nvSpPr>
+        <p:spPr/>
+      </p:sp>
+      <p:sp>
+        <p:nvSpPr>
+          <p:cNvPr id="3" name="Notes Placeholder 2"/>
+          <p:cNvSpPr>
+            <a:spLocks noGrp="1"/>
+          </p:cNvSpPr>
+          <p:nvPr>
+            <p:ph type="body" idx="3" sz="quarter"/>
+          </p:nvPr>
+        </p:nvSpPr>
+        <p:spPr/>
+        <p:txBody>
+          <a:bodyPr/>
+          <a:lstStyle/>
+          <a:p>
+            <a:r>
+              <a:t>Colab-ссылки обновляются агентом при --apply.</a:t>
             </a:r>
           </a:p>
         </p:txBody>
@@ -4916,7 +4987,7 @@
         <p:spPr>
           <a:xfrm>
             <a:off x="640080" y="1371600"/>
-            <a:ext cx="6858000" cy="5029200"/>
+            <a:ext cx="6858000" cy="1810512"/>
           </a:xfrm>
           <a:prstGeom prst="rect">
             <a:avLst/>
@@ -5133,7 +5204,7 @@
         <p:spPr>
           <a:xfrm>
             <a:off x="640080" y="1371600"/>
-            <a:ext cx="6858000" cy="5029200"/>
+            <a:ext cx="6858000" cy="1810512"/>
           </a:xfrm>
           <a:prstGeom prst="rect">
             <a:avLst/>
@@ -5255,9 +5326,176 @@
           </a:p>
         </p:txBody>
       </p:sp>
+      <p:sp>
+        <p:nvSpPr>
+          <p:cNvPr id="4" name="Rectangle 3"/>
+          <p:cNvSpPr/>
+          <p:nvPr/>
+        </p:nvSpPr>
+        <p:spPr>
+          <a:xfrm>
+            <a:off x="640080" y="3291840"/>
+            <a:ext cx="6766560" cy="804672"/>
+          </a:xfrm>
+          <a:prstGeom prst="rect">
+            <a:avLst/>
+          </a:prstGeom>
+          <a:solidFill>
+            <a:srgbClr val="F5F5F5"/>
+          </a:solidFill>
+          <a:ln>
+            <a:solidFill>
+              <a:srgbClr val="DDDDDD"/>
+            </a:solidFill>
+          </a:ln>
+        </p:spPr>
+        <p:style>
+          <a:lnRef idx="1">
+            <a:schemeClr val="accent1"/>
+          </a:lnRef>
+          <a:fillRef idx="3">
+            <a:schemeClr val="accent1"/>
+          </a:fillRef>
+          <a:effectRef idx="2">
+            <a:schemeClr val="accent1"/>
+          </a:effectRef>
+          <a:fontRef idx="minor">
+            <a:schemeClr val="lt1"/>
+          </a:fontRef>
+        </p:style>
+        <p:txBody>
+          <a:bodyPr rtlCol="0" anchor="ctr"/>
+          <a:lstStyle/>
+          <a:p>
+            <a:pPr algn="ctr"/>
+          </a:p>
+        </p:txBody>
+      </p:sp>
+      <p:sp>
+        <p:nvSpPr>
+          <p:cNvPr id="5" name="TextBox 4"/>
+          <p:cNvSpPr txBox="1"/>
+          <p:nvPr/>
+        </p:nvSpPr>
+        <p:spPr>
+          <a:xfrm>
+            <a:off x="713231" y="3328416"/>
+            <a:ext cx="6620256" cy="731520"/>
+          </a:xfrm>
+          <a:prstGeom prst="rect">
+            <a:avLst/>
+          </a:prstGeom>
+          <a:noFill/>
+        </p:spPr>
+        <p:txBody>
+          <a:bodyPr wrap="square">
+            <a:noAutofit/>
+          </a:bodyPr>
+          <a:lstStyle/>
+          <a:p>
+            <a:pPr>
+              <a:spcAft>
+                <a:spcPts val="0"/>
+              </a:spcAft>
+              <a:defRPr sz="1100">
+                <a:solidFill>
+                  <a:srgbClr val="000000"/>
+                </a:solidFill>
+                <a:latin typeface="Consolas"/>
+              </a:defRPr>
+            </a:pPr>
+            <a:r>
+              <a:t>from sklearn.metrics import roc_curve, auc</a:t>
+            </a:r>
+          </a:p>
+          <a:p>
+            <a:pPr>
+              <a:spcAft>
+                <a:spcPts val="0"/>
+              </a:spcAft>
+              <a:defRPr sz="1100">
+                <a:solidFill>
+                  <a:srgbClr val="000000"/>
+                </a:solidFill>
+                <a:latin typeface="Consolas"/>
+              </a:defRPr>
+            </a:pPr>
+            <a:r>
+              <a:t>fpr, tpr, _ = roc_curve(y_test, y_score)</a:t>
+            </a:r>
+          </a:p>
+          <a:p>
+            <a:pPr>
+              <a:spcAft>
+                <a:spcPts val="0"/>
+              </a:spcAft>
+              <a:defRPr sz="1100">
+                <a:solidFill>
+                  <a:srgbClr val="000000"/>
+                </a:solidFill>
+                <a:latin typeface="Consolas"/>
+              </a:defRPr>
+            </a:pPr>
+            <a:r>
+              <a:t>roc_auc = auc(fpr, tpr)</a:t>
+            </a:r>
+          </a:p>
+          <a:p>
+            <a:pPr>
+              <a:spcAft>
+                <a:spcPts val="0"/>
+              </a:spcAft>
+              <a:defRPr sz="1100">
+                <a:solidFill>
+                  <a:srgbClr val="000000"/>
+                </a:solidFill>
+                <a:latin typeface="Consolas"/>
+              </a:defRPr>
+            </a:pPr>
+            <a:r>
+              <a:t>print(f'AUC-ROC = {roc_auc:.3f}')</a:t>
+            </a:r>
+          </a:p>
+        </p:txBody>
+      </p:sp>
+      <p:sp>
+        <p:nvSpPr>
+          <p:cNvPr id="6" name="TextBox 5"/>
+          <p:cNvSpPr txBox="1"/>
+          <p:nvPr/>
+        </p:nvSpPr>
+        <p:spPr>
+          <a:xfrm>
+            <a:off x="640080" y="4151376"/>
+            <a:ext cx="6766560" cy="201168"/>
+          </a:xfrm>
+          <a:prstGeom prst="rect">
+            <a:avLst/>
+          </a:prstGeom>
+          <a:noFill/>
+        </p:spPr>
+        <p:txBody>
+          <a:bodyPr wrap="none">
+            <a:spAutoFit/>
+          </a:bodyPr>
+          <a:lstStyle/>
+          <a:p>
+            <a:pPr algn="l">
+              <a:defRPr sz="1000" i="1">
+                <a:solidFill>
+                  <a:srgbClr val="555555"/>
+                </a:solidFill>
+              </a:defRPr>
+            </a:pPr>
+            <a:r>
+              <a:t>ROC-кривая</a:t>
+            </a:r>
+          </a:p>
+        </p:txBody>
+      </p:sp>
       <p:pic>
         <p:nvPicPr>
-          <p:cNvPr id="4" name="Picture 3" descr="roc_and_pr_curves.png"/>
+          <p:cNvPr id="7" name="Picture 6" descr="roc_and_pr_curves.png"/>
           <p:cNvPicPr>
             <a:picLocks noChangeAspect="1"/>
           </p:cNvPicPr>
@@ -5339,7 +5577,7 @@
         <p:spPr>
           <a:xfrm>
             <a:off x="640080" y="1371600"/>
-            <a:ext cx="6858000" cy="5029200"/>
+            <a:ext cx="6858000" cy="1810512"/>
           </a:xfrm>
           <a:prstGeom prst="rect">
             <a:avLst/>
@@ -5612,7 +5850,7 @@
         <p:spPr>
           <a:xfrm>
             <a:off x="640080" y="1371600"/>
-            <a:ext cx="6858000" cy="5029200"/>
+            <a:ext cx="6858000" cy="1810512"/>
           </a:xfrm>
           <a:prstGeom prst="rect">
             <a:avLst/>
@@ -5971,7 +6209,7 @@
         <p:spPr>
           <a:xfrm>
             <a:off x="640080" y="1371600"/>
-            <a:ext cx="6858000" cy="5029200"/>
+            <a:ext cx="6858000" cy="1810512"/>
           </a:xfrm>
           <a:prstGeom prst="rect">
             <a:avLst/>
@@ -6077,9 +6315,176 @@
           </a:p>
         </p:txBody>
       </p:sp>
+      <p:sp>
+        <p:nvSpPr>
+          <p:cNvPr id="4" name="Rectangle 3"/>
+          <p:cNvSpPr/>
+          <p:nvPr/>
+        </p:nvSpPr>
+        <p:spPr>
+          <a:xfrm>
+            <a:off x="640080" y="3291840"/>
+            <a:ext cx="6766560" cy="804672"/>
+          </a:xfrm>
+          <a:prstGeom prst="rect">
+            <a:avLst/>
+          </a:prstGeom>
+          <a:solidFill>
+            <a:srgbClr val="F5F5F5"/>
+          </a:solidFill>
+          <a:ln>
+            <a:solidFill>
+              <a:srgbClr val="DDDDDD"/>
+            </a:solidFill>
+          </a:ln>
+        </p:spPr>
+        <p:style>
+          <a:lnRef idx="1">
+            <a:schemeClr val="accent1"/>
+          </a:lnRef>
+          <a:fillRef idx="3">
+            <a:schemeClr val="accent1"/>
+          </a:fillRef>
+          <a:effectRef idx="2">
+            <a:schemeClr val="accent1"/>
+          </a:effectRef>
+          <a:fontRef idx="minor">
+            <a:schemeClr val="lt1"/>
+          </a:fontRef>
+        </p:style>
+        <p:txBody>
+          <a:bodyPr rtlCol="0" anchor="ctr"/>
+          <a:lstStyle/>
+          <a:p>
+            <a:pPr algn="ctr"/>
+          </a:p>
+        </p:txBody>
+      </p:sp>
+      <p:sp>
+        <p:nvSpPr>
+          <p:cNvPr id="5" name="TextBox 4"/>
+          <p:cNvSpPr txBox="1"/>
+          <p:nvPr/>
+        </p:nvSpPr>
+        <p:spPr>
+          <a:xfrm>
+            <a:off x="713231" y="3328416"/>
+            <a:ext cx="6620256" cy="731520"/>
+          </a:xfrm>
+          <a:prstGeom prst="rect">
+            <a:avLst/>
+          </a:prstGeom>
+          <a:noFill/>
+        </p:spPr>
+        <p:txBody>
+          <a:bodyPr wrap="square">
+            <a:noAutofit/>
+          </a:bodyPr>
+          <a:lstStyle/>
+          <a:p>
+            <a:pPr>
+              <a:spcAft>
+                <a:spcPts val="0"/>
+              </a:spcAft>
+              <a:defRPr sz="1100">
+                <a:solidFill>
+                  <a:srgbClr val="000000"/>
+                </a:solidFill>
+                <a:latin typeface="Consolas"/>
+              </a:defRPr>
+            </a:pPr>
+            <a:r>
+              <a:t>from sklearn.linear_model import LogisticRegression</a:t>
+            </a:r>
+          </a:p>
+          <a:p>
+            <a:pPr>
+              <a:spcAft>
+                <a:spcPts val="0"/>
+              </a:spcAft>
+              <a:defRPr sz="1100">
+                <a:solidFill>
+                  <a:srgbClr val="000000"/>
+                </a:solidFill>
+                <a:latin typeface="Consolas"/>
+              </a:defRPr>
+            </a:pPr>
+            <a:r>
+              <a:t>clf = LogisticRegression(C=1.0, random_state=42)</a:t>
+            </a:r>
+          </a:p>
+          <a:p>
+            <a:pPr>
+              <a:spcAft>
+                <a:spcPts val="0"/>
+              </a:spcAft>
+              <a:defRPr sz="1100">
+                <a:solidFill>
+                  <a:srgbClr val="000000"/>
+                </a:solidFill>
+                <a:latin typeface="Consolas"/>
+              </a:defRPr>
+            </a:pPr>
+            <a:r>
+              <a:t>clf.fit(X_train, y_train)</a:t>
+            </a:r>
+          </a:p>
+          <a:p>
+            <a:pPr>
+              <a:spcAft>
+                <a:spcPts val="0"/>
+              </a:spcAft>
+              <a:defRPr sz="1100">
+                <a:solidFill>
+                  <a:srgbClr val="000000"/>
+                </a:solidFill>
+                <a:latin typeface="Consolas"/>
+              </a:defRPr>
+            </a:pPr>
+            <a:r>
+              <a:t>y_pred = clf.predict(X_test)</a:t>
+            </a:r>
+          </a:p>
+        </p:txBody>
+      </p:sp>
+      <p:sp>
+        <p:nvSpPr>
+          <p:cNvPr id="6" name="TextBox 5"/>
+          <p:cNvSpPr txBox="1"/>
+          <p:nvPr/>
+        </p:nvSpPr>
+        <p:spPr>
+          <a:xfrm>
+            <a:off x="640080" y="4151376"/>
+            <a:ext cx="6766560" cy="201168"/>
+          </a:xfrm>
+          <a:prstGeom prst="rect">
+            <a:avLst/>
+          </a:prstGeom>
+          <a:noFill/>
+        </p:spPr>
+        <p:txBody>
+          <a:bodyPr wrap="none">
+            <a:spAutoFit/>
+          </a:bodyPr>
+          <a:lstStyle/>
+          <a:p>
+            <a:pPr algn="l">
+              <a:defRPr sz="1000" i="1">
+                <a:solidFill>
+                  <a:srgbClr val="555555"/>
+                </a:solidFill>
+              </a:defRPr>
+            </a:pPr>
+            <a:r>
+              <a:t>Базовый классификатор</a:t>
+            </a:r>
+          </a:p>
+        </p:txBody>
+      </p:sp>
       <p:pic>
         <p:nvPicPr>
-          <p:cNvPr id="4" name="Picture 3" descr="logreg_pipeline.png"/>
+          <p:cNvPr id="7" name="Picture 6" descr="logreg_pipeline.png"/>
           <p:cNvPicPr>
             <a:picLocks noChangeAspect="1"/>
           </p:cNvPicPr>
@@ -6161,7 +6566,7 @@
         <p:spPr>
           <a:xfrm>
             <a:off x="640080" y="1371600"/>
-            <a:ext cx="6858000" cy="5029200"/>
+            <a:ext cx="6858000" cy="1810512"/>
           </a:xfrm>
           <a:prstGeom prst="rect">
             <a:avLst/>
@@ -6259,9 +6664,192 @@
           </a:p>
         </p:txBody>
       </p:sp>
+      <p:sp>
+        <p:nvSpPr>
+          <p:cNvPr id="4" name="Rectangle 3"/>
+          <p:cNvSpPr/>
+          <p:nvPr/>
+        </p:nvSpPr>
+        <p:spPr>
+          <a:xfrm>
+            <a:off x="640080" y="3291840"/>
+            <a:ext cx="6766560" cy="978407"/>
+          </a:xfrm>
+          <a:prstGeom prst="rect">
+            <a:avLst/>
+          </a:prstGeom>
+          <a:solidFill>
+            <a:srgbClr val="F5F5F5"/>
+          </a:solidFill>
+          <a:ln>
+            <a:solidFill>
+              <a:srgbClr val="DDDDDD"/>
+            </a:solidFill>
+          </a:ln>
+        </p:spPr>
+        <p:style>
+          <a:lnRef idx="1">
+            <a:schemeClr val="accent1"/>
+          </a:lnRef>
+          <a:fillRef idx="3">
+            <a:schemeClr val="accent1"/>
+          </a:fillRef>
+          <a:effectRef idx="2">
+            <a:schemeClr val="accent1"/>
+          </a:effectRef>
+          <a:fontRef idx="minor">
+            <a:schemeClr val="lt1"/>
+          </a:fontRef>
+        </p:style>
+        <p:txBody>
+          <a:bodyPr rtlCol="0" anchor="ctr"/>
+          <a:lstStyle/>
+          <a:p>
+            <a:pPr algn="ctr"/>
+          </a:p>
+        </p:txBody>
+      </p:sp>
+      <p:sp>
+        <p:nvSpPr>
+          <p:cNvPr id="5" name="TextBox 4"/>
+          <p:cNvSpPr txBox="1"/>
+          <p:nvPr/>
+        </p:nvSpPr>
+        <p:spPr>
+          <a:xfrm>
+            <a:off x="713231" y="3328416"/>
+            <a:ext cx="6620256" cy="905255"/>
+          </a:xfrm>
+          <a:prstGeom prst="rect">
+            <a:avLst/>
+          </a:prstGeom>
+          <a:noFill/>
+        </p:spPr>
+        <p:txBody>
+          <a:bodyPr wrap="square">
+            <a:noAutofit/>
+          </a:bodyPr>
+          <a:lstStyle/>
+          <a:p>
+            <a:pPr>
+              <a:spcAft>
+                <a:spcPts val="0"/>
+              </a:spcAft>
+              <a:defRPr sz="1100">
+                <a:solidFill>
+                  <a:srgbClr val="000000"/>
+                </a:solidFill>
+                <a:latin typeface="Consolas"/>
+              </a:defRPr>
+            </a:pPr>
+            <a:r>
+              <a:t>clf = LogisticRegression(</a:t>
+            </a:r>
+          </a:p>
+          <a:p>
+            <a:pPr>
+              <a:spcAft>
+                <a:spcPts val="0"/>
+              </a:spcAft>
+              <a:defRPr sz="1100">
+                <a:solidFill>
+                  <a:srgbClr val="000000"/>
+                </a:solidFill>
+                <a:latin typeface="Consolas"/>
+              </a:defRPr>
+            </a:pPr>
+            <a:r>
+              <a:t>    class_weight='balanced', random_state=42</a:t>
+            </a:r>
+          </a:p>
+          <a:p>
+            <a:pPr>
+              <a:spcAft>
+                <a:spcPts val="0"/>
+              </a:spcAft>
+              <a:defRPr sz="1100">
+                <a:solidFill>
+                  <a:srgbClr val="000000"/>
+                </a:solidFill>
+                <a:latin typeface="Consolas"/>
+              </a:defRPr>
+            </a:pPr>
+            <a:r>
+              <a:t>)</a:t>
+            </a:r>
+          </a:p>
+          <a:p>
+            <a:pPr>
+              <a:spcAft>
+                <a:spcPts val="0"/>
+              </a:spcAft>
+              <a:defRPr sz="1100">
+                <a:solidFill>
+                  <a:srgbClr val="000000"/>
+                </a:solidFill>
+                <a:latin typeface="Consolas"/>
+              </a:defRPr>
+            </a:pPr>
+            <a:r>
+              <a:t>clf.fit(X_train, y_train)</a:t>
+            </a:r>
+          </a:p>
+          <a:p>
+            <a:pPr>
+              <a:spcAft>
+                <a:spcPts val="0"/>
+              </a:spcAft>
+              <a:defRPr sz="1100">
+                <a:solidFill>
+                  <a:srgbClr val="000000"/>
+                </a:solidFill>
+                <a:latin typeface="Consolas"/>
+              </a:defRPr>
+            </a:pPr>
+            <a:r>
+              <a:t># веса классов подобраны автоматически</a:t>
+            </a:r>
+          </a:p>
+        </p:txBody>
+      </p:sp>
+      <p:sp>
+        <p:nvSpPr>
+          <p:cNvPr id="6" name="TextBox 5"/>
+          <p:cNvSpPr txBox="1"/>
+          <p:nvPr/>
+        </p:nvSpPr>
+        <p:spPr>
+          <a:xfrm>
+            <a:off x="640080" y="4325112"/>
+            <a:ext cx="6766560" cy="201168"/>
+          </a:xfrm>
+          <a:prstGeom prst="rect">
+            <a:avLst/>
+          </a:prstGeom>
+          <a:noFill/>
+        </p:spPr>
+        <p:txBody>
+          <a:bodyPr wrap="none">
+            <a:spAutoFit/>
+          </a:bodyPr>
+          <a:lstStyle/>
+          <a:p>
+            <a:pPr algn="l">
+              <a:defRPr sz="1000" i="1">
+                <a:solidFill>
+                  <a:srgbClr val="555555"/>
+                </a:solidFill>
+              </a:defRPr>
+            </a:pPr>
+            <a:r>
+              <a:t>class_weight='balanced'</a:t>
+            </a:r>
+          </a:p>
+        </p:txBody>
+      </p:sp>
       <p:pic>
         <p:nvPicPr>
-          <p:cNvPr id="4" name="Picture 3" descr="class_weight_balanced.png"/>
+          <p:cNvPr id="7" name="Picture 6" descr="class_weight_balanced.png"/>
           <p:cNvPicPr>
             <a:picLocks noChangeAspect="1"/>
           </p:cNvPicPr>
@@ -6343,7 +6931,7 @@
         <p:spPr>
           <a:xfrm>
             <a:off x="640080" y="1371600"/>
-            <a:ext cx="6858000" cy="5029200"/>
+            <a:ext cx="6858000" cy="1810512"/>
           </a:xfrm>
           <a:prstGeom prst="rect">
             <a:avLst/>
@@ -6441,9 +7029,176 @@
           </a:p>
         </p:txBody>
       </p:sp>
+      <p:sp>
+        <p:nvSpPr>
+          <p:cNvPr id="4" name="Rectangle 3"/>
+          <p:cNvSpPr/>
+          <p:nvPr/>
+        </p:nvSpPr>
+        <p:spPr>
+          <a:xfrm>
+            <a:off x="640080" y="3291840"/>
+            <a:ext cx="6766560" cy="804672"/>
+          </a:xfrm>
+          <a:prstGeom prst="rect">
+            <a:avLst/>
+          </a:prstGeom>
+          <a:solidFill>
+            <a:srgbClr val="F5F5F5"/>
+          </a:solidFill>
+          <a:ln>
+            <a:solidFill>
+              <a:srgbClr val="DDDDDD"/>
+            </a:solidFill>
+          </a:ln>
+        </p:spPr>
+        <p:style>
+          <a:lnRef idx="1">
+            <a:schemeClr val="accent1"/>
+          </a:lnRef>
+          <a:fillRef idx="3">
+            <a:schemeClr val="accent1"/>
+          </a:fillRef>
+          <a:effectRef idx="2">
+            <a:schemeClr val="accent1"/>
+          </a:effectRef>
+          <a:fontRef idx="minor">
+            <a:schemeClr val="lt1"/>
+          </a:fontRef>
+        </p:style>
+        <p:txBody>
+          <a:bodyPr rtlCol="0" anchor="ctr"/>
+          <a:lstStyle/>
+          <a:p>
+            <a:pPr algn="ctr"/>
+          </a:p>
+        </p:txBody>
+      </p:sp>
+      <p:sp>
+        <p:nvSpPr>
+          <p:cNvPr id="5" name="TextBox 4"/>
+          <p:cNvSpPr txBox="1"/>
+          <p:nvPr/>
+        </p:nvSpPr>
+        <p:spPr>
+          <a:xfrm>
+            <a:off x="713231" y="3328416"/>
+            <a:ext cx="6620256" cy="731520"/>
+          </a:xfrm>
+          <a:prstGeom prst="rect">
+            <a:avLst/>
+          </a:prstGeom>
+          <a:noFill/>
+        </p:spPr>
+        <p:txBody>
+          <a:bodyPr wrap="square">
+            <a:noAutofit/>
+          </a:bodyPr>
+          <a:lstStyle/>
+          <a:p>
+            <a:pPr>
+              <a:spcAft>
+                <a:spcPts val="0"/>
+              </a:spcAft>
+              <a:defRPr sz="1100">
+                <a:solidFill>
+                  <a:srgbClr val="000000"/>
+                </a:solidFill>
+                <a:latin typeface="Consolas"/>
+              </a:defRPr>
+            </a:pPr>
+            <a:r>
+              <a:t>from sklearn.calibration import CalibratedClassifierCV</a:t>
+            </a:r>
+          </a:p>
+          <a:p>
+            <a:pPr>
+              <a:spcAft>
+                <a:spcPts val="0"/>
+              </a:spcAft>
+              <a:defRPr sz="1100">
+                <a:solidFill>
+                  <a:srgbClr val="000000"/>
+                </a:solidFill>
+                <a:latin typeface="Consolas"/>
+              </a:defRPr>
+            </a:pPr>
+            <a:r>
+              <a:t>cal = CalibratedClassifierCV(clf, cv=3)</a:t>
+            </a:r>
+          </a:p>
+          <a:p>
+            <a:pPr>
+              <a:spcAft>
+                <a:spcPts val="0"/>
+              </a:spcAft>
+              <a:defRPr sz="1100">
+                <a:solidFill>
+                  <a:srgbClr val="000000"/>
+                </a:solidFill>
+                <a:latin typeface="Consolas"/>
+              </a:defRPr>
+            </a:pPr>
+            <a:r>
+              <a:t>cal.fit(X_train, y_train)</a:t>
+            </a:r>
+          </a:p>
+          <a:p>
+            <a:pPr>
+              <a:spcAft>
+                <a:spcPts val="0"/>
+              </a:spcAft>
+              <a:defRPr sz="1100">
+                <a:solidFill>
+                  <a:srgbClr val="000000"/>
+                </a:solidFill>
+                <a:latin typeface="Consolas"/>
+              </a:defRPr>
+            </a:pPr>
+            <a:r>
+              <a:t>p_cal = cal.predict_proba(X_test)[:, 1]</a:t>
+            </a:r>
+          </a:p>
+        </p:txBody>
+      </p:sp>
+      <p:sp>
+        <p:nvSpPr>
+          <p:cNvPr id="6" name="TextBox 5"/>
+          <p:cNvSpPr txBox="1"/>
+          <p:nvPr/>
+        </p:nvSpPr>
+        <p:spPr>
+          <a:xfrm>
+            <a:off x="640080" y="4151376"/>
+            <a:ext cx="6766560" cy="201168"/>
+          </a:xfrm>
+          <a:prstGeom prst="rect">
+            <a:avLst/>
+          </a:prstGeom>
+          <a:noFill/>
+        </p:spPr>
+        <p:txBody>
+          <a:bodyPr wrap="none">
+            <a:spAutoFit/>
+          </a:bodyPr>
+          <a:lstStyle/>
+          <a:p>
+            <a:pPr algn="l">
+              <a:defRPr sz="1000" i="1">
+                <a:solidFill>
+                  <a:srgbClr val="555555"/>
+                </a:solidFill>
+              </a:defRPr>
+            </a:pPr>
+            <a:r>
+              <a:t>Калибровка вероятностей</a:t>
+            </a:r>
+          </a:p>
+        </p:txBody>
+      </p:sp>
       <p:pic>
         <p:nvPicPr>
-          <p:cNvPr id="4" name="Picture 3" descr="calibration_reliability.png"/>
+          <p:cNvPr id="7" name="Picture 6" descr="calibration_reliability.png"/>
           <p:cNvPicPr>
             <a:picLocks noChangeAspect="1"/>
           </p:cNvPicPr>
@@ -6525,7 +7280,7 @@
         <p:spPr>
           <a:xfrm>
             <a:off x="640080" y="1371600"/>
-            <a:ext cx="6858000" cy="5029200"/>
+            <a:ext cx="6858000" cy="1810512"/>
           </a:xfrm>
           <a:prstGeom prst="rect">
             <a:avLst/>
@@ -6732,9 +7487,176 @@
           </a:p>
         </p:txBody>
       </p:sp>
+      <p:sp>
+        <p:nvSpPr>
+          <p:cNvPr id="4" name="Rectangle 3"/>
+          <p:cNvSpPr/>
+          <p:nvPr/>
+        </p:nvSpPr>
+        <p:spPr>
+          <a:xfrm>
+            <a:off x="640080" y="3291840"/>
+            <a:ext cx="6766560" cy="804672"/>
+          </a:xfrm>
+          <a:prstGeom prst="rect">
+            <a:avLst/>
+          </a:prstGeom>
+          <a:solidFill>
+            <a:srgbClr val="F5F5F5"/>
+          </a:solidFill>
+          <a:ln>
+            <a:solidFill>
+              <a:srgbClr val="DDDDDD"/>
+            </a:solidFill>
+          </a:ln>
+        </p:spPr>
+        <p:style>
+          <a:lnRef idx="1">
+            <a:schemeClr val="accent1"/>
+          </a:lnRef>
+          <a:fillRef idx="3">
+            <a:schemeClr val="accent1"/>
+          </a:fillRef>
+          <a:effectRef idx="2">
+            <a:schemeClr val="accent1"/>
+          </a:effectRef>
+          <a:fontRef idx="minor">
+            <a:schemeClr val="lt1"/>
+          </a:fontRef>
+        </p:style>
+        <p:txBody>
+          <a:bodyPr rtlCol="0" anchor="ctr"/>
+          <a:lstStyle/>
+          <a:p>
+            <a:pPr algn="ctr"/>
+          </a:p>
+        </p:txBody>
+      </p:sp>
+      <p:sp>
+        <p:nvSpPr>
+          <p:cNvPr id="5" name="TextBox 4"/>
+          <p:cNvSpPr txBox="1"/>
+          <p:nvPr/>
+        </p:nvSpPr>
+        <p:spPr>
+          <a:xfrm>
+            <a:off x="713231" y="3328416"/>
+            <a:ext cx="6620256" cy="731520"/>
+          </a:xfrm>
+          <a:prstGeom prst="rect">
+            <a:avLst/>
+          </a:prstGeom>
+          <a:noFill/>
+        </p:spPr>
+        <p:txBody>
+          <a:bodyPr wrap="square">
+            <a:noAutofit/>
+          </a:bodyPr>
+          <a:lstStyle/>
+          <a:p>
+            <a:pPr>
+              <a:spcAft>
+                <a:spcPts val="0"/>
+              </a:spcAft>
+              <a:defRPr sz="1100">
+                <a:solidFill>
+                  <a:srgbClr val="000000"/>
+                </a:solidFill>
+                <a:latin typeface="Consolas"/>
+              </a:defRPr>
+            </a:pPr>
+            <a:r>
+              <a:t>from sklearn.neural_network import MLPClassifier</a:t>
+            </a:r>
+          </a:p>
+          <a:p>
+            <a:pPr>
+              <a:spcAft>
+                <a:spcPts val="0"/>
+              </a:spcAft>
+              <a:defRPr sz="1100">
+                <a:solidFill>
+                  <a:srgbClr val="000000"/>
+                </a:solidFill>
+                <a:latin typeface="Consolas"/>
+              </a:defRPr>
+            </a:pPr>
+            <a:r>
+              <a:t>mlp = MLPClassifier(hidden_layer_sizes=(8,), max_iter=500)</a:t>
+            </a:r>
+          </a:p>
+          <a:p>
+            <a:pPr>
+              <a:spcAft>
+                <a:spcPts val="0"/>
+              </a:spcAft>
+              <a:defRPr sz="1100">
+                <a:solidFill>
+                  <a:srgbClr val="000000"/>
+                </a:solidFill>
+                <a:latin typeface="Consolas"/>
+              </a:defRPr>
+            </a:pPr>
+            <a:r>
+              <a:t>mlp.fit(X_train, y_train)</a:t>
+            </a:r>
+          </a:p>
+          <a:p>
+            <a:pPr>
+              <a:spcAft>
+                <a:spcPts val="0"/>
+              </a:spcAft>
+              <a:defRPr sz="1100">
+                <a:solidFill>
+                  <a:srgbClr val="000000"/>
+                </a:solidFill>
+                <a:latin typeface="Consolas"/>
+              </a:defRPr>
+            </a:pPr>
+            <a:r>
+              <a:t># один скрытый слой ≈ нелинейная логистическая</a:t>
+            </a:r>
+          </a:p>
+        </p:txBody>
+      </p:sp>
+      <p:sp>
+        <p:nvSpPr>
+          <p:cNvPr id="6" name="TextBox 5"/>
+          <p:cNvSpPr txBox="1"/>
+          <p:nvPr/>
+        </p:nvSpPr>
+        <p:spPr>
+          <a:xfrm>
+            <a:off x="640080" y="4151376"/>
+            <a:ext cx="6766560" cy="201168"/>
+          </a:xfrm>
+          <a:prstGeom prst="rect">
+            <a:avLst/>
+          </a:prstGeom>
+          <a:noFill/>
+        </p:spPr>
+        <p:txBody>
+          <a:bodyPr wrap="none">
+            <a:spAutoFit/>
+          </a:bodyPr>
+          <a:lstStyle/>
+          <a:p>
+            <a:pPr algn="l">
+              <a:defRPr sz="1000" i="1">
+                <a:solidFill>
+                  <a:srgbClr val="555555"/>
+                </a:solidFill>
+              </a:defRPr>
+            </a:pPr>
+            <a:r>
+              <a:t>MLP как обобщение</a:t>
+            </a:r>
+          </a:p>
+        </p:txBody>
+      </p:sp>
       <p:pic>
         <p:nvPicPr>
-          <p:cNvPr id="4" name="Picture 3" descr="nonlinear_decision_boundary.png"/>
+          <p:cNvPr id="7" name="Picture 6" descr="nonlinear_decision_boundary.png"/>
           <p:cNvPicPr>
             <a:picLocks noChangeAspect="1"/>
           </p:cNvPicPr>
@@ -6816,7 +7738,7 @@
         <p:spPr>
           <a:xfrm>
             <a:off x="640080" y="1371600"/>
-            <a:ext cx="6858000" cy="5029200"/>
+            <a:ext cx="6858000" cy="2194560"/>
           </a:xfrm>
           <a:prstGeom prst="rect">
             <a:avLst/>
@@ -7110,7 +8032,7 @@
         <p:spPr>
           <a:xfrm>
             <a:off x="640080" y="1371600"/>
-            <a:ext cx="11247120" cy="5029200"/>
+            <a:ext cx="11247120" cy="2578608"/>
           </a:xfrm>
           <a:prstGeom prst="rect">
             <a:avLst/>
@@ -7282,7 +8204,7 @@
         <p:spPr>
           <a:xfrm>
             <a:off x="640080" y="1371600"/>
-            <a:ext cx="6858000" cy="5029200"/>
+            <a:ext cx="6858000" cy="1810512"/>
           </a:xfrm>
           <a:prstGeom prst="rect">
             <a:avLst/>
@@ -7412,6 +8334,470 @@
           </a:prstGeom>
         </p:spPr>
       </p:pic>
+    </p:spTree>
+  </p:cSld>
+  <p:clrMapOvr>
+    <a:masterClrMapping/>
+  </p:clrMapOvr>
+</p:sld>
+</file>
+
+<file path=ppt/slides/slide20.xml><?xml version="1.0" encoding="utf-8"?>
+<p:sld xmlns:a="http://schemas.openxmlformats.org/drawingml/2006/main" xmlns:p="http://schemas.openxmlformats.org/presentationml/2006/main" xmlns:r="http://schemas.openxmlformats.org/officeDocument/2006/relationships">
+  <p:cSld>
+    <p:spTree>
+      <p:nvGrpSpPr>
+        <p:cNvPr id="1" name=""/>
+        <p:cNvGrpSpPr/>
+        <p:nvPr/>
+      </p:nvGrpSpPr>
+      <p:grpSpPr/>
+      <p:sp>
+        <p:nvSpPr>
+          <p:cNvPr id="2" name="TextBox 1"/>
+          <p:cNvSpPr txBox="1"/>
+          <p:nvPr/>
+        </p:nvSpPr>
+        <p:spPr>
+          <a:xfrm>
+            <a:off x="457200" y="274320"/>
+            <a:ext cx="11247120" cy="914400"/>
+          </a:xfrm>
+          <a:prstGeom prst="rect">
+            <a:avLst/>
+          </a:prstGeom>
+          <a:noFill/>
+        </p:spPr>
+        <p:txBody>
+          <a:bodyPr wrap="square">
+            <a:spAutoFit/>
+          </a:bodyPr>
+          <a:lstStyle/>
+          <a:p>
+            <a:r>
+              <a:rPr lang="ru-RU" dirty="0" sz="3200" b="1">
+                <a:solidFill>
+                  <a:srgbClr val="1A1A2E"/>
+                </a:solidFill>
+              </a:rPr>
+              <a:t>Источники и практика</a:t>
+            </a:r>
+          </a:p>
+        </p:txBody>
+      </p:sp>
+      <p:sp>
+        <p:nvSpPr>
+          <p:cNvPr id="3" name="TextBox 2"/>
+          <p:cNvSpPr txBox="1"/>
+          <p:nvPr/>
+        </p:nvSpPr>
+        <p:spPr>
+          <a:xfrm>
+            <a:off x="640080" y="1325880"/>
+            <a:ext cx="6583680" cy="320040"/>
+          </a:xfrm>
+          <a:prstGeom prst="rect">
+            <a:avLst/>
+          </a:prstGeom>
+          <a:noFill/>
+        </p:spPr>
+        <p:txBody>
+          <a:bodyPr wrap="none">
+            <a:spAutoFit/>
+          </a:bodyPr>
+          <a:lstStyle/>
+          <a:p>
+            <a:pPr>
+              <a:defRPr sz="1800" b="1">
+                <a:solidFill>
+                  <a:srgbClr val="000000"/>
+                </a:solidFill>
+              </a:defRPr>
+            </a:pPr>
+            <a:r>
+              <a:t>Литература</a:t>
+            </a:r>
+          </a:p>
+        </p:txBody>
+      </p:sp>
+      <p:sp>
+        <p:nvSpPr>
+          <p:cNvPr id="4" name="TextBox 3"/>
+          <p:cNvSpPr txBox="1"/>
+          <p:nvPr/>
+        </p:nvSpPr>
+        <p:spPr>
+          <a:xfrm>
+            <a:off x="640080" y="1673352"/>
+            <a:ext cx="6583680" cy="566928"/>
+          </a:xfrm>
+          <a:prstGeom prst="rect">
+            <a:avLst/>
+          </a:prstGeom>
+          <a:noFill/>
+        </p:spPr>
+        <p:txBody>
+          <a:bodyPr wrap="square">
+            <a:spAutoFit/>
+          </a:bodyPr>
+          <a:lstStyle/>
+          <a:p>
+            <a:pPr>
+              <a:spcAft>
+                <a:spcPts val="400"/>
+              </a:spcAft>
+            </a:pPr>
+            <a:r>
+              <a:rPr lang="ru-RU" dirty="0" sz="1600">
+                <a:solidFill>
+                  <a:srgbClr val="000000"/>
+                </a:solidFill>
+              </a:rPr>
+              <a:t xml:space="preserve">• </a:t>
+            </a:r>
+            <a:r>
+              <a:rPr sz="1600">
+                <a:solidFill>
+                  <a:srgbClr val="3366CC"/>
+                </a:solidFill>
+                <a:hlinkClick r:id="rId2"/>
+              </a:rPr>
+              <a:t>Berkson J. (1944). Application of the Logistic Function to Bio-Assay</a:t>
+            </a:r>
+          </a:p>
+        </p:txBody>
+      </p:sp>
+      <p:sp>
+        <p:nvSpPr>
+          <p:cNvPr id="5" name="TextBox 4"/>
+          <p:cNvSpPr txBox="1"/>
+          <p:nvPr/>
+        </p:nvSpPr>
+        <p:spPr>
+          <a:xfrm>
+            <a:off x="640080" y="2240280"/>
+            <a:ext cx="6583680" cy="566928"/>
+          </a:xfrm>
+          <a:prstGeom prst="rect">
+            <a:avLst/>
+          </a:prstGeom>
+          <a:noFill/>
+        </p:spPr>
+        <p:txBody>
+          <a:bodyPr wrap="square">
+            <a:spAutoFit/>
+          </a:bodyPr>
+          <a:lstStyle/>
+          <a:p>
+            <a:pPr>
+              <a:spcAft>
+                <a:spcPts val="400"/>
+              </a:spcAft>
+            </a:pPr>
+            <a:r>
+              <a:rPr lang="ru-RU" dirty="0" sz="1600">
+                <a:solidFill>
+                  <a:srgbClr val="000000"/>
+                </a:solidFill>
+              </a:rPr>
+              <a:t xml:space="preserve">• </a:t>
+            </a:r>
+            <a:r>
+              <a:rPr sz="1600">
+                <a:solidFill>
+                  <a:srgbClr val="3366CC"/>
+                </a:solidFill>
+                <a:hlinkClick r:id="rId3"/>
+              </a:rPr>
+              <a:t>Cox D.R. (1958). The Regression Analysis of Life Tables</a:t>
+            </a:r>
+          </a:p>
+        </p:txBody>
+      </p:sp>
+      <p:sp>
+        <p:nvSpPr>
+          <p:cNvPr id="6" name="TextBox 5"/>
+          <p:cNvSpPr txBox="1"/>
+          <p:nvPr/>
+        </p:nvSpPr>
+        <p:spPr>
+          <a:xfrm>
+            <a:off x="640080" y="2807208"/>
+            <a:ext cx="6583680" cy="566928"/>
+          </a:xfrm>
+          <a:prstGeom prst="rect">
+            <a:avLst/>
+          </a:prstGeom>
+          <a:noFill/>
+        </p:spPr>
+        <p:txBody>
+          <a:bodyPr wrap="square">
+            <a:spAutoFit/>
+          </a:bodyPr>
+          <a:lstStyle/>
+          <a:p>
+            <a:pPr>
+              <a:spcAft>
+                <a:spcPts val="400"/>
+              </a:spcAft>
+            </a:pPr>
+            <a:r>
+              <a:rPr lang="ru-RU" dirty="0" sz="1600">
+                <a:solidFill>
+                  <a:srgbClr val="000000"/>
+                </a:solidFill>
+              </a:rPr>
+              <a:t xml:space="preserve">• </a:t>
+            </a:r>
+            <a:r>
+              <a:rPr sz="1600">
+                <a:solidFill>
+                  <a:srgbClr val="3366CC"/>
+                </a:solidFill>
+                <a:hlinkClick r:id="rId4"/>
+              </a:rPr>
+              <a:t>Nelder J.A., Wedderburn R.W. (1972). Generalized Linear Models</a:t>
+            </a:r>
+          </a:p>
+        </p:txBody>
+      </p:sp>
+      <p:sp>
+        <p:nvSpPr>
+          <p:cNvPr id="7" name="TextBox 6"/>
+          <p:cNvSpPr txBox="1"/>
+          <p:nvPr/>
+        </p:nvSpPr>
+        <p:spPr>
+          <a:xfrm>
+            <a:off x="640080" y="3374136"/>
+            <a:ext cx="6583680" cy="320040"/>
+          </a:xfrm>
+          <a:prstGeom prst="rect">
+            <a:avLst/>
+          </a:prstGeom>
+          <a:noFill/>
+        </p:spPr>
+        <p:txBody>
+          <a:bodyPr wrap="none">
+            <a:spAutoFit/>
+          </a:bodyPr>
+          <a:lstStyle/>
+          <a:p>
+            <a:pPr>
+              <a:defRPr sz="1800" b="1">
+                <a:solidFill>
+                  <a:srgbClr val="000000"/>
+                </a:solidFill>
+              </a:defRPr>
+            </a:pPr>
+            <a:r>
+              <a:t>Практика в Colab</a:t>
+            </a:r>
+          </a:p>
+        </p:txBody>
+      </p:sp>
+      <p:sp>
+        <p:nvSpPr>
+          <p:cNvPr id="8" name="TextBox 7"/>
+          <p:cNvSpPr txBox="1"/>
+          <p:nvPr/>
+        </p:nvSpPr>
+        <p:spPr>
+          <a:xfrm>
+            <a:off x="640080" y="3721608"/>
+            <a:ext cx="6583680" cy="457200"/>
+          </a:xfrm>
+          <a:prstGeom prst="rect">
+            <a:avLst/>
+          </a:prstGeom>
+          <a:noFill/>
+        </p:spPr>
+        <p:txBody>
+          <a:bodyPr wrap="square">
+            <a:spAutoFit/>
+          </a:bodyPr>
+          <a:lstStyle/>
+          <a:p>
+            <a:r>
+              <a:rPr lang="ru-RU" dirty="0" sz="1500">
+                <a:solidFill>
+                  <a:srgbClr val="000000"/>
+                </a:solidFill>
+              </a:rPr>
+              <a:t xml:space="preserve">• Примеры по слайдам: </a:t>
+            </a:r>
+            <a:r>
+              <a:rPr sz="1400">
+                <a:solidFill>
+                  <a:srgbClr val="3366CC"/>
+                </a:solidFill>
+                <a:hlinkClick r:id="rId5"/>
+              </a:rPr>
+              <a:t>https://colab.research.google.com/github/gurovic/ml-lessons/blob/main/lessons/logisticheskaya_regressiya/code.ipynb</a:t>
+            </a:r>
+          </a:p>
+        </p:txBody>
+      </p:sp>
+      <p:sp>
+        <p:nvSpPr>
+          <p:cNvPr id="9" name="TextBox 8"/>
+          <p:cNvSpPr txBox="1"/>
+          <p:nvPr/>
+        </p:nvSpPr>
+        <p:spPr>
+          <a:xfrm>
+            <a:off x="640080" y="4178808"/>
+            <a:ext cx="6583680" cy="457200"/>
+          </a:xfrm>
+          <a:prstGeom prst="rect">
+            <a:avLst/>
+          </a:prstGeom>
+          <a:noFill/>
+        </p:spPr>
+        <p:txBody>
+          <a:bodyPr wrap="square">
+            <a:spAutoFit/>
+          </a:bodyPr>
+          <a:lstStyle/>
+          <a:p>
+            <a:r>
+              <a:rPr lang="ru-RU" dirty="0" sz="1500">
+                <a:solidFill>
+                  <a:srgbClr val="000000"/>
+                </a:solidFill>
+              </a:rPr>
+              <a:t xml:space="preserve">• Мини-проект: </a:t>
+            </a:r>
+            <a:r>
+              <a:rPr sz="1400">
+                <a:solidFill>
+                  <a:srgbClr val="3366CC"/>
+                </a:solidFill>
+                <a:hlinkClick r:id="rId6"/>
+              </a:rPr>
+              <a:t>https://colab.research.google.com/github/gurovic/ml-lessons/blob/main/lessons/logisticheskaya_regressiya/project.ipynb</a:t>
+            </a:r>
+          </a:p>
+        </p:txBody>
+      </p:sp>
+      <p:pic>
+        <p:nvPicPr>
+          <p:cNvPr id="10" name="Picture 9" descr="_qr_ref_19_0.png"/>
+          <p:cNvPicPr>
+            <a:picLocks noChangeAspect="1"/>
+          </p:cNvPicPr>
+          <p:nvPr/>
+        </p:nvPicPr>
+        <p:blipFill>
+          <a:blip r:embed="rId7"/>
+          <a:stretch>
+            <a:fillRect/>
+          </a:stretch>
+        </p:blipFill>
+        <p:spPr>
+          <a:xfrm>
+            <a:off x="8229600" y="1463040"/>
+            <a:ext cx="1051560" cy="1051560"/>
+          </a:xfrm>
+          <a:prstGeom prst="rect">
+            <a:avLst/>
+          </a:prstGeom>
+        </p:spPr>
+      </p:pic>
+      <p:sp>
+        <p:nvSpPr>
+          <p:cNvPr id="11" name="TextBox 10"/>
+          <p:cNvSpPr txBox="1"/>
+          <p:nvPr/>
+        </p:nvSpPr>
+        <p:spPr>
+          <a:xfrm>
+            <a:off x="8138160" y="2532888"/>
+            <a:ext cx="1417319" cy="274320"/>
+          </a:xfrm>
+          <a:prstGeom prst="rect">
+            <a:avLst/>
+          </a:prstGeom>
+          <a:noFill/>
+        </p:spPr>
+        <p:txBody>
+          <a:bodyPr wrap="none">
+            <a:spAutoFit/>
+          </a:bodyPr>
+          <a:lstStyle/>
+          <a:p>
+            <a:pPr algn="ctr">
+              <a:defRPr sz="1000">
+                <a:solidFill>
+                  <a:srgbClr val="555555"/>
+                </a:solidFill>
+              </a:defRPr>
+            </a:pPr>
+            <a:r>
+              <a:t>Примеры по слайдам</a:t>
+            </a:r>
+          </a:p>
+        </p:txBody>
+      </p:sp>
+      <p:pic>
+        <p:nvPicPr>
+          <p:cNvPr id="12" name="Picture 11" descr="_qr_ref_19_1.png"/>
+          <p:cNvPicPr>
+            <a:picLocks noChangeAspect="1"/>
+          </p:cNvPicPr>
+          <p:nvPr/>
+        </p:nvPicPr>
+        <p:blipFill>
+          <a:blip r:embed="rId8"/>
+          <a:stretch>
+            <a:fillRect/>
+          </a:stretch>
+        </p:blipFill>
+        <p:spPr>
+          <a:xfrm>
+            <a:off x="8229600" y="3063240"/>
+            <a:ext cx="1051560" cy="1051560"/>
+          </a:xfrm>
+          <a:prstGeom prst="rect">
+            <a:avLst/>
+          </a:prstGeom>
+        </p:spPr>
+      </p:pic>
+      <p:sp>
+        <p:nvSpPr>
+          <p:cNvPr id="13" name="TextBox 12"/>
+          <p:cNvSpPr txBox="1"/>
+          <p:nvPr/>
+        </p:nvSpPr>
+        <p:spPr>
+          <a:xfrm>
+            <a:off x="8138160" y="4133087"/>
+            <a:ext cx="1417319" cy="274320"/>
+          </a:xfrm>
+          <a:prstGeom prst="rect">
+            <a:avLst/>
+          </a:prstGeom>
+          <a:noFill/>
+        </p:spPr>
+        <p:txBody>
+          <a:bodyPr wrap="none">
+            <a:spAutoFit/>
+          </a:bodyPr>
+          <a:lstStyle/>
+          <a:p>
+            <a:pPr algn="ctr">
+              <a:defRPr sz="1000">
+                <a:solidFill>
+                  <a:srgbClr val="555555"/>
+                </a:solidFill>
+              </a:defRPr>
+            </a:pPr>
+            <a:r>
+              <a:t>Мини-проект</a:t>
+            </a:r>
+          </a:p>
+        </p:txBody>
+      </p:sp>
     </p:spTree>
   </p:cSld>
   <p:clrMapOvr>
@@ -7472,7 +8858,7 @@
         <p:spPr>
           <a:xfrm>
             <a:off x="640080" y="1371600"/>
-            <a:ext cx="6858000" cy="5029200"/>
+            <a:ext cx="6858000" cy="1810512"/>
           </a:xfrm>
           <a:prstGeom prst="rect">
             <a:avLst/>
@@ -7621,9 +9007,176 @@
           </a:p>
         </p:txBody>
       </p:sp>
+      <p:sp>
+        <p:nvSpPr>
+          <p:cNvPr id="4" name="Rectangle 3"/>
+          <p:cNvSpPr/>
+          <p:nvPr/>
+        </p:nvSpPr>
+        <p:spPr>
+          <a:xfrm>
+            <a:off x="640080" y="3291840"/>
+            <a:ext cx="6766560" cy="804672"/>
+          </a:xfrm>
+          <a:prstGeom prst="rect">
+            <a:avLst/>
+          </a:prstGeom>
+          <a:solidFill>
+            <a:srgbClr val="F5F5F5"/>
+          </a:solidFill>
+          <a:ln>
+            <a:solidFill>
+              <a:srgbClr val="DDDDDD"/>
+            </a:solidFill>
+          </a:ln>
+        </p:spPr>
+        <p:style>
+          <a:lnRef idx="1">
+            <a:schemeClr val="accent1"/>
+          </a:lnRef>
+          <a:fillRef idx="3">
+            <a:schemeClr val="accent1"/>
+          </a:fillRef>
+          <a:effectRef idx="2">
+            <a:schemeClr val="accent1"/>
+          </a:effectRef>
+          <a:fontRef idx="minor">
+            <a:schemeClr val="lt1"/>
+          </a:fontRef>
+        </p:style>
+        <p:txBody>
+          <a:bodyPr rtlCol="0" anchor="ctr"/>
+          <a:lstStyle/>
+          <a:p>
+            <a:pPr algn="ctr"/>
+          </a:p>
+        </p:txBody>
+      </p:sp>
+      <p:sp>
+        <p:nvSpPr>
+          <p:cNvPr id="5" name="TextBox 4"/>
+          <p:cNvSpPr txBox="1"/>
+          <p:nvPr/>
+        </p:nvSpPr>
+        <p:spPr>
+          <a:xfrm>
+            <a:off x="713231" y="3328416"/>
+            <a:ext cx="6620256" cy="731520"/>
+          </a:xfrm>
+          <a:prstGeom prst="rect">
+            <a:avLst/>
+          </a:prstGeom>
+          <a:noFill/>
+        </p:spPr>
+        <p:txBody>
+          <a:bodyPr wrap="square">
+            <a:noAutofit/>
+          </a:bodyPr>
+          <a:lstStyle/>
+          <a:p>
+            <a:pPr>
+              <a:spcAft>
+                <a:spcPts val="0"/>
+              </a:spcAft>
+              <a:defRPr sz="1100">
+                <a:solidFill>
+                  <a:srgbClr val="000000"/>
+                </a:solidFill>
+                <a:latin typeface="Consolas"/>
+              </a:defRPr>
+            </a:pPr>
+            <a:r>
+              <a:t>from sklearn.linear_model import LinearRegression</a:t>
+            </a:r>
+          </a:p>
+          <a:p>
+            <a:pPr>
+              <a:spcAft>
+                <a:spcPts val="0"/>
+              </a:spcAft>
+              <a:defRPr sz="1100">
+                <a:solidFill>
+                  <a:srgbClr val="000000"/>
+                </a:solidFill>
+                <a:latin typeface="Consolas"/>
+              </a:defRPr>
+            </a:pPr>
+            <a:r>
+              <a:t>lr = LinearRegression().fit(X, y_binary)</a:t>
+            </a:r>
+          </a:p>
+          <a:p>
+            <a:pPr>
+              <a:spcAft>
+                <a:spcPts val="0"/>
+              </a:spcAft>
+              <a:defRPr sz="1100">
+                <a:solidFill>
+                  <a:srgbClr val="000000"/>
+                </a:solidFill>
+                <a:latin typeface="Consolas"/>
+              </a:defRPr>
+            </a:pPr>
+            <a:r>
+              <a:t>pred = lr.predict(X_new)</a:t>
+            </a:r>
+          </a:p>
+          <a:p>
+            <a:pPr>
+              <a:spcAft>
+                <a:spcPts val="0"/>
+              </a:spcAft>
+              <a:defRPr sz="1100">
+                <a:solidFill>
+                  <a:srgbClr val="000000"/>
+                </a:solidFill>
+                <a:latin typeface="Consolas"/>
+              </a:defRPr>
+            </a:pPr>
+            <a:r>
+              <a:t>print(pred.min(), pred.max())  # часто вне [0, 1]</a:t>
+            </a:r>
+          </a:p>
+        </p:txBody>
+      </p:sp>
+      <p:sp>
+        <p:nvSpPr>
+          <p:cNvPr id="6" name="TextBox 5"/>
+          <p:cNvSpPr txBox="1"/>
+          <p:nvPr/>
+        </p:nvSpPr>
+        <p:spPr>
+          <a:xfrm>
+            <a:off x="640080" y="4151376"/>
+            <a:ext cx="6766560" cy="201168"/>
+          </a:xfrm>
+          <a:prstGeom prst="rect">
+            <a:avLst/>
+          </a:prstGeom>
+          <a:noFill/>
+        </p:spPr>
+        <p:txBody>
+          <a:bodyPr wrap="none">
+            <a:spAutoFit/>
+          </a:bodyPr>
+          <a:lstStyle/>
+          <a:p>
+            <a:pPr algn="l">
+              <a:defRPr sz="1000" i="1">
+                <a:solidFill>
+                  <a:srgbClr val="555555"/>
+                </a:solidFill>
+              </a:defRPr>
+            </a:pPr>
+            <a:r>
+              <a:t>МНК на классах 0/1</a:t>
+            </a:r>
+          </a:p>
+        </p:txBody>
+      </p:sp>
       <p:pic>
         <p:nvPicPr>
-          <p:cNvPr id="4" name="Picture 3" descr="linear_reg_on_classification.png"/>
+          <p:cNvPr id="7" name="Picture 6" descr="linear_reg_on_classification.png"/>
           <p:cNvPicPr>
             <a:picLocks noChangeAspect="1"/>
           </p:cNvPicPr>
@@ -7705,7 +9258,7 @@
         <p:spPr>
           <a:xfrm>
             <a:off x="640080" y="1371600"/>
-            <a:ext cx="6858000" cy="5029200"/>
+            <a:ext cx="6858000" cy="1810512"/>
           </a:xfrm>
           <a:prstGeom prst="rect">
             <a:avLst/>
@@ -7978,9 +9531,192 @@
           </a:p>
         </p:txBody>
       </p:sp>
+      <p:sp>
+        <p:nvSpPr>
+          <p:cNvPr id="4" name="Rectangle 3"/>
+          <p:cNvSpPr/>
+          <p:nvPr/>
+        </p:nvSpPr>
+        <p:spPr>
+          <a:xfrm>
+            <a:off x="640080" y="3291840"/>
+            <a:ext cx="6766560" cy="978407"/>
+          </a:xfrm>
+          <a:prstGeom prst="rect">
+            <a:avLst/>
+          </a:prstGeom>
+          <a:solidFill>
+            <a:srgbClr val="F5F5F5"/>
+          </a:solidFill>
+          <a:ln>
+            <a:solidFill>
+              <a:srgbClr val="DDDDDD"/>
+            </a:solidFill>
+          </a:ln>
+        </p:spPr>
+        <p:style>
+          <a:lnRef idx="1">
+            <a:schemeClr val="accent1"/>
+          </a:lnRef>
+          <a:fillRef idx="3">
+            <a:schemeClr val="accent1"/>
+          </a:fillRef>
+          <a:effectRef idx="2">
+            <a:schemeClr val="accent1"/>
+          </a:effectRef>
+          <a:fontRef idx="minor">
+            <a:schemeClr val="lt1"/>
+          </a:fontRef>
+        </p:style>
+        <p:txBody>
+          <a:bodyPr rtlCol="0" anchor="ctr"/>
+          <a:lstStyle/>
+          <a:p>
+            <a:pPr algn="ctr"/>
+          </a:p>
+        </p:txBody>
+      </p:sp>
+      <p:sp>
+        <p:nvSpPr>
+          <p:cNvPr id="5" name="TextBox 4"/>
+          <p:cNvSpPr txBox="1"/>
+          <p:nvPr/>
+        </p:nvSpPr>
+        <p:spPr>
+          <a:xfrm>
+            <a:off x="713231" y="3328416"/>
+            <a:ext cx="6620256" cy="905255"/>
+          </a:xfrm>
+          <a:prstGeom prst="rect">
+            <a:avLst/>
+          </a:prstGeom>
+          <a:noFill/>
+        </p:spPr>
+        <p:txBody>
+          <a:bodyPr wrap="square">
+            <a:noAutofit/>
+          </a:bodyPr>
+          <a:lstStyle/>
+          <a:p>
+            <a:pPr>
+              <a:spcAft>
+                <a:spcPts val="0"/>
+              </a:spcAft>
+              <a:defRPr sz="1100">
+                <a:solidFill>
+                  <a:srgbClr val="000000"/>
+                </a:solidFill>
+                <a:latin typeface="Consolas"/>
+              </a:defRPr>
+            </a:pPr>
+            <a:r>
+              <a:t>import numpy as np</a:t>
+            </a:r>
+          </a:p>
+          <a:p>
+            <a:pPr>
+              <a:spcAft>
+                <a:spcPts val="0"/>
+              </a:spcAft>
+              <a:defRPr sz="1100">
+                <a:solidFill>
+                  <a:srgbClr val="000000"/>
+                </a:solidFill>
+                <a:latin typeface="Consolas"/>
+              </a:defRPr>
+            </a:pPr>
+            <a:r>
+              <a:t>def sigmoid(z):</a:t>
+            </a:r>
+          </a:p>
+          <a:p>
+            <a:pPr>
+              <a:spcAft>
+                <a:spcPts val="0"/>
+              </a:spcAft>
+              <a:defRPr sz="1100">
+                <a:solidFill>
+                  <a:srgbClr val="000000"/>
+                </a:solidFill>
+                <a:latin typeface="Consolas"/>
+              </a:defRPr>
+            </a:pPr>
+            <a:r>
+              <a:t>    return 1 / (1 + np.exp(-z))</a:t>
+            </a:r>
+          </a:p>
+          <a:p>
+            <a:pPr>
+              <a:spcAft>
+                <a:spcPts val="0"/>
+              </a:spcAft>
+              <a:defRPr sz="1100">
+                <a:solidFill>
+                  <a:srgbClr val="000000"/>
+                </a:solidFill>
+                <a:latin typeface="Consolas"/>
+              </a:defRPr>
+            </a:pPr>
+            <a:r>
+              <a:t>z = np.linspace(-6, 6, 100)</a:t>
+            </a:r>
+          </a:p>
+          <a:p>
+            <a:pPr>
+              <a:spcAft>
+                <a:spcPts val="0"/>
+              </a:spcAft>
+              <a:defRPr sz="1100">
+                <a:solidFill>
+                  <a:srgbClr val="000000"/>
+                </a:solidFill>
+                <a:latin typeface="Consolas"/>
+              </a:defRPr>
+            </a:pPr>
+            <a:r>
+              <a:t>p = sigmoid(z)  # всегда в (0, 1)</a:t>
+            </a:r>
+          </a:p>
+        </p:txBody>
+      </p:sp>
+      <p:sp>
+        <p:nvSpPr>
+          <p:cNvPr id="6" name="TextBox 5"/>
+          <p:cNvSpPr txBox="1"/>
+          <p:nvPr/>
+        </p:nvSpPr>
+        <p:spPr>
+          <a:xfrm>
+            <a:off x="640080" y="4325112"/>
+            <a:ext cx="6766560" cy="201168"/>
+          </a:xfrm>
+          <a:prstGeom prst="rect">
+            <a:avLst/>
+          </a:prstGeom>
+          <a:noFill/>
+        </p:spPr>
+        <p:txBody>
+          <a:bodyPr wrap="none">
+            <a:spAutoFit/>
+          </a:bodyPr>
+          <a:lstStyle/>
+          <a:p>
+            <a:pPr algn="l">
+              <a:defRPr sz="1000" i="1">
+                <a:solidFill>
+                  <a:srgbClr val="555555"/>
+                </a:solidFill>
+              </a:defRPr>
+            </a:pPr>
+            <a:r>
+              <a:t>Функция сигмоиды</a:t>
+            </a:r>
+          </a:p>
+        </p:txBody>
+      </p:sp>
       <p:pic>
         <p:nvPicPr>
-          <p:cNvPr id="4" name="Picture 3" descr="sigmoid_curve.png"/>
+          <p:cNvPr id="7" name="Picture 6" descr="sigmoid_curve.png"/>
           <p:cNvPicPr>
             <a:picLocks noChangeAspect="1"/>
           </p:cNvPicPr>
@@ -8062,7 +9798,7 @@
         <p:spPr>
           <a:xfrm>
             <a:off x="640080" y="1371600"/>
-            <a:ext cx="6858000" cy="5029200"/>
+            <a:ext cx="6858000" cy="1810512"/>
           </a:xfrm>
           <a:prstGeom prst="rect">
             <a:avLst/>
@@ -8316,7 +10052,7 @@
         <p:spPr>
           <a:xfrm>
             <a:off x="640080" y="1371600"/>
-            <a:ext cx="6858000" cy="5029200"/>
+            <a:ext cx="6858000" cy="1810512"/>
           </a:xfrm>
           <a:prstGeom prst="rect">
             <a:avLst/>
@@ -8673,7 +10409,7 @@
         <p:spPr>
           <a:xfrm>
             <a:off x="640080" y="1371600"/>
-            <a:ext cx="6858000" cy="5029200"/>
+            <a:ext cx="6858000" cy="1810512"/>
           </a:xfrm>
           <a:prstGeom prst="rect">
             <a:avLst/>
@@ -8965,9 +10701,192 @@
           </a:p>
         </p:txBody>
       </p:sp>
+      <p:sp>
+        <p:nvSpPr>
+          <p:cNvPr id="4" name="Rectangle 3"/>
+          <p:cNvSpPr/>
+          <p:nvPr/>
+        </p:nvSpPr>
+        <p:spPr>
+          <a:xfrm>
+            <a:off x="640080" y="3291840"/>
+            <a:ext cx="6766560" cy="978407"/>
+          </a:xfrm>
+          <a:prstGeom prst="rect">
+            <a:avLst/>
+          </a:prstGeom>
+          <a:solidFill>
+            <a:srgbClr val="F5F5F5"/>
+          </a:solidFill>
+          <a:ln>
+            <a:solidFill>
+              <a:srgbClr val="DDDDDD"/>
+            </a:solidFill>
+          </a:ln>
+        </p:spPr>
+        <p:style>
+          <a:lnRef idx="1">
+            <a:schemeClr val="accent1"/>
+          </a:lnRef>
+          <a:fillRef idx="3">
+            <a:schemeClr val="accent1"/>
+          </a:fillRef>
+          <a:effectRef idx="2">
+            <a:schemeClr val="accent1"/>
+          </a:effectRef>
+          <a:fontRef idx="minor">
+            <a:schemeClr val="lt1"/>
+          </a:fontRef>
+        </p:style>
+        <p:txBody>
+          <a:bodyPr rtlCol="0" anchor="ctr"/>
+          <a:lstStyle/>
+          <a:p>
+            <a:pPr algn="ctr"/>
+          </a:p>
+        </p:txBody>
+      </p:sp>
+      <p:sp>
+        <p:nvSpPr>
+          <p:cNvPr id="5" name="TextBox 4"/>
+          <p:cNvSpPr txBox="1"/>
+          <p:nvPr/>
+        </p:nvSpPr>
+        <p:spPr>
+          <a:xfrm>
+            <a:off x="713231" y="3328416"/>
+            <a:ext cx="6620256" cy="905255"/>
+          </a:xfrm>
+          <a:prstGeom prst="rect">
+            <a:avLst/>
+          </a:prstGeom>
+          <a:noFill/>
+        </p:spPr>
+        <p:txBody>
+          <a:bodyPr wrap="square">
+            <a:noAutofit/>
+          </a:bodyPr>
+          <a:lstStyle/>
+          <a:p>
+            <a:pPr>
+              <a:spcAft>
+                <a:spcPts val="0"/>
+              </a:spcAft>
+              <a:defRPr sz="1100">
+                <a:solidFill>
+                  <a:srgbClr val="000000"/>
+                </a:solidFill>
+                <a:latin typeface="Consolas"/>
+              </a:defRPr>
+            </a:pPr>
+            <a:r>
+              <a:t>from sklearn.metrics import log_loss</a:t>
+            </a:r>
+          </a:p>
+          <a:p>
+            <a:pPr>
+              <a:spcAft>
+                <a:spcPts val="0"/>
+              </a:spcAft>
+              <a:defRPr sz="1100">
+                <a:solidFill>
+                  <a:srgbClr val="000000"/>
+                </a:solidFill>
+                <a:latin typeface="Consolas"/>
+              </a:defRPr>
+            </a:pPr>
+            <a:r>
+              <a:t>y_true = [0, 1, 1, 0]</a:t>
+            </a:r>
+          </a:p>
+          <a:p>
+            <a:pPr>
+              <a:spcAft>
+                <a:spcPts val="0"/>
+              </a:spcAft>
+              <a:defRPr sz="1100">
+                <a:solidFill>
+                  <a:srgbClr val="000000"/>
+                </a:solidFill>
+                <a:latin typeface="Consolas"/>
+              </a:defRPr>
+            </a:pPr>
+            <a:r>
+              <a:t>y_prob = [0.1, 0.9, 0.8, 0.3]</a:t>
+            </a:r>
+          </a:p>
+          <a:p>
+            <a:pPr>
+              <a:spcAft>
+                <a:spcPts val="0"/>
+              </a:spcAft>
+              <a:defRPr sz="1100">
+                <a:solidFill>
+                  <a:srgbClr val="000000"/>
+                </a:solidFill>
+                <a:latin typeface="Consolas"/>
+              </a:defRPr>
+            </a:pPr>
+            <a:r>
+              <a:t>loss = log_loss(y_true, y_prob)</a:t>
+            </a:r>
+          </a:p>
+          <a:p>
+            <a:pPr>
+              <a:spcAft>
+                <a:spcPts val="0"/>
+              </a:spcAft>
+              <a:defRPr sz="1100">
+                <a:solidFill>
+                  <a:srgbClr val="000000"/>
+                </a:solidFill>
+                <a:latin typeface="Consolas"/>
+              </a:defRPr>
+            </a:pPr>
+            <a:r>
+              <a:t>print(f'LogLoss = {loss:.3f}')</a:t>
+            </a:r>
+          </a:p>
+        </p:txBody>
+      </p:sp>
+      <p:sp>
+        <p:nvSpPr>
+          <p:cNvPr id="6" name="TextBox 5"/>
+          <p:cNvSpPr txBox="1"/>
+          <p:nvPr/>
+        </p:nvSpPr>
+        <p:spPr>
+          <a:xfrm>
+            <a:off x="640080" y="4325112"/>
+            <a:ext cx="6766560" cy="201168"/>
+          </a:xfrm>
+          <a:prstGeom prst="rect">
+            <a:avLst/>
+          </a:prstGeom>
+          <a:noFill/>
+        </p:spPr>
+        <p:txBody>
+          <a:bodyPr wrap="none">
+            <a:spAutoFit/>
+          </a:bodyPr>
+          <a:lstStyle/>
+          <a:p>
+            <a:pPr algn="l">
+              <a:defRPr sz="1000" i="1">
+                <a:solidFill>
+                  <a:srgbClr val="555555"/>
+                </a:solidFill>
+              </a:defRPr>
+            </a:pPr>
+            <a:r>
+              <a:t>Штраф за уверенные ошибки</a:t>
+            </a:r>
+          </a:p>
+        </p:txBody>
+      </p:sp>
       <p:pic>
         <p:nvPicPr>
-          <p:cNvPr id="4" name="Picture 3" descr="logloss_curves.png"/>
+          <p:cNvPr id="7" name="Picture 6" descr="logloss_curves.png"/>
           <p:cNvPicPr>
             <a:picLocks noChangeAspect="1"/>
           </p:cNvPicPr>
@@ -9049,7 +10968,7 @@
         <p:spPr>
           <a:xfrm>
             <a:off x="640080" y="1371600"/>
-            <a:ext cx="6858000" cy="5029200"/>
+            <a:ext cx="6858000" cy="1810512"/>
           </a:xfrm>
           <a:prstGeom prst="rect">
             <a:avLst/>
@@ -9234,9 +11153,176 @@
           </a:p>
         </p:txBody>
       </p:sp>
+      <p:sp>
+        <p:nvSpPr>
+          <p:cNvPr id="4" name="Rectangle 3"/>
+          <p:cNvSpPr/>
+          <p:nvPr/>
+        </p:nvSpPr>
+        <p:spPr>
+          <a:xfrm>
+            <a:off x="640080" y="3291840"/>
+            <a:ext cx="6766560" cy="804672"/>
+          </a:xfrm>
+          <a:prstGeom prst="rect">
+            <a:avLst/>
+          </a:prstGeom>
+          <a:solidFill>
+            <a:srgbClr val="F5F5F5"/>
+          </a:solidFill>
+          <a:ln>
+            <a:solidFill>
+              <a:srgbClr val="DDDDDD"/>
+            </a:solidFill>
+          </a:ln>
+        </p:spPr>
+        <p:style>
+          <a:lnRef idx="1">
+            <a:schemeClr val="accent1"/>
+          </a:lnRef>
+          <a:fillRef idx="3">
+            <a:schemeClr val="accent1"/>
+          </a:fillRef>
+          <a:effectRef idx="2">
+            <a:schemeClr val="accent1"/>
+          </a:effectRef>
+          <a:fontRef idx="minor">
+            <a:schemeClr val="lt1"/>
+          </a:fontRef>
+        </p:style>
+        <p:txBody>
+          <a:bodyPr rtlCol="0" anchor="ctr"/>
+          <a:lstStyle/>
+          <a:p>
+            <a:pPr algn="ctr"/>
+          </a:p>
+        </p:txBody>
+      </p:sp>
+      <p:sp>
+        <p:nvSpPr>
+          <p:cNvPr id="5" name="TextBox 4"/>
+          <p:cNvSpPr txBox="1"/>
+          <p:nvPr/>
+        </p:nvSpPr>
+        <p:spPr>
+          <a:xfrm>
+            <a:off x="713231" y="3328416"/>
+            <a:ext cx="6620256" cy="731520"/>
+          </a:xfrm>
+          <a:prstGeom prst="rect">
+            <a:avLst/>
+          </a:prstGeom>
+          <a:noFill/>
+        </p:spPr>
+        <p:txBody>
+          <a:bodyPr wrap="square">
+            <a:noAutofit/>
+          </a:bodyPr>
+          <a:lstStyle/>
+          <a:p>
+            <a:pPr>
+              <a:spcAft>
+                <a:spcPts val="0"/>
+              </a:spcAft>
+              <a:defRPr sz="1100">
+                <a:solidFill>
+                  <a:srgbClr val="000000"/>
+                </a:solidFill>
+                <a:latin typeface="Consolas"/>
+              </a:defRPr>
+            </a:pPr>
+            <a:r>
+              <a:t>from sklearn.linear_model import LogisticRegression</a:t>
+            </a:r>
+          </a:p>
+          <a:p>
+            <a:pPr>
+              <a:spcAft>
+                <a:spcPts val="0"/>
+              </a:spcAft>
+              <a:defRPr sz="1100">
+                <a:solidFill>
+                  <a:srgbClr val="000000"/>
+                </a:solidFill>
+                <a:latin typeface="Consolas"/>
+              </a:defRPr>
+            </a:pPr>
+            <a:r>
+              <a:t>clf = LogisticRegression(max_iter=1000, random_state=42)</a:t>
+            </a:r>
+          </a:p>
+          <a:p>
+            <a:pPr>
+              <a:spcAft>
+                <a:spcPts val="0"/>
+              </a:spcAft>
+              <a:defRPr sz="1100">
+                <a:solidFill>
+                  <a:srgbClr val="000000"/>
+                </a:solidFill>
+                <a:latin typeface="Consolas"/>
+              </a:defRPr>
+            </a:pPr>
+            <a:r>
+              <a:t>clf.fit(X_train, y_train)</a:t>
+            </a:r>
+          </a:p>
+          <a:p>
+            <a:pPr>
+              <a:spcAft>
+                <a:spcPts val="0"/>
+              </a:spcAft>
+              <a:defRPr sz="1100">
+                <a:solidFill>
+                  <a:srgbClr val="000000"/>
+                </a:solidFill>
+                <a:latin typeface="Consolas"/>
+              </a:defRPr>
+            </a:pPr>
+            <a:r>
+              <a:t>proba = clf.predict_proba(X_test)[:, 1]</a:t>
+            </a:r>
+          </a:p>
+        </p:txBody>
+      </p:sp>
+      <p:sp>
+        <p:nvSpPr>
+          <p:cNvPr id="6" name="TextBox 5"/>
+          <p:cNvSpPr txBox="1"/>
+          <p:nvPr/>
+        </p:nvSpPr>
+        <p:spPr>
+          <a:xfrm>
+            <a:off x="640080" y="4151376"/>
+            <a:ext cx="6766560" cy="201168"/>
+          </a:xfrm>
+          <a:prstGeom prst="rect">
+            <a:avLst/>
+          </a:prstGeom>
+          <a:noFill/>
+        </p:spPr>
+        <p:txBody>
+          <a:bodyPr wrap="none">
+            <a:spAutoFit/>
+          </a:bodyPr>
+          <a:lstStyle/>
+          <a:p>
+            <a:pPr algn="l">
+              <a:defRPr sz="1000" i="1">
+                <a:solidFill>
+                  <a:srgbClr val="555555"/>
+                </a:solidFill>
+              </a:defRPr>
+            </a:pPr>
+            <a:r>
+              <a:t>Оптимизация в sklearn</a:t>
+            </a:r>
+          </a:p>
+        </p:txBody>
+      </p:sp>
       <p:pic>
         <p:nvPicPr>
-          <p:cNvPr id="4" name="Picture 3" descr="logreg_gradient_descent.png"/>
+          <p:cNvPr id="7" name="Picture 6" descr="logreg_gradient_descent.png"/>
           <p:cNvPicPr>
             <a:picLocks noChangeAspect="1"/>
           </p:cNvPicPr>
@@ -9318,7 +11404,7 @@
         <p:spPr>
           <a:xfrm>
             <a:off x="640080" y="1371600"/>
-            <a:ext cx="6858000" cy="5029200"/>
+            <a:ext cx="6858000" cy="1810512"/>
           </a:xfrm>
           <a:prstGeom prst="rect">
             <a:avLst/>

--- a/lessons/logisticheskaya_regressiya/presentation.pptx
+++ b/lessons/logisticheskaya_regressiya/presentation.pptx
@@ -5204,7 +5204,7 @@
         <p:spPr>
           <a:xfrm>
             <a:off x="640080" y="1371600"/>
-            <a:ext cx="6858000" cy="1810512"/>
+            <a:ext cx="6858000" cy="3209544"/>
           </a:xfrm>
           <a:prstGeom prst="rect">
             <a:avLst/>
@@ -5213,7 +5213,7 @@
         </p:spPr>
         <p:txBody>
           <a:bodyPr wrap="square">
-            <a:spAutoFit/>
+            <a:normAutofit/>
           </a:bodyPr>
           <a:lstStyle/>
           <a:p>
@@ -5334,7 +5334,7 @@
         </p:nvSpPr>
         <p:spPr>
           <a:xfrm>
-            <a:off x="640080" y="3291840"/>
+            <a:off x="640080" y="4690872"/>
             <a:ext cx="6766560" cy="804672"/>
           </a:xfrm>
           <a:prstGeom prst="rect">
@@ -5379,7 +5379,7 @@
         </p:nvSpPr>
         <p:spPr>
           <a:xfrm>
-            <a:off x="713231" y="3328416"/>
+            <a:off x="713231" y="4727448"/>
             <a:ext cx="6620256" cy="731520"/>
           </a:xfrm>
           <a:prstGeom prst="rect">
@@ -5388,7 +5388,7 @@
           <a:noFill/>
         </p:spPr>
         <p:txBody>
-          <a:bodyPr wrap="square">
+          <a:bodyPr wrap="none">
             <a:noAutofit/>
           </a:bodyPr>
           <a:lstStyle/>
@@ -5397,14 +5397,14 @@
               <a:spcAft>
                 <a:spcPts val="0"/>
               </a:spcAft>
-              <a:defRPr sz="1100">
+            </a:pPr>
+            <a:r>
+              <a:rPr sz="1100">
                 <a:solidFill>
                   <a:srgbClr val="000000"/>
                 </a:solidFill>
                 <a:latin typeface="Consolas"/>
-              </a:defRPr>
-            </a:pPr>
-            <a:r>
+              </a:rPr>
               <a:t>from sklearn.metrics import roc_curve, auc</a:t>
             </a:r>
           </a:p>
@@ -5413,14 +5413,14 @@
               <a:spcAft>
                 <a:spcPts val="0"/>
               </a:spcAft>
-              <a:defRPr sz="1100">
+            </a:pPr>
+            <a:r>
+              <a:rPr sz="1100">
                 <a:solidFill>
                   <a:srgbClr val="000000"/>
                 </a:solidFill>
                 <a:latin typeface="Consolas"/>
-              </a:defRPr>
-            </a:pPr>
-            <a:r>
+              </a:rPr>
               <a:t>fpr, tpr, _ = roc_curve(y_test, y_score)</a:t>
             </a:r>
           </a:p>
@@ -5429,14 +5429,14 @@
               <a:spcAft>
                 <a:spcPts val="0"/>
               </a:spcAft>
-              <a:defRPr sz="1100">
+            </a:pPr>
+            <a:r>
+              <a:rPr sz="1100">
                 <a:solidFill>
                   <a:srgbClr val="000000"/>
                 </a:solidFill>
                 <a:latin typeface="Consolas"/>
-              </a:defRPr>
-            </a:pPr>
-            <a:r>
+              </a:rPr>
               <a:t>roc_auc = auc(fpr, tpr)</a:t>
             </a:r>
           </a:p>
@@ -5445,14 +5445,14 @@
               <a:spcAft>
                 <a:spcPts val="0"/>
               </a:spcAft>
-              <a:defRPr sz="1100">
+            </a:pPr>
+            <a:r>
+              <a:rPr sz="1100">
                 <a:solidFill>
                   <a:srgbClr val="000000"/>
                 </a:solidFill>
                 <a:latin typeface="Consolas"/>
-              </a:defRPr>
-            </a:pPr>
-            <a:r>
+              </a:rPr>
               <a:t>print(f'AUC-ROC = {roc_auc:.3f}')</a:t>
             </a:r>
           </a:p>
@@ -5466,7 +5466,7 @@
         </p:nvSpPr>
         <p:spPr>
           <a:xfrm>
-            <a:off x="640080" y="4151376"/>
+            <a:off x="640080" y="5550408"/>
             <a:ext cx="6766560" cy="201168"/>
           </a:xfrm>
           <a:prstGeom prst="rect">
@@ -6209,7 +6209,7 @@
         <p:spPr>
           <a:xfrm>
             <a:off x="640080" y="1371600"/>
-            <a:ext cx="6858000" cy="1810512"/>
+            <a:ext cx="6858000" cy="3209544"/>
           </a:xfrm>
           <a:prstGeom prst="rect">
             <a:avLst/>
@@ -6218,7 +6218,7 @@
         </p:spPr>
         <p:txBody>
           <a:bodyPr wrap="square">
-            <a:spAutoFit/>
+            <a:normAutofit/>
           </a:bodyPr>
           <a:lstStyle/>
           <a:p>
@@ -6323,7 +6323,7 @@
         </p:nvSpPr>
         <p:spPr>
           <a:xfrm>
-            <a:off x="640080" y="3291840"/>
+            <a:off x="640080" y="4690872"/>
             <a:ext cx="6766560" cy="804672"/>
           </a:xfrm>
           <a:prstGeom prst="rect">
@@ -6368,7 +6368,7 @@
         </p:nvSpPr>
         <p:spPr>
           <a:xfrm>
-            <a:off x="713231" y="3328416"/>
+            <a:off x="713231" y="4727448"/>
             <a:ext cx="6620256" cy="731520"/>
           </a:xfrm>
           <a:prstGeom prst="rect">
@@ -6377,7 +6377,7 @@
           <a:noFill/>
         </p:spPr>
         <p:txBody>
-          <a:bodyPr wrap="square">
+          <a:bodyPr wrap="none">
             <a:noAutofit/>
           </a:bodyPr>
           <a:lstStyle/>
@@ -6386,14 +6386,14 @@
               <a:spcAft>
                 <a:spcPts val="0"/>
               </a:spcAft>
-              <a:defRPr sz="1100">
+            </a:pPr>
+            <a:r>
+              <a:rPr sz="1100">
                 <a:solidFill>
                   <a:srgbClr val="000000"/>
                 </a:solidFill>
                 <a:latin typeface="Consolas"/>
-              </a:defRPr>
-            </a:pPr>
-            <a:r>
+              </a:rPr>
               <a:t>from sklearn.linear_model import LogisticRegression</a:t>
             </a:r>
           </a:p>
@@ -6402,14 +6402,14 @@
               <a:spcAft>
                 <a:spcPts val="0"/>
               </a:spcAft>
-              <a:defRPr sz="1100">
+            </a:pPr>
+            <a:r>
+              <a:rPr sz="1100">
                 <a:solidFill>
                   <a:srgbClr val="000000"/>
                 </a:solidFill>
                 <a:latin typeface="Consolas"/>
-              </a:defRPr>
-            </a:pPr>
-            <a:r>
+              </a:rPr>
               <a:t>clf = LogisticRegression(C=1.0, random_state=42)</a:t>
             </a:r>
           </a:p>
@@ -6418,14 +6418,14 @@
               <a:spcAft>
                 <a:spcPts val="0"/>
               </a:spcAft>
-              <a:defRPr sz="1100">
+            </a:pPr>
+            <a:r>
+              <a:rPr sz="1100">
                 <a:solidFill>
                   <a:srgbClr val="000000"/>
                 </a:solidFill>
                 <a:latin typeface="Consolas"/>
-              </a:defRPr>
-            </a:pPr>
-            <a:r>
+              </a:rPr>
               <a:t>clf.fit(X_train, y_train)</a:t>
             </a:r>
           </a:p>
@@ -6434,14 +6434,14 @@
               <a:spcAft>
                 <a:spcPts val="0"/>
               </a:spcAft>
-              <a:defRPr sz="1100">
+            </a:pPr>
+            <a:r>
+              <a:rPr sz="1100">
                 <a:solidFill>
                   <a:srgbClr val="000000"/>
                 </a:solidFill>
                 <a:latin typeface="Consolas"/>
-              </a:defRPr>
-            </a:pPr>
-            <a:r>
+              </a:rPr>
               <a:t>y_pred = clf.predict(X_test)</a:t>
             </a:r>
           </a:p>
@@ -6455,7 +6455,7 @@
         </p:nvSpPr>
         <p:spPr>
           <a:xfrm>
-            <a:off x="640080" y="4151376"/>
+            <a:off x="640080" y="5550408"/>
             <a:ext cx="6766560" cy="201168"/>
           </a:xfrm>
           <a:prstGeom prst="rect">
@@ -6566,7 +6566,7 @@
         <p:spPr>
           <a:xfrm>
             <a:off x="640080" y="1371600"/>
-            <a:ext cx="6858000" cy="1810512"/>
+            <a:ext cx="6858000" cy="3035807"/>
           </a:xfrm>
           <a:prstGeom prst="rect">
             <a:avLst/>
@@ -6575,7 +6575,7 @@
         </p:spPr>
         <p:txBody>
           <a:bodyPr wrap="square">
-            <a:spAutoFit/>
+            <a:normAutofit/>
           </a:bodyPr>
           <a:lstStyle/>
           <a:p>
@@ -6672,7 +6672,7 @@
         </p:nvSpPr>
         <p:spPr>
           <a:xfrm>
-            <a:off x="640080" y="3291840"/>
+            <a:off x="640080" y="4517136"/>
             <a:ext cx="6766560" cy="978407"/>
           </a:xfrm>
           <a:prstGeom prst="rect">
@@ -6717,7 +6717,7 @@
         </p:nvSpPr>
         <p:spPr>
           <a:xfrm>
-            <a:off x="713231" y="3328416"/>
+            <a:off x="713231" y="4553712"/>
             <a:ext cx="6620256" cy="905255"/>
           </a:xfrm>
           <a:prstGeom prst="rect">
@@ -6726,7 +6726,7 @@
           <a:noFill/>
         </p:spPr>
         <p:txBody>
-          <a:bodyPr wrap="square">
+          <a:bodyPr wrap="none">
             <a:noAutofit/>
           </a:bodyPr>
           <a:lstStyle/>
@@ -6735,14 +6735,14 @@
               <a:spcAft>
                 <a:spcPts val="0"/>
               </a:spcAft>
-              <a:defRPr sz="1100">
+            </a:pPr>
+            <a:r>
+              <a:rPr sz="1100">
                 <a:solidFill>
                   <a:srgbClr val="000000"/>
                 </a:solidFill>
                 <a:latin typeface="Consolas"/>
-              </a:defRPr>
-            </a:pPr>
-            <a:r>
+              </a:rPr>
               <a:t>clf = LogisticRegression(</a:t>
             </a:r>
           </a:p>
@@ -6751,14 +6751,14 @@
               <a:spcAft>
                 <a:spcPts val="0"/>
               </a:spcAft>
-              <a:defRPr sz="1100">
+            </a:pPr>
+            <a:r>
+              <a:rPr sz="1100">
                 <a:solidFill>
                   <a:srgbClr val="000000"/>
                 </a:solidFill>
                 <a:latin typeface="Consolas"/>
-              </a:defRPr>
-            </a:pPr>
-            <a:r>
+              </a:rPr>
               <a:t>    class_weight='balanced', random_state=42</a:t>
             </a:r>
           </a:p>
@@ -6767,14 +6767,14 @@
               <a:spcAft>
                 <a:spcPts val="0"/>
               </a:spcAft>
-              <a:defRPr sz="1100">
+            </a:pPr>
+            <a:r>
+              <a:rPr sz="1100">
                 <a:solidFill>
                   <a:srgbClr val="000000"/>
                 </a:solidFill>
                 <a:latin typeface="Consolas"/>
-              </a:defRPr>
-            </a:pPr>
-            <a:r>
+              </a:rPr>
               <a:t>)</a:t>
             </a:r>
           </a:p>
@@ -6783,14 +6783,14 @@
               <a:spcAft>
                 <a:spcPts val="0"/>
               </a:spcAft>
-              <a:defRPr sz="1100">
+            </a:pPr>
+            <a:r>
+              <a:rPr sz="1100">
                 <a:solidFill>
                   <a:srgbClr val="000000"/>
                 </a:solidFill>
                 <a:latin typeface="Consolas"/>
-              </a:defRPr>
-            </a:pPr>
-            <a:r>
+              </a:rPr>
               <a:t>clf.fit(X_train, y_train)</a:t>
             </a:r>
           </a:p>
@@ -6799,14 +6799,14 @@
               <a:spcAft>
                 <a:spcPts val="0"/>
               </a:spcAft>
-              <a:defRPr sz="1100">
+            </a:pPr>
+            <a:r>
+              <a:rPr sz="1100">
                 <a:solidFill>
                   <a:srgbClr val="000000"/>
                 </a:solidFill>
                 <a:latin typeface="Consolas"/>
-              </a:defRPr>
-            </a:pPr>
-            <a:r>
+              </a:rPr>
               <a:t># веса классов подобраны автоматически</a:t>
             </a:r>
           </a:p>
@@ -6820,7 +6820,7 @@
         </p:nvSpPr>
         <p:spPr>
           <a:xfrm>
-            <a:off x="640080" y="4325112"/>
+            <a:off x="640080" y="5550407"/>
             <a:ext cx="6766560" cy="201168"/>
           </a:xfrm>
           <a:prstGeom prst="rect">
@@ -6931,7 +6931,7 @@
         <p:spPr>
           <a:xfrm>
             <a:off x="640080" y="1371600"/>
-            <a:ext cx="6858000" cy="1810512"/>
+            <a:ext cx="6858000" cy="3209544"/>
           </a:xfrm>
           <a:prstGeom prst="rect">
             <a:avLst/>
@@ -6940,7 +6940,7 @@
         </p:spPr>
         <p:txBody>
           <a:bodyPr wrap="square">
-            <a:spAutoFit/>
+            <a:normAutofit/>
           </a:bodyPr>
           <a:lstStyle/>
           <a:p>
@@ -7037,7 +7037,7 @@
         </p:nvSpPr>
         <p:spPr>
           <a:xfrm>
-            <a:off x="640080" y="3291840"/>
+            <a:off x="640080" y="4690872"/>
             <a:ext cx="6766560" cy="804672"/>
           </a:xfrm>
           <a:prstGeom prst="rect">
@@ -7082,7 +7082,7 @@
         </p:nvSpPr>
         <p:spPr>
           <a:xfrm>
-            <a:off x="713231" y="3328416"/>
+            <a:off x="713231" y="4727448"/>
             <a:ext cx="6620256" cy="731520"/>
           </a:xfrm>
           <a:prstGeom prst="rect">
@@ -7091,7 +7091,7 @@
           <a:noFill/>
         </p:spPr>
         <p:txBody>
-          <a:bodyPr wrap="square">
+          <a:bodyPr wrap="none">
             <a:noAutofit/>
           </a:bodyPr>
           <a:lstStyle/>
@@ -7100,14 +7100,14 @@
               <a:spcAft>
                 <a:spcPts val="0"/>
               </a:spcAft>
-              <a:defRPr sz="1100">
+            </a:pPr>
+            <a:r>
+              <a:rPr sz="1100">
                 <a:solidFill>
                   <a:srgbClr val="000000"/>
                 </a:solidFill>
                 <a:latin typeface="Consolas"/>
-              </a:defRPr>
-            </a:pPr>
-            <a:r>
+              </a:rPr>
               <a:t>from sklearn.calibration import CalibratedClassifierCV</a:t>
             </a:r>
           </a:p>
@@ -7116,14 +7116,14 @@
               <a:spcAft>
                 <a:spcPts val="0"/>
               </a:spcAft>
-              <a:defRPr sz="1100">
+            </a:pPr>
+            <a:r>
+              <a:rPr sz="1100">
                 <a:solidFill>
                   <a:srgbClr val="000000"/>
                 </a:solidFill>
                 <a:latin typeface="Consolas"/>
-              </a:defRPr>
-            </a:pPr>
-            <a:r>
+              </a:rPr>
               <a:t>cal = CalibratedClassifierCV(clf, cv=3)</a:t>
             </a:r>
           </a:p>
@@ -7132,14 +7132,14 @@
               <a:spcAft>
                 <a:spcPts val="0"/>
               </a:spcAft>
-              <a:defRPr sz="1100">
+            </a:pPr>
+            <a:r>
+              <a:rPr sz="1100">
                 <a:solidFill>
                   <a:srgbClr val="000000"/>
                 </a:solidFill>
                 <a:latin typeface="Consolas"/>
-              </a:defRPr>
-            </a:pPr>
-            <a:r>
+              </a:rPr>
               <a:t>cal.fit(X_train, y_train)</a:t>
             </a:r>
           </a:p>
@@ -7148,14 +7148,14 @@
               <a:spcAft>
                 <a:spcPts val="0"/>
               </a:spcAft>
-              <a:defRPr sz="1100">
+            </a:pPr>
+            <a:r>
+              <a:rPr sz="1100">
                 <a:solidFill>
                   <a:srgbClr val="000000"/>
                 </a:solidFill>
                 <a:latin typeface="Consolas"/>
-              </a:defRPr>
-            </a:pPr>
-            <a:r>
+              </a:rPr>
               <a:t>p_cal = cal.predict_proba(X_test)[:, 1]</a:t>
             </a:r>
           </a:p>
@@ -7169,7 +7169,7 @@
         </p:nvSpPr>
         <p:spPr>
           <a:xfrm>
-            <a:off x="640080" y="4151376"/>
+            <a:off x="640080" y="5550408"/>
             <a:ext cx="6766560" cy="201168"/>
           </a:xfrm>
           <a:prstGeom prst="rect">
@@ -7280,7 +7280,7 @@
         <p:spPr>
           <a:xfrm>
             <a:off x="640080" y="1371600"/>
-            <a:ext cx="6858000" cy="1810512"/>
+            <a:ext cx="6858000" cy="3209544"/>
           </a:xfrm>
           <a:prstGeom prst="rect">
             <a:avLst/>
@@ -7289,7 +7289,7 @@
         </p:spPr>
         <p:txBody>
           <a:bodyPr wrap="square">
-            <a:spAutoFit/>
+            <a:normAutofit/>
           </a:bodyPr>
           <a:lstStyle/>
           <a:p>
@@ -7495,7 +7495,7 @@
         </p:nvSpPr>
         <p:spPr>
           <a:xfrm>
-            <a:off x="640080" y="3291840"/>
+            <a:off x="640080" y="4690872"/>
             <a:ext cx="6766560" cy="804672"/>
           </a:xfrm>
           <a:prstGeom prst="rect">
@@ -7540,7 +7540,7 @@
         </p:nvSpPr>
         <p:spPr>
           <a:xfrm>
-            <a:off x="713231" y="3328416"/>
+            <a:off x="713231" y="4727448"/>
             <a:ext cx="6620256" cy="731520"/>
           </a:xfrm>
           <a:prstGeom prst="rect">
@@ -7549,7 +7549,7 @@
           <a:noFill/>
         </p:spPr>
         <p:txBody>
-          <a:bodyPr wrap="square">
+          <a:bodyPr wrap="none">
             <a:noAutofit/>
           </a:bodyPr>
           <a:lstStyle/>
@@ -7558,14 +7558,14 @@
               <a:spcAft>
                 <a:spcPts val="0"/>
               </a:spcAft>
-              <a:defRPr sz="1100">
+            </a:pPr>
+            <a:r>
+              <a:rPr sz="1100">
                 <a:solidFill>
                   <a:srgbClr val="000000"/>
                 </a:solidFill>
                 <a:latin typeface="Consolas"/>
-              </a:defRPr>
-            </a:pPr>
-            <a:r>
+              </a:rPr>
               <a:t>from sklearn.neural_network import MLPClassifier</a:t>
             </a:r>
           </a:p>
@@ -7574,14 +7574,14 @@
               <a:spcAft>
                 <a:spcPts val="0"/>
               </a:spcAft>
-              <a:defRPr sz="1100">
+            </a:pPr>
+            <a:r>
+              <a:rPr sz="1100">
                 <a:solidFill>
                   <a:srgbClr val="000000"/>
                 </a:solidFill>
                 <a:latin typeface="Consolas"/>
-              </a:defRPr>
-            </a:pPr>
-            <a:r>
+              </a:rPr>
               <a:t>mlp = MLPClassifier(hidden_layer_sizes=(8,), max_iter=500)</a:t>
             </a:r>
           </a:p>
@@ -7590,14 +7590,14 @@
               <a:spcAft>
                 <a:spcPts val="0"/>
               </a:spcAft>
-              <a:defRPr sz="1100">
+            </a:pPr>
+            <a:r>
+              <a:rPr sz="1100">
                 <a:solidFill>
                   <a:srgbClr val="000000"/>
                 </a:solidFill>
                 <a:latin typeface="Consolas"/>
-              </a:defRPr>
-            </a:pPr>
-            <a:r>
+              </a:rPr>
               <a:t>mlp.fit(X_train, y_train)</a:t>
             </a:r>
           </a:p>
@@ -7606,14 +7606,14 @@
               <a:spcAft>
                 <a:spcPts val="0"/>
               </a:spcAft>
-              <a:defRPr sz="1100">
+            </a:pPr>
+            <a:r>
+              <a:rPr sz="1100">
                 <a:solidFill>
                   <a:srgbClr val="000000"/>
                 </a:solidFill>
                 <a:latin typeface="Consolas"/>
-              </a:defRPr>
-            </a:pPr>
-            <a:r>
+              </a:rPr>
               <a:t># один скрытый слой ≈ нелинейная логистическая</a:t>
             </a:r>
           </a:p>
@@ -7627,7 +7627,7 @@
         </p:nvSpPr>
         <p:spPr>
           <a:xfrm>
-            <a:off x="640080" y="4151376"/>
+            <a:off x="640080" y="5550408"/>
             <a:ext cx="6766560" cy="201168"/>
           </a:xfrm>
           <a:prstGeom prst="rect">
@@ -8453,16 +8453,7 @@
                   <a:srgbClr val="000000"/>
                 </a:solidFill>
               </a:rPr>
-              <a:t xml:space="preserve">• </a:t>
-            </a:r>
-            <a:r>
-              <a:rPr sz="1600">
-                <a:solidFill>
-                  <a:srgbClr val="3366CC"/>
-                </a:solidFill>
-                <a:hlinkClick r:id="rId2"/>
-              </a:rPr>
-              <a:t>Berkson J. (1944). Application of the Logistic Function to Bio-Assay</a:t>
+              <a:t>• Berkson J. (1944). Application of the Logistic Function to Bio-Assay</a:t>
             </a:r>
           </a:p>
         </p:txBody>
@@ -8500,16 +8491,7 @@
                   <a:srgbClr val="000000"/>
                 </a:solidFill>
               </a:rPr>
-              <a:t xml:space="preserve">• </a:t>
-            </a:r>
-            <a:r>
-              <a:rPr sz="1600">
-                <a:solidFill>
-                  <a:srgbClr val="3366CC"/>
-                </a:solidFill>
-                <a:hlinkClick r:id="rId3"/>
-              </a:rPr>
-              <a:t>Cox D.R. (1958). The Regression Analysis of Life Tables</a:t>
+              <a:t>• Cox D.R. (1958). The Regression Analysis of Binary Sequences</a:t>
             </a:r>
           </a:p>
         </p:txBody>
@@ -8554,7 +8536,7 @@
                 <a:solidFill>
                   <a:srgbClr val="3366CC"/>
                 </a:solidFill>
-                <a:hlinkClick r:id="rId4"/>
+                <a:hlinkClick r:id="rId2"/>
               </a:rPr>
               <a:t>Nelder J.A., Wedderburn R.W. (1972). Generalized Linear Models</a:t>
             </a:r>
@@ -8631,7 +8613,7 @@
                 <a:solidFill>
                   <a:srgbClr val="3366CC"/>
                 </a:solidFill>
-                <a:hlinkClick r:id="rId5"/>
+                <a:hlinkClick r:id="rId3"/>
               </a:rPr>
               <a:t>https://colab.research.google.com/github/gurovic/ml-lessons/blob/main/lessons/logisticheskaya_regressiya/code.ipynb</a:t>
             </a:r>
@@ -8673,7 +8655,7 @@
                 <a:solidFill>
                   <a:srgbClr val="3366CC"/>
                 </a:solidFill>
-                <a:hlinkClick r:id="rId6"/>
+                <a:hlinkClick r:id="rId4"/>
               </a:rPr>
               <a:t>https://colab.research.google.com/github/gurovic/ml-lessons/blob/main/lessons/logisticheskaya_regressiya/project.ipynb</a:t>
             </a:r>
@@ -8689,7 +8671,7 @@
           <p:nvPr/>
         </p:nvPicPr>
         <p:blipFill>
-          <a:blip r:embed="rId7"/>
+          <a:blip r:embed="rId5"/>
           <a:stretch>
             <a:fillRect/>
           </a:stretch>
@@ -8748,7 +8730,7 @@
           <p:nvPr/>
         </p:nvPicPr>
         <p:blipFill>
-          <a:blip r:embed="rId8"/>
+          <a:blip r:embed="rId6"/>
           <a:stretch>
             <a:fillRect/>
           </a:stretch>
@@ -8858,7 +8840,7 @@
         <p:spPr>
           <a:xfrm>
             <a:off x="640080" y="1371600"/>
-            <a:ext cx="6858000" cy="1810512"/>
+            <a:ext cx="6858000" cy="3209544"/>
           </a:xfrm>
           <a:prstGeom prst="rect">
             <a:avLst/>
@@ -8867,7 +8849,7 @@
         </p:spPr>
         <p:txBody>
           <a:bodyPr wrap="square">
-            <a:spAutoFit/>
+            <a:normAutofit/>
           </a:bodyPr>
           <a:lstStyle/>
           <a:p>
@@ -9015,7 +8997,7 @@
         </p:nvSpPr>
         <p:spPr>
           <a:xfrm>
-            <a:off x="640080" y="3291840"/>
+            <a:off x="640080" y="4690872"/>
             <a:ext cx="6766560" cy="804672"/>
           </a:xfrm>
           <a:prstGeom prst="rect">
@@ -9060,7 +9042,7 @@
         </p:nvSpPr>
         <p:spPr>
           <a:xfrm>
-            <a:off x="713231" y="3328416"/>
+            <a:off x="713231" y="4727448"/>
             <a:ext cx="6620256" cy="731520"/>
           </a:xfrm>
           <a:prstGeom prst="rect">
@@ -9069,7 +9051,7 @@
           <a:noFill/>
         </p:spPr>
         <p:txBody>
-          <a:bodyPr wrap="square">
+          <a:bodyPr wrap="none">
             <a:noAutofit/>
           </a:bodyPr>
           <a:lstStyle/>
@@ -9078,14 +9060,14 @@
               <a:spcAft>
                 <a:spcPts val="0"/>
               </a:spcAft>
-              <a:defRPr sz="1100">
+            </a:pPr>
+            <a:r>
+              <a:rPr sz="1100">
                 <a:solidFill>
                   <a:srgbClr val="000000"/>
                 </a:solidFill>
                 <a:latin typeface="Consolas"/>
-              </a:defRPr>
-            </a:pPr>
-            <a:r>
+              </a:rPr>
               <a:t>from sklearn.linear_model import LinearRegression</a:t>
             </a:r>
           </a:p>
@@ -9094,14 +9076,14 @@
               <a:spcAft>
                 <a:spcPts val="0"/>
               </a:spcAft>
-              <a:defRPr sz="1100">
+            </a:pPr>
+            <a:r>
+              <a:rPr sz="1100">
                 <a:solidFill>
                   <a:srgbClr val="000000"/>
                 </a:solidFill>
                 <a:latin typeface="Consolas"/>
-              </a:defRPr>
-            </a:pPr>
-            <a:r>
+              </a:rPr>
               <a:t>lr = LinearRegression().fit(X, y_binary)</a:t>
             </a:r>
           </a:p>
@@ -9110,14 +9092,14 @@
               <a:spcAft>
                 <a:spcPts val="0"/>
               </a:spcAft>
-              <a:defRPr sz="1100">
+            </a:pPr>
+            <a:r>
+              <a:rPr sz="1100">
                 <a:solidFill>
                   <a:srgbClr val="000000"/>
                 </a:solidFill>
                 <a:latin typeface="Consolas"/>
-              </a:defRPr>
-            </a:pPr>
-            <a:r>
+              </a:rPr>
               <a:t>pred = lr.predict(X_new)</a:t>
             </a:r>
           </a:p>
@@ -9126,14 +9108,14 @@
               <a:spcAft>
                 <a:spcPts val="0"/>
               </a:spcAft>
-              <a:defRPr sz="1100">
+            </a:pPr>
+            <a:r>
+              <a:rPr sz="1100">
                 <a:solidFill>
                   <a:srgbClr val="000000"/>
                 </a:solidFill>
                 <a:latin typeface="Consolas"/>
-              </a:defRPr>
-            </a:pPr>
-            <a:r>
+              </a:rPr>
               <a:t>print(pred.min(), pred.max())  # часто вне [0, 1]</a:t>
             </a:r>
           </a:p>
@@ -9147,7 +9129,7 @@
         </p:nvSpPr>
         <p:spPr>
           <a:xfrm>
-            <a:off x="640080" y="4151376"/>
+            <a:off x="640080" y="5550408"/>
             <a:ext cx="6766560" cy="201168"/>
           </a:xfrm>
           <a:prstGeom prst="rect">
@@ -9258,7 +9240,7 @@
         <p:spPr>
           <a:xfrm>
             <a:off x="640080" y="1371600"/>
-            <a:ext cx="6858000" cy="1810512"/>
+            <a:ext cx="6858000" cy="3035807"/>
           </a:xfrm>
           <a:prstGeom prst="rect">
             <a:avLst/>
@@ -9267,7 +9249,7 @@
         </p:spPr>
         <p:txBody>
           <a:bodyPr wrap="square">
-            <a:spAutoFit/>
+            <a:normAutofit/>
           </a:bodyPr>
           <a:lstStyle/>
           <a:p>
@@ -9539,7 +9521,7 @@
         </p:nvSpPr>
         <p:spPr>
           <a:xfrm>
-            <a:off x="640080" y="3291840"/>
+            <a:off x="640080" y="4517136"/>
             <a:ext cx="6766560" cy="978407"/>
           </a:xfrm>
           <a:prstGeom prst="rect">
@@ -9584,7 +9566,7 @@
         </p:nvSpPr>
         <p:spPr>
           <a:xfrm>
-            <a:off x="713231" y="3328416"/>
+            <a:off x="713231" y="4553712"/>
             <a:ext cx="6620256" cy="905255"/>
           </a:xfrm>
           <a:prstGeom prst="rect">
@@ -9593,7 +9575,7 @@
           <a:noFill/>
         </p:spPr>
         <p:txBody>
-          <a:bodyPr wrap="square">
+          <a:bodyPr wrap="none">
             <a:noAutofit/>
           </a:bodyPr>
           <a:lstStyle/>
@@ -9602,14 +9584,14 @@
               <a:spcAft>
                 <a:spcPts val="0"/>
               </a:spcAft>
-              <a:defRPr sz="1100">
+            </a:pPr>
+            <a:r>
+              <a:rPr sz="1100">
                 <a:solidFill>
                   <a:srgbClr val="000000"/>
                 </a:solidFill>
                 <a:latin typeface="Consolas"/>
-              </a:defRPr>
-            </a:pPr>
-            <a:r>
+              </a:rPr>
               <a:t>import numpy as np</a:t>
             </a:r>
           </a:p>
@@ -9618,14 +9600,14 @@
               <a:spcAft>
                 <a:spcPts val="0"/>
               </a:spcAft>
-              <a:defRPr sz="1100">
+            </a:pPr>
+            <a:r>
+              <a:rPr sz="1100">
                 <a:solidFill>
                   <a:srgbClr val="000000"/>
                 </a:solidFill>
                 <a:latin typeface="Consolas"/>
-              </a:defRPr>
-            </a:pPr>
-            <a:r>
+              </a:rPr>
               <a:t>def sigmoid(z):</a:t>
             </a:r>
           </a:p>
@@ -9634,14 +9616,14 @@
               <a:spcAft>
                 <a:spcPts val="0"/>
               </a:spcAft>
-              <a:defRPr sz="1100">
+            </a:pPr>
+            <a:r>
+              <a:rPr sz="1100">
                 <a:solidFill>
                   <a:srgbClr val="000000"/>
                 </a:solidFill>
                 <a:latin typeface="Consolas"/>
-              </a:defRPr>
-            </a:pPr>
-            <a:r>
+              </a:rPr>
               <a:t>    return 1 / (1 + np.exp(-z))</a:t>
             </a:r>
           </a:p>
@@ -9650,14 +9632,14 @@
               <a:spcAft>
                 <a:spcPts val="0"/>
               </a:spcAft>
-              <a:defRPr sz="1100">
+            </a:pPr>
+            <a:r>
+              <a:rPr sz="1100">
                 <a:solidFill>
                   <a:srgbClr val="000000"/>
                 </a:solidFill>
                 <a:latin typeface="Consolas"/>
-              </a:defRPr>
-            </a:pPr>
-            <a:r>
+              </a:rPr>
               <a:t>z = np.linspace(-6, 6, 100)</a:t>
             </a:r>
           </a:p>
@@ -9666,14 +9648,14 @@
               <a:spcAft>
                 <a:spcPts val="0"/>
               </a:spcAft>
-              <a:defRPr sz="1100">
+            </a:pPr>
+            <a:r>
+              <a:rPr sz="1100">
                 <a:solidFill>
                   <a:srgbClr val="000000"/>
                 </a:solidFill>
                 <a:latin typeface="Consolas"/>
-              </a:defRPr>
-            </a:pPr>
-            <a:r>
+              </a:rPr>
               <a:t>p = sigmoid(z)  # всегда в (0, 1)</a:t>
             </a:r>
           </a:p>
@@ -9687,7 +9669,7 @@
         </p:nvSpPr>
         <p:spPr>
           <a:xfrm>
-            <a:off x="640080" y="4325112"/>
+            <a:off x="640080" y="5550407"/>
             <a:ext cx="6766560" cy="201168"/>
           </a:xfrm>
           <a:prstGeom prst="rect">
@@ -10409,7 +10391,7 @@
         <p:spPr>
           <a:xfrm>
             <a:off x="640080" y="1371600"/>
-            <a:ext cx="6858000" cy="1810512"/>
+            <a:ext cx="6858000" cy="3035807"/>
           </a:xfrm>
           <a:prstGeom prst="rect">
             <a:avLst/>
@@ -10418,7 +10400,7 @@
         </p:spPr>
         <p:txBody>
           <a:bodyPr wrap="square">
-            <a:spAutoFit/>
+            <a:normAutofit/>
           </a:bodyPr>
           <a:lstStyle/>
           <a:p>
@@ -10709,7 +10691,7 @@
         </p:nvSpPr>
         <p:spPr>
           <a:xfrm>
-            <a:off x="640080" y="3291840"/>
+            <a:off x="640080" y="4517136"/>
             <a:ext cx="6766560" cy="978407"/>
           </a:xfrm>
           <a:prstGeom prst="rect">
@@ -10754,7 +10736,7 @@
         </p:nvSpPr>
         <p:spPr>
           <a:xfrm>
-            <a:off x="713231" y="3328416"/>
+            <a:off x="713231" y="4553712"/>
             <a:ext cx="6620256" cy="905255"/>
           </a:xfrm>
           <a:prstGeom prst="rect">
@@ -10763,7 +10745,7 @@
           <a:noFill/>
         </p:spPr>
         <p:txBody>
-          <a:bodyPr wrap="square">
+          <a:bodyPr wrap="none">
             <a:noAutofit/>
           </a:bodyPr>
           <a:lstStyle/>
@@ -10772,14 +10754,14 @@
               <a:spcAft>
                 <a:spcPts val="0"/>
               </a:spcAft>
-              <a:defRPr sz="1100">
+            </a:pPr>
+            <a:r>
+              <a:rPr sz="1100">
                 <a:solidFill>
                   <a:srgbClr val="000000"/>
                 </a:solidFill>
                 <a:latin typeface="Consolas"/>
-              </a:defRPr>
-            </a:pPr>
-            <a:r>
+              </a:rPr>
               <a:t>from sklearn.metrics import log_loss</a:t>
             </a:r>
           </a:p>
@@ -10788,14 +10770,14 @@
               <a:spcAft>
                 <a:spcPts val="0"/>
               </a:spcAft>
-              <a:defRPr sz="1100">
+            </a:pPr>
+            <a:r>
+              <a:rPr sz="1100">
                 <a:solidFill>
                   <a:srgbClr val="000000"/>
                 </a:solidFill>
                 <a:latin typeface="Consolas"/>
-              </a:defRPr>
-            </a:pPr>
-            <a:r>
+              </a:rPr>
               <a:t>y_true = [0, 1, 1, 0]</a:t>
             </a:r>
           </a:p>
@@ -10804,14 +10786,14 @@
               <a:spcAft>
                 <a:spcPts val="0"/>
               </a:spcAft>
-              <a:defRPr sz="1100">
+            </a:pPr>
+            <a:r>
+              <a:rPr sz="1100">
                 <a:solidFill>
                   <a:srgbClr val="000000"/>
                 </a:solidFill>
                 <a:latin typeface="Consolas"/>
-              </a:defRPr>
-            </a:pPr>
-            <a:r>
+              </a:rPr>
               <a:t>y_prob = [0.1, 0.9, 0.8, 0.3]</a:t>
             </a:r>
           </a:p>
@@ -10820,14 +10802,14 @@
               <a:spcAft>
                 <a:spcPts val="0"/>
               </a:spcAft>
-              <a:defRPr sz="1100">
+            </a:pPr>
+            <a:r>
+              <a:rPr sz="1100">
                 <a:solidFill>
                   <a:srgbClr val="000000"/>
                 </a:solidFill>
                 <a:latin typeface="Consolas"/>
-              </a:defRPr>
-            </a:pPr>
-            <a:r>
+              </a:rPr>
               <a:t>loss = log_loss(y_true, y_prob)</a:t>
             </a:r>
           </a:p>
@@ -10836,14 +10818,14 @@
               <a:spcAft>
                 <a:spcPts val="0"/>
               </a:spcAft>
-              <a:defRPr sz="1100">
+            </a:pPr>
+            <a:r>
+              <a:rPr sz="1100">
                 <a:solidFill>
                   <a:srgbClr val="000000"/>
                 </a:solidFill>
                 <a:latin typeface="Consolas"/>
-              </a:defRPr>
-            </a:pPr>
-            <a:r>
+              </a:rPr>
               <a:t>print(f'LogLoss = {loss:.3f}')</a:t>
             </a:r>
           </a:p>
@@ -10857,7 +10839,7 @@
         </p:nvSpPr>
         <p:spPr>
           <a:xfrm>
-            <a:off x="640080" y="4325112"/>
+            <a:off x="640080" y="5550407"/>
             <a:ext cx="6766560" cy="201168"/>
           </a:xfrm>
           <a:prstGeom prst="rect">
@@ -10968,7 +10950,7 @@
         <p:spPr>
           <a:xfrm>
             <a:off x="640080" y="1371600"/>
-            <a:ext cx="6858000" cy="1810512"/>
+            <a:ext cx="6858000" cy="3209544"/>
           </a:xfrm>
           <a:prstGeom prst="rect">
             <a:avLst/>
@@ -10977,7 +10959,7 @@
         </p:spPr>
         <p:txBody>
           <a:bodyPr wrap="square">
-            <a:spAutoFit/>
+            <a:normAutofit/>
           </a:bodyPr>
           <a:lstStyle/>
           <a:p>
@@ -11161,7 +11143,7 @@
         </p:nvSpPr>
         <p:spPr>
           <a:xfrm>
-            <a:off x="640080" y="3291840"/>
+            <a:off x="640080" y="4690872"/>
             <a:ext cx="6766560" cy="804672"/>
           </a:xfrm>
           <a:prstGeom prst="rect">
@@ -11206,7 +11188,7 @@
         </p:nvSpPr>
         <p:spPr>
           <a:xfrm>
-            <a:off x="713231" y="3328416"/>
+            <a:off x="713231" y="4727448"/>
             <a:ext cx="6620256" cy="731520"/>
           </a:xfrm>
           <a:prstGeom prst="rect">
@@ -11215,7 +11197,7 @@
           <a:noFill/>
         </p:spPr>
         <p:txBody>
-          <a:bodyPr wrap="square">
+          <a:bodyPr wrap="none">
             <a:noAutofit/>
           </a:bodyPr>
           <a:lstStyle/>
@@ -11224,14 +11206,14 @@
               <a:spcAft>
                 <a:spcPts val="0"/>
               </a:spcAft>
-              <a:defRPr sz="1100">
+            </a:pPr>
+            <a:r>
+              <a:rPr sz="1100">
                 <a:solidFill>
                   <a:srgbClr val="000000"/>
                 </a:solidFill>
                 <a:latin typeface="Consolas"/>
-              </a:defRPr>
-            </a:pPr>
-            <a:r>
+              </a:rPr>
               <a:t>from sklearn.linear_model import LogisticRegression</a:t>
             </a:r>
           </a:p>
@@ -11240,14 +11222,14 @@
               <a:spcAft>
                 <a:spcPts val="0"/>
               </a:spcAft>
-              <a:defRPr sz="1100">
+            </a:pPr>
+            <a:r>
+              <a:rPr sz="1100">
                 <a:solidFill>
                   <a:srgbClr val="000000"/>
                 </a:solidFill>
                 <a:latin typeface="Consolas"/>
-              </a:defRPr>
-            </a:pPr>
-            <a:r>
+              </a:rPr>
               <a:t>clf = LogisticRegression(max_iter=1000, random_state=42)</a:t>
             </a:r>
           </a:p>
@@ -11256,14 +11238,14 @@
               <a:spcAft>
                 <a:spcPts val="0"/>
               </a:spcAft>
-              <a:defRPr sz="1100">
+            </a:pPr>
+            <a:r>
+              <a:rPr sz="1100">
                 <a:solidFill>
                   <a:srgbClr val="000000"/>
                 </a:solidFill>
                 <a:latin typeface="Consolas"/>
-              </a:defRPr>
-            </a:pPr>
-            <a:r>
+              </a:rPr>
               <a:t>clf.fit(X_train, y_train)</a:t>
             </a:r>
           </a:p>
@@ -11272,14 +11254,14 @@
               <a:spcAft>
                 <a:spcPts val="0"/>
               </a:spcAft>
-              <a:defRPr sz="1100">
+            </a:pPr>
+            <a:r>
+              <a:rPr sz="1100">
                 <a:solidFill>
                   <a:srgbClr val="000000"/>
                 </a:solidFill>
                 <a:latin typeface="Consolas"/>
-              </a:defRPr>
-            </a:pPr>
-            <a:r>
+              </a:rPr>
               <a:t>proba = clf.predict_proba(X_test)[:, 1]</a:t>
             </a:r>
           </a:p>
@@ -11293,7 +11275,7 @@
         </p:nvSpPr>
         <p:spPr>
           <a:xfrm>
-            <a:off x="640080" y="4151376"/>
+            <a:off x="640080" y="5550408"/>
             <a:ext cx="6766560" cy="201168"/>
           </a:xfrm>
           <a:prstGeom prst="rect">

--- a/lessons/logisticheskaya_regressiya/presentation.pptx
+++ b/lessons/logisticheskaya_regressiya/presentation.pptx
@@ -4922,7 +4922,7 @@
               </a:defRPr>
             </a:pPr>
             <a:r>
-              <a:t>28.06.2026</a:t>
+              <a:t>29.06.2026</a:t>
             </a:r>
           </a:p>
         </p:txBody>
@@ -4987,7 +4987,7 @@
         <p:spPr>
           <a:xfrm>
             <a:off x="640080" y="1371600"/>
-            <a:ext cx="6858000" cy="1810512"/>
+            <a:ext cx="6263640" cy="2697480"/>
           </a:xfrm>
           <a:prstGeom prst="rect">
             <a:avLst/>
@@ -5005,6 +5005,14 @@
                 <a:spcPts val="800"/>
               </a:spcAft>
             </a:pPr>
+            <a:r>
+              <a:rPr lang="ru-RU" dirty="0" sz="2000">
+                <a:solidFill>
+                  <a:srgbClr val="000000"/>
+                </a:solidFill>
+              </a:rPr>
+              <a:t xml:space="preserve">• </a:t>
+            </a:r>
             <a:r>
               <a:rPr lang="ru-RU" dirty="0" sz="2000" b="1">
                 <a:solidFill>
@@ -5061,7 +5069,7 @@
                   <a:srgbClr val="000000"/>
                 </a:solidFill>
               </a:rPr>
-              <a:t>Работает при сбалансированных классах (~50/50)</a:t>
+              <a:t>• Работает при сбалансированных классах (~50/50)</a:t>
             </a:r>
           </a:p>
           <a:p>
@@ -5076,7 +5084,7 @@
                   <a:srgbClr val="000000"/>
                 </a:solidFill>
               </a:rPr>
-              <a:t xml:space="preserve">При 99% легальных транзакций модель «всегда легально» имеет </a:t>
+              <a:t xml:space="preserve">• При 99% легальных транзакций модель «всегда легально» имеет </a:t>
             </a:r>
             <a:r>
               <a:rPr lang="ru-RU" dirty="0" sz="2000" b="1">
@@ -5107,7 +5115,7 @@
                   <a:srgbClr val="000000"/>
                 </a:solidFill>
               </a:rPr>
-              <a:t xml:space="preserve">Для несбалансированных данных нужны </a:t>
+              <a:t xml:space="preserve">• Для несбалансированных данных нужны </a:t>
             </a:r>
             <a:r>
               <a:rPr lang="ru-RU" dirty="0" sz="2000" b="1">
@@ -5136,8 +5144,8 @@
         </p:blipFill>
         <p:spPr>
           <a:xfrm>
-            <a:off x="7635240" y="2741539"/>
-            <a:ext cx="4343400" cy="1649242"/>
+            <a:off x="7339937" y="1325880"/>
+            <a:ext cx="4324099" cy="4407407"/>
           </a:xfrm>
           <a:prstGeom prst="rect">
             <a:avLst/>
@@ -5204,7 +5212,7 @@
         <p:spPr>
           <a:xfrm>
             <a:off x="640080" y="1371600"/>
-            <a:ext cx="6858000" cy="3209544"/>
+            <a:ext cx="6263640" cy="2971800"/>
           </a:xfrm>
           <a:prstGeom prst="rect">
             <a:avLst/>
@@ -5213,7 +5221,7 @@
         </p:spPr>
         <p:txBody>
           <a:bodyPr wrap="square">
-            <a:normAutofit/>
+            <a:spAutoFit/>
           </a:bodyPr>
           <a:lstStyle/>
           <a:p>
@@ -5223,6 +5231,14 @@
               </a:spcAft>
             </a:pPr>
             <a:r>
+              <a:rPr lang="ru-RU" dirty="0" sz="2000">
+                <a:solidFill>
+                  <a:srgbClr val="000000"/>
+                </a:solidFill>
+              </a:rPr>
+              <a:t xml:space="preserve">• </a:t>
+            </a:r>
+            <a:r>
               <a:rPr lang="ru-RU" dirty="0" sz="2000" b="1">
                 <a:solidFill>
                   <a:srgbClr val="000000"/>
@@ -5246,6 +5262,14 @@
               </a:spcAft>
             </a:pPr>
             <a:r>
+              <a:rPr lang="ru-RU" dirty="0" sz="2000">
+                <a:solidFill>
+                  <a:srgbClr val="000000"/>
+                </a:solidFill>
+              </a:rPr>
+              <a:t xml:space="preserve">• </a:t>
+            </a:r>
+            <a:r>
               <a:rPr lang="ru-RU" dirty="0" sz="2000" b="1">
                 <a:solidFill>
                   <a:srgbClr val="000000"/>
@@ -5274,7 +5298,7 @@
                   <a:srgbClr val="000000"/>
                 </a:solidFill>
               </a:rPr>
-              <a:t xml:space="preserve">При экстремальном дисбалансе ROC-AUC </a:t>
+              <a:t xml:space="preserve">• При экстремальном дисбалансе ROC-AUC </a:t>
             </a:r>
             <a:r>
               <a:rPr lang="ru-RU" dirty="0" sz="2000" b="1">
@@ -5305,7 +5329,7 @@
                   <a:srgbClr val="000000"/>
                 </a:solidFill>
               </a:rPr>
-              <a:t xml:space="preserve">Для редких событий смотрите </a:t>
+              <a:t xml:space="preserve">• Для редких событий смотрите </a:t>
             </a:r>
             <a:r>
               <a:rPr lang="ru-RU" dirty="0" sz="2000" b="1">
@@ -5335,7 +5359,7 @@
         <p:spPr>
           <a:xfrm>
             <a:off x="640080" y="4690872"/>
-            <a:ext cx="6766560" cy="804672"/>
+            <a:ext cx="6172200" cy="630936"/>
           </a:xfrm>
           <a:prstGeom prst="rect">
             <a:avLst/>
@@ -5380,7 +5404,7 @@
         <p:spPr>
           <a:xfrm>
             <a:off x="713231" y="4727448"/>
-            <a:ext cx="6620256" cy="731520"/>
+            <a:ext cx="6025896" cy="557784"/>
           </a:xfrm>
           <a:prstGeom prst="rect">
             <a:avLst/>
@@ -5405,7 +5429,7 @@
                 </a:solidFill>
                 <a:latin typeface="Consolas"/>
               </a:rPr>
-              <a:t>from sklearn.metrics import roc_curve, auc</a:t>
+              <a:t>fpr, tpr, _ = roc_curve(y_test, y_score)</a:t>
             </a:r>
           </a:p>
           <a:p>
@@ -5421,7 +5445,7 @@
                 </a:solidFill>
                 <a:latin typeface="Consolas"/>
               </a:rPr>
-              <a:t>fpr, tpr, _ = roc_curve(y_test, y_score)</a:t>
+              <a:t>roc_auc = auc(fpr, tpr)</a:t>
             </a:r>
           </a:p>
           <a:p>
@@ -5437,22 +5461,6 @@
                 </a:solidFill>
                 <a:latin typeface="Consolas"/>
               </a:rPr>
-              <a:t>roc_auc = auc(fpr, tpr)</a:t>
-            </a:r>
-          </a:p>
-          <a:p>
-            <a:pPr>
-              <a:spcAft>
-                <a:spcPts val="0"/>
-              </a:spcAft>
-            </a:pPr>
-            <a:r>
-              <a:rPr sz="1100">
-                <a:solidFill>
-                  <a:srgbClr val="000000"/>
-                </a:solidFill>
-                <a:latin typeface="Consolas"/>
-              </a:rPr>
               <a:t>print(f'AUC-ROC = {roc_auc:.3f}')</a:t>
             </a:r>
           </a:p>
@@ -5466,8 +5474,8 @@
         </p:nvSpPr>
         <p:spPr>
           <a:xfrm>
-            <a:off x="640080" y="5550408"/>
-            <a:ext cx="6766560" cy="201168"/>
+            <a:off x="640080" y="5376672"/>
+            <a:ext cx="6172200" cy="201168"/>
           </a:xfrm>
           <a:prstGeom prst="rect">
             <a:avLst/>
@@ -5509,8 +5517,8 @@
         </p:blipFill>
         <p:spPr>
           <a:xfrm>
-            <a:off x="7635240" y="2753239"/>
-            <a:ext cx="4343400" cy="1625840"/>
+            <a:off x="7540016" y="1325880"/>
+            <a:ext cx="3923942" cy="4407408"/>
           </a:xfrm>
           <a:prstGeom prst="rect">
             <a:avLst/>
@@ -5577,7 +5585,7 @@
         <p:spPr>
           <a:xfrm>
             <a:off x="640080" y="1371600"/>
-            <a:ext cx="6858000" cy="1810512"/>
+            <a:ext cx="6263640" cy="2971800"/>
           </a:xfrm>
           <a:prstGeom prst="rect">
             <a:avLst/>
@@ -5601,7 +5609,7 @@
                   <a:srgbClr val="000000"/>
                 </a:solidFill>
               </a:rPr>
-              <a:t xml:space="preserve">Для K классов: </a:t>
+              <a:t xml:space="preserve">• Для K классов: </a:t>
             </a:r>
             <ns0:m xmlns:ns0="http://schemas.microsoft.com/office/drawing/2010/main">
               <m:oMath xmlns:m="http://schemas.openxmlformats.org/officeDocument/2006/math">
@@ -5715,7 +5723,7 @@
                   <a:srgbClr val="000000"/>
                 </a:solidFill>
               </a:rPr>
-              <a:t>Softmax — обобщение сигмоиды на многомерный случай</a:t>
+              <a:t>• Softmax — обобщение сигмоиды на многомерный случай</a:t>
             </a:r>
           </a:p>
           <a:p>
@@ -5730,7 +5738,7 @@
                   <a:srgbClr val="000000"/>
                 </a:solidFill>
               </a:rPr>
-              <a:t xml:space="preserve">Потери: </a:t>
+              <a:t xml:space="preserve">• Потери: </a:t>
             </a:r>
             <a:r>
               <a:rPr lang="ru-RU" dirty="0" sz="2000" b="1">
@@ -5761,7 +5769,7 @@
                   <a:srgbClr val="000000"/>
                 </a:solidFill>
               </a:rPr>
-              <a:t>В sklearn: `multi_class='multinomial'`; альтернатива — One-vs-Rest (K независимых бинарных классификаторов)</a:t>
+              <a:t>• В sklearn: `multi_class='multinomial'`; альтернатива — One-vs-Rest (K независимых бинарных классификаторов)</a:t>
             </a:r>
           </a:p>
         </p:txBody>
@@ -5782,8 +5790,8 @@
         </p:blipFill>
         <p:spPr>
           <a:xfrm>
-            <a:off x="7635240" y="2073874"/>
-            <a:ext cx="4343400" cy="2984571"/>
+            <a:off x="7269480" y="1325880"/>
+            <a:ext cx="4465015" cy="3007448"/>
           </a:xfrm>
           <a:prstGeom prst="rect">
             <a:avLst/>
@@ -5850,7 +5858,7 @@
         <p:spPr>
           <a:xfrm>
             <a:off x="640080" y="1371600"/>
-            <a:ext cx="6858000" cy="1810512"/>
+            <a:ext cx="6263640" cy="3246120"/>
           </a:xfrm>
           <a:prstGeom prst="rect">
             <a:avLst/>
@@ -5868,6 +5876,14 @@
                 <a:spcPts val="800"/>
               </a:spcAft>
             </a:pPr>
+            <a:r>
+              <a:rPr lang="ru-RU" dirty="0" sz="2000">
+                <a:solidFill>
+                  <a:srgbClr val="000000"/>
+                </a:solidFill>
+              </a:rPr>
+              <a:t xml:space="preserve">• </a:t>
+            </a:r>
             <ns0:m xmlns:ns0="http://schemas.microsoft.com/office/drawing/2010/main">
               <m:oMath xmlns:m="http://schemas.openxmlformats.org/officeDocument/2006/math">
                 <m:r>
@@ -5937,6 +5953,14 @@
               </a:spcAft>
             </a:pPr>
             <a:r>
+              <a:rPr lang="ru-RU" dirty="0" sz="2000">
+                <a:solidFill>
+                  <a:srgbClr val="000000"/>
+                </a:solidFill>
+              </a:rPr>
+              <a:t xml:space="preserve">• </a:t>
+            </a:r>
+            <a:r>
               <a:rPr lang="ru-RU" dirty="0" sz="2000" b="1">
                 <a:solidFill>
                   <a:srgbClr val="000000"/>
@@ -5995,7 +6019,7 @@
                   <a:srgbClr val="000000"/>
                 </a:solidFill>
               </a:rPr>
-              <a:t xml:space="preserve">Вес </a:t>
+              <a:t xml:space="preserve">• Вес </a:t>
             </a:r>
             <ns0:m xmlns:ns0="http://schemas.microsoft.com/office/drawing/2010/main">
               <m:oMath xmlns:m="http://schemas.openxmlformats.org/officeDocument/2006/math">
@@ -6104,7 +6128,7 @@
                   <a:srgbClr val="000000"/>
                 </a:solidFill>
               </a:rPr>
-              <a:t xml:space="preserve">Интерпретация </a:t>
+              <a:t xml:space="preserve">• Интерпретация </a:t>
             </a:r>
             <a:r>
               <a:rPr lang="ru-RU" dirty="0" sz="2000" b="1">
@@ -6141,8 +6165,8 @@
         </p:blipFill>
         <p:spPr>
           <a:xfrm>
-            <a:off x="7635240" y="2743231"/>
-            <a:ext cx="4343400" cy="1645857"/>
+            <a:off x="7461312" y="1325880"/>
+            <a:ext cx="4081349" cy="4407407"/>
           </a:xfrm>
           <a:prstGeom prst="rect">
             <a:avLst/>
@@ -6209,7 +6233,7 @@
         <p:spPr>
           <a:xfrm>
             <a:off x="640080" y="1371600"/>
-            <a:ext cx="6858000" cy="3209544"/>
+            <a:ext cx="6263640" cy="2971800"/>
           </a:xfrm>
           <a:prstGeom prst="rect">
             <a:avLst/>
@@ -6218,7 +6242,7 @@
         </p:spPr>
         <p:txBody>
           <a:bodyPr wrap="square">
-            <a:normAutofit/>
+            <a:spAutoFit/>
           </a:bodyPr>
           <a:lstStyle/>
           <a:p>
@@ -6233,7 +6257,7 @@
                   <a:srgbClr val="000000"/>
                 </a:solidFill>
               </a:rPr>
-              <a:t xml:space="preserve">`make_pipeline(StandardScaler(), LogisticRegression(...))` — </a:t>
+              <a:t xml:space="preserve">• `make_pipeline(StandardScaler(), LogisticRegression(...))` — </a:t>
             </a:r>
             <a:r>
               <a:rPr lang="ru-RU" dirty="0" sz="2000" b="1">
@@ -6264,7 +6288,7 @@
                   <a:srgbClr val="000000"/>
                 </a:solidFill>
               </a:rPr>
-              <a:t>`LogisticRegression(C=1.0, max_iter=1000)` — L-BFGS; `max_iter` часто увеличивают (по умолчанию 100)</a:t>
+              <a:t>• `LogisticRegression(C=1.0, max_iter=1000)` — L-BFGS; `max_iter` часто увеличивают (по умолчанию 100)</a:t>
             </a:r>
           </a:p>
           <a:p>
@@ -6279,7 +6303,7 @@
                   <a:srgbClr val="000000"/>
                 </a:solidFill>
               </a:rPr>
-              <a:t>`predict_proba` — вероятности класса 1; `predict` — бинарное решение по порогу 0.5</a:t>
+              <a:t>• `predict_proba` — вероятности класса 1; `predict` — бинарное решение по порогу 0.5</a:t>
             </a:r>
           </a:p>
           <a:p>
@@ -6294,7 +6318,7 @@
                   <a:srgbClr val="000000"/>
                 </a:solidFill>
               </a:rPr>
-              <a:t xml:space="preserve">Главная ценность модели — </a:t>
+              <a:t xml:space="preserve">• Главная ценность модели — </a:t>
             </a:r>
             <a:r>
               <a:rPr lang="ru-RU" dirty="0" sz="2000" b="1">
@@ -6324,7 +6348,7 @@
         <p:spPr>
           <a:xfrm>
             <a:off x="640080" y="4690872"/>
-            <a:ext cx="6766560" cy="804672"/>
+            <a:ext cx="6172200" cy="630936"/>
           </a:xfrm>
           <a:prstGeom prst="rect">
             <a:avLst/>
@@ -6369,7 +6393,7 @@
         <p:spPr>
           <a:xfrm>
             <a:off x="713231" y="4727448"/>
-            <a:ext cx="6620256" cy="731520"/>
+            <a:ext cx="6025896" cy="557784"/>
           </a:xfrm>
           <a:prstGeom prst="rect">
             <a:avLst/>
@@ -6394,7 +6418,7 @@
                 </a:solidFill>
                 <a:latin typeface="Consolas"/>
               </a:rPr>
-              <a:t>from sklearn.linear_model import LogisticRegression</a:t>
+              <a:t>clf = LogisticRegression(C=1.0, random_state=42)</a:t>
             </a:r>
           </a:p>
           <a:p>
@@ -6410,7 +6434,7 @@
                 </a:solidFill>
                 <a:latin typeface="Consolas"/>
               </a:rPr>
-              <a:t>clf = LogisticRegression(C=1.0, random_state=42)</a:t>
+              <a:t>clf.fit(X_train, y_train)</a:t>
             </a:r>
           </a:p>
           <a:p>
@@ -6426,22 +6450,6 @@
                 </a:solidFill>
                 <a:latin typeface="Consolas"/>
               </a:rPr>
-              <a:t>clf.fit(X_train, y_train)</a:t>
-            </a:r>
-          </a:p>
-          <a:p>
-            <a:pPr>
-              <a:spcAft>
-                <a:spcPts val="0"/>
-              </a:spcAft>
-            </a:pPr>
-            <a:r>
-              <a:rPr sz="1100">
-                <a:solidFill>
-                  <a:srgbClr val="000000"/>
-                </a:solidFill>
-                <a:latin typeface="Consolas"/>
-              </a:rPr>
               <a:t>y_pred = clf.predict(X_test)</a:t>
             </a:r>
           </a:p>
@@ -6455,8 +6463,8 @@
         </p:nvSpPr>
         <p:spPr>
           <a:xfrm>
-            <a:off x="640080" y="5550408"/>
-            <a:ext cx="6766560" cy="201168"/>
+            <a:off x="640080" y="5376672"/>
+            <a:ext cx="6172200" cy="201168"/>
           </a:xfrm>
           <a:prstGeom prst="rect">
             <a:avLst/>
@@ -6498,8 +6506,8 @@
         </p:blipFill>
         <p:spPr>
           <a:xfrm>
-            <a:off x="7635240" y="2909599"/>
-            <a:ext cx="4343400" cy="1313121"/>
+            <a:off x="7269480" y="1325880"/>
+            <a:ext cx="4465015" cy="1327629"/>
           </a:xfrm>
           <a:prstGeom prst="rect">
             <a:avLst/>
@@ -6566,7 +6574,7 @@
         <p:spPr>
           <a:xfrm>
             <a:off x="640080" y="1371600"/>
-            <a:ext cx="6858000" cy="3035807"/>
+            <a:ext cx="6263640" cy="2569463"/>
           </a:xfrm>
           <a:prstGeom prst="rect">
             <a:avLst/>
@@ -6575,7 +6583,7 @@
         </p:spPr>
         <p:txBody>
           <a:bodyPr wrap="square">
-            <a:normAutofit/>
+            <a:spAutoFit/>
           </a:bodyPr>
           <a:lstStyle/>
           <a:p>
@@ -6590,7 +6598,7 @@
                   <a:srgbClr val="000000"/>
                 </a:solidFill>
               </a:rPr>
-              <a:t>При малой доле минорного класса модель учится предсказывать мажорный</a:t>
+              <a:t>• При малой доле минорного класса модель учится предсказывать мажорный</a:t>
             </a:r>
           </a:p>
           <a:p>
@@ -6600,6 +6608,14 @@
               </a:spcAft>
             </a:pPr>
             <a:r>
+              <a:rPr lang="ru-RU" dirty="0" sz="2000">
+                <a:solidFill>
+                  <a:srgbClr val="000000"/>
+                </a:solidFill>
+              </a:rPr>
+              <a:t xml:space="preserve">• </a:t>
+            </a:r>
+            <a:r>
               <a:rPr lang="ru-RU" dirty="0" sz="2000" b="1">
                 <a:solidFill>
                   <a:srgbClr val="000000"/>
@@ -6623,6 +6639,14 @@
               </a:spcAft>
             </a:pPr>
             <a:r>
+              <a:rPr lang="ru-RU" dirty="0" sz="2000">
+                <a:solidFill>
+                  <a:srgbClr val="000000"/>
+                </a:solidFill>
+              </a:rPr>
+              <a:t xml:space="preserve">• </a:t>
+            </a:r>
+            <a:r>
               <a:rPr lang="ru-RU" dirty="0" sz="2000" b="1">
                 <a:solidFill>
                   <a:srgbClr val="000000"/>
@@ -6646,6 +6670,14 @@
               </a:spcAft>
             </a:pPr>
             <a:r>
+              <a:rPr lang="ru-RU" dirty="0" sz="2000">
+                <a:solidFill>
+                  <a:srgbClr val="000000"/>
+                </a:solidFill>
+              </a:rPr>
+              <a:t xml:space="preserve">• </a:t>
+            </a:r>
+            <a:r>
               <a:rPr lang="ru-RU" dirty="0" sz="2000" b="1">
                 <a:solidFill>
                   <a:srgbClr val="000000"/>
@@ -6672,8 +6704,8 @@
         </p:nvSpPr>
         <p:spPr>
           <a:xfrm>
-            <a:off x="640080" y="4517136"/>
-            <a:ext cx="6766560" cy="978407"/>
+            <a:off x="640080" y="4288536"/>
+            <a:ext cx="6172200" cy="978407"/>
           </a:xfrm>
           <a:prstGeom prst="rect">
             <a:avLst/>
@@ -6717,8 +6749,8 @@
         </p:nvSpPr>
         <p:spPr>
           <a:xfrm>
-            <a:off x="713231" y="4553712"/>
-            <a:ext cx="6620256" cy="905255"/>
+            <a:off x="713231" y="4325112"/>
+            <a:ext cx="6025896" cy="905255"/>
           </a:xfrm>
           <a:prstGeom prst="rect">
             <a:avLst/>
@@ -6820,8 +6852,8 @@
         </p:nvSpPr>
         <p:spPr>
           <a:xfrm>
-            <a:off x="640080" y="5550407"/>
-            <a:ext cx="6766560" cy="201168"/>
+            <a:off x="640080" y="5321807"/>
+            <a:ext cx="6172200" cy="201168"/>
           </a:xfrm>
           <a:prstGeom prst="rect">
             <a:avLst/>
@@ -6863,8 +6895,8 @@
         </p:blipFill>
         <p:spPr>
           <a:xfrm>
-            <a:off x="7635240" y="2743231"/>
-            <a:ext cx="4343400" cy="1645857"/>
+            <a:off x="7398032" y="1325880"/>
+            <a:ext cx="4207910" cy="4407407"/>
           </a:xfrm>
           <a:prstGeom prst="rect">
             <a:avLst/>
@@ -6931,7 +6963,7 @@
         <p:spPr>
           <a:xfrm>
             <a:off x="640080" y="1371600"/>
-            <a:ext cx="6858000" cy="3209544"/>
+            <a:ext cx="6263640" cy="2697480"/>
           </a:xfrm>
           <a:prstGeom prst="rect">
             <a:avLst/>
@@ -6940,7 +6972,7 @@
         </p:spPr>
         <p:txBody>
           <a:bodyPr wrap="square">
-            <a:normAutofit/>
+            <a:spAutoFit/>
           </a:bodyPr>
           <a:lstStyle/>
           <a:p>
@@ -6955,7 +6987,7 @@
                   <a:srgbClr val="000000"/>
                 </a:solidFill>
               </a:rPr>
-              <a:t xml:space="preserve">LogReg </a:t>
+              <a:t xml:space="preserve">• LogReg </a:t>
             </a:r>
             <a:r>
               <a:rPr lang="ru-RU" dirty="0" sz="2000" b="1">
@@ -6986,7 +7018,7 @@
                   <a:srgbClr val="000000"/>
                 </a:solidFill>
               </a:rPr>
-              <a:t>Деревья и градиентный бустинг часто переуверены (0.99 при реальных ~0.7)</a:t>
+              <a:t>• Деревья и градиентный бустинг часто переуверены (0.99 при реальных ~0.7)</a:t>
             </a:r>
           </a:p>
           <a:p>
@@ -7001,7 +7033,7 @@
                   <a:srgbClr val="000000"/>
                 </a:solidFill>
               </a:rPr>
-              <a:t>Для них — `CalibratedClassifierCV` (Platt scaling, Isotonic regression)</a:t>
+              <a:t>• Для них — `CalibratedClassifierCV` (Platt scaling, Isotonic regression)</a:t>
             </a:r>
           </a:p>
           <a:p>
@@ -7016,7 +7048,7 @@
                   <a:srgbClr val="000000"/>
                 </a:solidFill>
               </a:rPr>
-              <a:t xml:space="preserve">Для LogReg калибровка </a:t>
+              <a:t xml:space="preserve">• Для LogReg калибровка </a:t>
             </a:r>
             <a:r>
               <a:rPr lang="ru-RU" dirty="0" sz="2000" b="1">
@@ -7038,7 +7070,7 @@
         <p:spPr>
           <a:xfrm>
             <a:off x="640080" y="4690872"/>
-            <a:ext cx="6766560" cy="804672"/>
+            <a:ext cx="6172200" cy="630936"/>
           </a:xfrm>
           <a:prstGeom prst="rect">
             <a:avLst/>
@@ -7083,7 +7115,7 @@
         <p:spPr>
           <a:xfrm>
             <a:off x="713231" y="4727448"/>
-            <a:ext cx="6620256" cy="731520"/>
+            <a:ext cx="6025896" cy="557784"/>
           </a:xfrm>
           <a:prstGeom prst="rect">
             <a:avLst/>
@@ -7108,7 +7140,7 @@
                 </a:solidFill>
                 <a:latin typeface="Consolas"/>
               </a:rPr>
-              <a:t>from sklearn.calibration import CalibratedClassifierCV</a:t>
+              <a:t>cal = CalibratedClassifierCV(clf, cv=3)</a:t>
             </a:r>
           </a:p>
           <a:p>
@@ -7124,7 +7156,7 @@
                 </a:solidFill>
                 <a:latin typeface="Consolas"/>
               </a:rPr>
-              <a:t>cal = CalibratedClassifierCV(clf, cv=3)</a:t>
+              <a:t>cal.fit(X_train, y_train)</a:t>
             </a:r>
           </a:p>
           <a:p>
@@ -7140,22 +7172,6 @@
                 </a:solidFill>
                 <a:latin typeface="Consolas"/>
               </a:rPr>
-              <a:t>cal.fit(X_train, y_train)</a:t>
-            </a:r>
-          </a:p>
-          <a:p>
-            <a:pPr>
-              <a:spcAft>
-                <a:spcPts val="0"/>
-              </a:spcAft>
-            </a:pPr>
-            <a:r>
-              <a:rPr sz="1100">
-                <a:solidFill>
-                  <a:srgbClr val="000000"/>
-                </a:solidFill>
-                <a:latin typeface="Consolas"/>
-              </a:rPr>
               <a:t>p_cal = cal.predict_proba(X_test)[:, 1]</a:t>
             </a:r>
           </a:p>
@@ -7169,8 +7185,8 @@
         </p:nvSpPr>
         <p:spPr>
           <a:xfrm>
-            <a:off x="640080" y="5550408"/>
-            <a:ext cx="6766560" cy="201168"/>
+            <a:off x="640080" y="5376672"/>
+            <a:ext cx="6172200" cy="201168"/>
           </a:xfrm>
           <a:prstGeom prst="rect">
             <a:avLst/>
@@ -7212,8 +7228,8 @@
         </p:blipFill>
         <p:spPr>
           <a:xfrm>
-            <a:off x="7635240" y="2743231"/>
-            <a:ext cx="4343400" cy="1645857"/>
+            <a:off x="7474430" y="1325880"/>
+            <a:ext cx="4055115" cy="4407408"/>
           </a:xfrm>
           <a:prstGeom prst="rect">
             <a:avLst/>
@@ -7280,7 +7296,7 @@
         <p:spPr>
           <a:xfrm>
             <a:off x="640080" y="1371600"/>
-            <a:ext cx="6858000" cy="3209544"/>
+            <a:ext cx="6263640" cy="2697480"/>
           </a:xfrm>
           <a:prstGeom prst="rect">
             <a:avLst/>
@@ -7289,7 +7305,7 @@
         </p:spPr>
         <p:txBody>
           <a:bodyPr wrap="square">
-            <a:normAutofit/>
+            <a:spAutoFit/>
           </a:bodyPr>
           <a:lstStyle/>
           <a:p>
@@ -7304,7 +7320,7 @@
                   <a:srgbClr val="000000"/>
                 </a:solidFill>
               </a:rPr>
-              <a:t xml:space="preserve">Не работает при </a:t>
+              <a:t xml:space="preserve">• Не работает при </a:t>
             </a:r>
             <a:r>
               <a:rPr lang="ru-RU" dirty="0" sz="2000" b="1">
@@ -7335,7 +7351,7 @@
                   <a:srgbClr val="000000"/>
                 </a:solidFill>
               </a:rPr>
-              <a:t>Решения: полиномиальные признаки (</a:t>
+              <a:t>• Решения: полиномиальные признаки (</a:t>
             </a:r>
             <ns0:m xmlns:ns0="http://schemas.microsoft.com/office/drawing/2010/main">
               <m:oMath xmlns:m="http://schemas.openxmlformats.org/officeDocument/2006/math">
@@ -7400,6 +7416,14 @@
                 <a:spcPts val="800"/>
               </a:spcAft>
             </a:pPr>
+            <a:r>
+              <a:rPr lang="ru-RU" dirty="0" sz="2000">
+                <a:solidFill>
+                  <a:srgbClr val="000000"/>
+                </a:solidFill>
+              </a:rPr>
+              <a:t xml:space="preserve">• </a:t>
+            </a:r>
             <ns0:m xmlns:ns0="http://schemas.microsoft.com/office/drawing/2010/main">
               <m:oMath xmlns:m="http://schemas.openxmlformats.org/officeDocument/2006/math">
                 <m:r>
@@ -7466,7 +7490,7 @@
                   <a:srgbClr val="000000"/>
                 </a:solidFill>
               </a:rPr>
-              <a:t xml:space="preserve">LogReg — это </a:t>
+              <a:t xml:space="preserve">• LogReg — это </a:t>
             </a:r>
             <a:r>
               <a:rPr lang="ru-RU" dirty="0" sz="2000" b="1">
@@ -7496,7 +7520,7 @@
         <p:spPr>
           <a:xfrm>
             <a:off x="640080" y="4690872"/>
-            <a:ext cx="6766560" cy="804672"/>
+            <a:ext cx="6172200" cy="630936"/>
           </a:xfrm>
           <a:prstGeom prst="rect">
             <a:avLst/>
@@ -7541,7 +7565,7 @@
         <p:spPr>
           <a:xfrm>
             <a:off x="713231" y="4727448"/>
-            <a:ext cx="6620256" cy="731520"/>
+            <a:ext cx="6025896" cy="557784"/>
           </a:xfrm>
           <a:prstGeom prst="rect">
             <a:avLst/>
@@ -7566,7 +7590,7 @@
                 </a:solidFill>
                 <a:latin typeface="Consolas"/>
               </a:rPr>
-              <a:t>from sklearn.neural_network import MLPClassifier</a:t>
+              <a:t>mlp = MLPClassifier(hidden_layer_sizes=(8,), max_iter=500)</a:t>
             </a:r>
           </a:p>
           <a:p>
@@ -7582,7 +7606,7 @@
                 </a:solidFill>
                 <a:latin typeface="Consolas"/>
               </a:rPr>
-              <a:t>mlp = MLPClassifier(hidden_layer_sizes=(8,), max_iter=500)</a:t>
+              <a:t>mlp.fit(X_train, y_train)</a:t>
             </a:r>
           </a:p>
           <a:p>
@@ -7598,22 +7622,6 @@
                 </a:solidFill>
                 <a:latin typeface="Consolas"/>
               </a:rPr>
-              <a:t>mlp.fit(X_train, y_train)</a:t>
-            </a:r>
-          </a:p>
-          <a:p>
-            <a:pPr>
-              <a:spcAft>
-                <a:spcPts val="0"/>
-              </a:spcAft>
-            </a:pPr>
-            <a:r>
-              <a:rPr sz="1100">
-                <a:solidFill>
-                  <a:srgbClr val="000000"/>
-                </a:solidFill>
-                <a:latin typeface="Consolas"/>
-              </a:rPr>
               <a:t># один скрытый слой ≈ нелинейная логистическая</a:t>
             </a:r>
           </a:p>
@@ -7627,8 +7635,8 @@
         </p:nvSpPr>
         <p:spPr>
           <a:xfrm>
-            <a:off x="640080" y="5550408"/>
-            <a:ext cx="6766560" cy="201168"/>
+            <a:off x="640080" y="5376672"/>
+            <a:ext cx="6172200" cy="201168"/>
           </a:xfrm>
           <a:prstGeom prst="rect">
             <a:avLst/>
@@ -7670,8 +7678,8 @@
         </p:blipFill>
         <p:spPr>
           <a:xfrm>
-            <a:off x="7635240" y="2743231"/>
-            <a:ext cx="4343400" cy="1645857"/>
+            <a:off x="7476303" y="1325880"/>
+            <a:ext cx="4051367" cy="4407408"/>
           </a:xfrm>
           <a:prstGeom prst="rect">
             <a:avLst/>
@@ -7738,7 +7746,7 @@
         <p:spPr>
           <a:xfrm>
             <a:off x="640080" y="1371600"/>
-            <a:ext cx="6858000" cy="2194560"/>
+            <a:ext cx="6263640" cy="2971800"/>
           </a:xfrm>
           <a:prstGeom prst="rect">
             <a:avLst/>
@@ -7757,6 +7765,14 @@
               </a:spcAft>
             </a:pPr>
             <a:r>
+              <a:rPr lang="ru-RU" dirty="0" sz="2000">
+                <a:solidFill>
+                  <a:srgbClr val="000000"/>
+                </a:solidFill>
+              </a:rPr>
+              <a:t xml:space="preserve">• </a:t>
+            </a:r>
+            <a:r>
               <a:rPr lang="ru-RU" dirty="0" sz="2000" b="1">
                 <a:solidFill>
                   <a:srgbClr val="000000"/>
@@ -7779,6 +7795,14 @@
                 <a:spcPts val="800"/>
               </a:spcAft>
             </a:pPr>
+            <a:r>
+              <a:rPr lang="ru-RU" dirty="0" sz="2000">
+                <a:solidFill>
+                  <a:srgbClr val="000000"/>
+                </a:solidFill>
+              </a:rPr>
+              <a:t xml:space="preserve">• </a:t>
+            </a:r>
             <a:r>
               <a:rPr lang="ru-RU" dirty="0" sz="2000" b="1">
                 <a:solidFill>
@@ -7839,6 +7863,14 @@
               </a:spcAft>
             </a:pPr>
             <a:r>
+              <a:rPr lang="ru-RU" dirty="0" sz="2000">
+                <a:solidFill>
+                  <a:srgbClr val="000000"/>
+                </a:solidFill>
+              </a:rPr>
+              <a:t xml:space="preserve">• </a:t>
+            </a:r>
+            <a:r>
               <a:rPr lang="ru-RU" dirty="0" sz="2000" b="1">
                 <a:solidFill>
                   <a:srgbClr val="000000"/>
@@ -7884,6 +7916,14 @@
               </a:spcAft>
             </a:pPr>
             <a:r>
+              <a:rPr lang="ru-RU" dirty="0" sz="2000">
+                <a:solidFill>
+                  <a:srgbClr val="000000"/>
+                </a:solidFill>
+              </a:rPr>
+              <a:t xml:space="preserve">• </a:t>
+            </a:r>
+            <a:r>
               <a:rPr lang="ru-RU" dirty="0" sz="2000" b="1">
                 <a:solidFill>
                   <a:srgbClr val="000000"/>
@@ -7922,6 +7962,14 @@
                 <a:spcPts val="800"/>
               </a:spcAft>
             </a:pPr>
+            <a:r>
+              <a:rPr lang="ru-RU" dirty="0" sz="2000">
+                <a:solidFill>
+                  <a:srgbClr val="000000"/>
+                </a:solidFill>
+              </a:rPr>
+              <a:t xml:space="preserve">• </a:t>
+            </a:r>
             <a:r>
               <a:rPr lang="ru-RU" dirty="0" sz="2000" b="1">
                 <a:solidFill>
@@ -7964,8 +8012,8 @@
         </p:blipFill>
         <p:spPr>
           <a:xfrm>
-            <a:off x="7635240" y="2743231"/>
-            <a:ext cx="4343400" cy="1645857"/>
+            <a:off x="7416339" y="1325880"/>
+            <a:ext cx="4171296" cy="4407407"/>
           </a:xfrm>
           <a:prstGeom prst="rect">
             <a:avLst/>
@@ -8032,7 +8080,7 @@
         <p:spPr>
           <a:xfrm>
             <a:off x="640080" y="1371600"/>
-            <a:ext cx="11247120" cy="2578608"/>
+            <a:ext cx="5532120" cy="2423160"/>
           </a:xfrm>
           <a:prstGeom prst="rect">
             <a:avLst/>
@@ -8056,7 +8104,7 @@
                   <a:srgbClr val="000000"/>
                 </a:solidFill>
               </a:rPr>
-              <a:t xml:space="preserve">Начинай с логистической регрессии как </a:t>
+              <a:t xml:space="preserve">• Начинай с логистической регрессии как </a:t>
             </a:r>
             <a:r>
               <a:rPr lang="ru-RU" dirty="0" sz="2000" b="1">
@@ -8079,7 +8127,7 @@
                   <a:srgbClr val="000000"/>
                 </a:solidFill>
               </a:rPr>
-              <a:t>Используй `Pipeline` и `StandardScaler` — чувствительность к масштабу из-за регуляризации</a:t>
+              <a:t>• Используй `Pipeline` и `StandardScaler` — чувствительность к масштабу из-за регуляризации</a:t>
             </a:r>
           </a:p>
           <a:p>
@@ -8094,9 +8142,32 @@
                   <a:srgbClr val="000000"/>
                 </a:solidFill>
               </a:rPr>
-              <a:t>Смотри на `predict_proba` — вероятности важнее бинарных решений</a:t>
-            </a:r>
-          </a:p>
+              <a:t>• Смотри на `predict_proba` — вероятности важнее бинарных решений</a:t>
+            </a:r>
+          </a:p>
+        </p:txBody>
+      </p:sp>
+      <p:sp>
+        <p:nvSpPr>
+          <p:cNvPr id="4" name="TextBox 3"/>
+          <p:cNvSpPr txBox="1"/>
+          <p:nvPr/>
+        </p:nvSpPr>
+        <p:spPr>
+          <a:xfrm>
+            <a:off x="6355080" y="1371600"/>
+            <a:ext cx="5532120" cy="2423160"/>
+          </a:xfrm>
+          <a:prstGeom prst="rect">
+            <a:avLst/>
+          </a:prstGeom>
+          <a:noFill/>
+        </p:spPr>
+        <p:txBody>
+          <a:bodyPr wrap="square">
+            <a:spAutoFit/>
+          </a:bodyPr>
+          <a:lstStyle/>
           <a:p>
             <a:pPr>
               <a:spcAft>
@@ -8109,7 +8180,7 @@
                   <a:srgbClr val="000000"/>
                 </a:solidFill>
               </a:rPr>
-              <a:t>При дисбалансе используй PR-кривую, F1-score и `class_weight='balanced'`</a:t>
+              <a:t>• При дисбалансе используй PR-кривую, F1-score и `class_weight='balanced'`</a:t>
             </a:r>
           </a:p>
           <a:p>
@@ -8124,7 +8195,7 @@
                   <a:srgbClr val="000000"/>
                 </a:solidFill>
               </a:rPr>
-              <a:t>Для мультикласса — `multinomial` с Softmax</a:t>
+              <a:t>• Для мультикласса — `multinomial` с Softmax</a:t>
             </a:r>
           </a:p>
           <a:p>
@@ -8139,7 +8210,7 @@
                   <a:srgbClr val="000000"/>
                 </a:solidFill>
               </a:rPr>
-              <a:t>Помни: граница решения линейная; если не хватает — полиномы или деревья/нейросети</a:t>
+              <a:t>• Помни: граница решения линейная; если не хватает — полиномы или деревья/нейросети</a:t>
             </a:r>
           </a:p>
         </p:txBody>
@@ -8204,7 +8275,7 @@
         <p:spPr>
           <a:xfrm>
             <a:off x="640080" y="1371600"/>
-            <a:ext cx="6858000" cy="1810512"/>
+            <a:ext cx="6263640" cy="3246120"/>
           </a:xfrm>
           <a:prstGeom prst="rect">
             <a:avLst/>
@@ -8228,7 +8299,7 @@
                   <a:srgbClr val="000000"/>
                 </a:solidFill>
               </a:rPr>
-              <a:t xml:space="preserve">Классификация — предсказание </a:t>
+              <a:t xml:space="preserve">• Классификация — предсказание </a:t>
             </a:r>
             <a:r>
               <a:rPr lang="ru-RU" dirty="0" sz="2000" b="1">
@@ -8259,7 +8330,7 @@
                   <a:srgbClr val="000000"/>
                 </a:solidFill>
               </a:rPr>
-              <a:t>В отличие от регрессии ответ — не непрерывное число, а метка категории</a:t>
+              <a:t>• В отличие от регрессии ответ — не непрерывное число, а метка категории</a:t>
             </a:r>
           </a:p>
           <a:p>
@@ -8274,7 +8345,7 @@
                   <a:srgbClr val="000000"/>
                 </a:solidFill>
               </a:rPr>
-              <a:t xml:space="preserve">Цель — найти </a:t>
+              <a:t xml:space="preserve">• Цель — найти </a:t>
             </a:r>
             <a:r>
               <a:rPr lang="ru-RU" dirty="0" sz="2000" b="1">
@@ -8305,7 +8376,7 @@
                   <a:srgbClr val="000000"/>
                 </a:solidFill>
               </a:rPr>
-              <a:t>Логистическая регрессия — интерпретируемый baseline для таких задач</a:t>
+              <a:t>• Логистическая регрессия — интерпретируемый baseline для таких задач</a:t>
             </a:r>
           </a:p>
         </p:txBody>
@@ -8326,8 +8397,8 @@
         </p:blipFill>
         <p:spPr>
           <a:xfrm>
-            <a:off x="7635240" y="1937384"/>
-            <a:ext cx="4343400" cy="3257550"/>
+            <a:off x="7269480" y="1325880"/>
+            <a:ext cx="4465015" cy="3123673"/>
           </a:xfrm>
           <a:prstGeom prst="rect">
             <a:avLst/>
@@ -8840,7 +8911,7 @@
         <p:spPr>
           <a:xfrm>
             <a:off x="640080" y="1371600"/>
-            <a:ext cx="6858000" cy="3209544"/>
+            <a:ext cx="6263640" cy="2770631"/>
           </a:xfrm>
           <a:prstGeom prst="rect">
             <a:avLst/>
@@ -8849,7 +8920,7 @@
         </p:spPr>
         <p:txBody>
           <a:bodyPr wrap="square">
-            <a:normAutofit/>
+            <a:spAutoFit/>
           </a:bodyPr>
           <a:lstStyle/>
           <a:p>
@@ -8859,6 +8930,14 @@
               </a:spcAft>
             </a:pPr>
             <a:r>
+              <a:rPr lang="ru-RU" dirty="0" sz="2000">
+                <a:solidFill>
+                  <a:srgbClr val="000000"/>
+                </a:solidFill>
+              </a:rPr>
+              <a:t xml:space="preserve">• </a:t>
+            </a:r>
+            <a:r>
               <a:rPr lang="ru-RU" dirty="0" sz="2000" b="1">
                 <a:solidFill>
                   <a:srgbClr val="000000"/>
@@ -8887,7 +8966,7 @@
                   <a:srgbClr val="000000"/>
                 </a:solidFill>
               </a:rPr>
-              <a:t xml:space="preserve">Предсказания выходят за </a:t>
+              <a:t xml:space="preserve">• Предсказания выходят за </a:t>
             </a:r>
             <ns0:m xmlns:ns0="http://schemas.microsoft.com/office/drawing/2010/main">
               <m:oMath xmlns:m="http://schemas.openxmlformats.org/officeDocument/2006/math">
@@ -8961,7 +9040,7 @@
                   <a:srgbClr val="000000"/>
                 </a:solidFill>
               </a:rPr>
-              <a:t xml:space="preserve">Один выброс сдвигает разделяющую линию </a:t>
+              <a:t xml:space="preserve">• Один выброс сдвигает разделяющую линию </a:t>
             </a:r>
             <a:r>
               <a:rPr lang="ru-RU" dirty="0" sz="2000" b="1">
@@ -8984,7 +9063,7 @@
                   <a:srgbClr val="000000"/>
                 </a:solidFill>
               </a:rPr>
-              <a:t>MSE слабо штрафует «уверенные правильные» ответы — нужна модель, созданная для вероятностей</a:t>
+              <a:t>• MSE слабо штрафует «уверенные правильные» ответы — нужна модель, созданная для вероятностей</a:t>
             </a:r>
           </a:p>
         </p:txBody>
@@ -8997,8 +9076,8 @@
         </p:nvSpPr>
         <p:spPr>
           <a:xfrm>
-            <a:off x="640080" y="4690872"/>
-            <a:ext cx="6766560" cy="804672"/>
+            <a:off x="640080" y="4489703"/>
+            <a:ext cx="6172200" cy="804672"/>
           </a:xfrm>
           <a:prstGeom prst="rect">
             <a:avLst/>
@@ -9042,8 +9121,8 @@
         </p:nvSpPr>
         <p:spPr>
           <a:xfrm>
-            <a:off x="713231" y="4727448"/>
-            <a:ext cx="6620256" cy="731520"/>
+            <a:off x="713231" y="4526279"/>
+            <a:ext cx="6025896" cy="731520"/>
           </a:xfrm>
           <a:prstGeom prst="rect">
             <a:avLst/>
@@ -9129,8 +9208,8 @@
         </p:nvSpPr>
         <p:spPr>
           <a:xfrm>
-            <a:off x="640080" y="5550408"/>
-            <a:ext cx="6766560" cy="201168"/>
+            <a:off x="640080" y="5349240"/>
+            <a:ext cx="6172200" cy="201168"/>
           </a:xfrm>
           <a:prstGeom prst="rect">
             <a:avLst/>
@@ -9172,8 +9251,8 @@
         </p:blipFill>
         <p:spPr>
           <a:xfrm>
-            <a:off x="7635240" y="2743231"/>
-            <a:ext cx="4343400" cy="1645857"/>
+            <a:off x="7269480" y="1325880"/>
+            <a:ext cx="4465015" cy="3835542"/>
           </a:xfrm>
           <a:prstGeom prst="rect">
             <a:avLst/>
@@ -9240,7 +9319,7 @@
         <p:spPr>
           <a:xfrm>
             <a:off x="640080" y="1371600"/>
-            <a:ext cx="6858000" cy="3035807"/>
+            <a:ext cx="6263640" cy="2697480"/>
           </a:xfrm>
           <a:prstGeom prst="rect">
             <a:avLst/>
@@ -9249,7 +9328,7 @@
         </p:spPr>
         <p:txBody>
           <a:bodyPr wrap="square">
-            <a:normAutofit/>
+            <a:spAutoFit/>
           </a:bodyPr>
           <a:lstStyle/>
           <a:p>
@@ -9264,7 +9343,7 @@
                   <a:srgbClr val="000000"/>
                 </a:solidFill>
               </a:rPr>
-              <a:t xml:space="preserve">Линейная комбинация: </a:t>
+              <a:t xml:space="preserve">• Линейная комбинация: </a:t>
             </a:r>
             <ns0:m xmlns:ns0="http://schemas.microsoft.com/office/drawing/2010/main">
               <m:oMath xmlns:m="http://schemas.openxmlformats.org/officeDocument/2006/math">
@@ -9311,6 +9390,14 @@
               </a:spcAft>
             </a:pPr>
             <a:r>
+              <a:rPr lang="ru-RU" dirty="0" sz="2000">
+                <a:solidFill>
+                  <a:srgbClr val="000000"/>
+                </a:solidFill>
+              </a:rPr>
+              <a:t xml:space="preserve">• </a:t>
+            </a:r>
+            <a:r>
               <a:rPr lang="ru-RU" dirty="0" sz="2000" b="1">
                 <a:solidFill>
                   <a:srgbClr val="000000"/>
@@ -9373,7 +9460,7 @@
                   <a:srgbClr val="000000"/>
                 </a:solidFill>
               </a:rPr>
-              <a:t xml:space="preserve">S-образная кривая: при </a:t>
+              <a:t xml:space="preserve">• S-образная кривая: при </a:t>
             </a:r>
             <ns0:m xmlns:ns0="http://schemas.microsoft.com/office/drawing/2010/main">
               <m:oMath xmlns:m="http://schemas.openxmlformats.org/officeDocument/2006/math">
@@ -9440,7 +9527,7 @@
                   <a:srgbClr val="000000"/>
                 </a:solidFill>
               </a:rPr>
-              <a:t xml:space="preserve">Выход модели — </a:t>
+              <a:t xml:space="preserve">• Выход модели — </a:t>
             </a:r>
             <a:r>
               <a:rPr lang="ru-RU" dirty="0" sz="2000" b="1">
@@ -9521,8 +9608,8 @@
         </p:nvSpPr>
         <p:spPr>
           <a:xfrm>
-            <a:off x="640080" y="4517136"/>
-            <a:ext cx="6766560" cy="978407"/>
+            <a:off x="640080" y="4489703"/>
+            <a:ext cx="6172200" cy="804672"/>
           </a:xfrm>
           <a:prstGeom prst="rect">
             <a:avLst/>
@@ -9566,8 +9653,8 @@
         </p:nvSpPr>
         <p:spPr>
           <a:xfrm>
-            <a:off x="713231" y="4553712"/>
-            <a:ext cx="6620256" cy="905255"/>
+            <a:off x="713231" y="4526279"/>
+            <a:ext cx="6025896" cy="731520"/>
           </a:xfrm>
           <a:prstGeom prst="rect">
             <a:avLst/>
@@ -9592,7 +9679,7 @@
                 </a:solidFill>
                 <a:latin typeface="Consolas"/>
               </a:rPr>
-              <a:t>import numpy as np</a:t>
+              <a:t>def sigmoid(z):</a:t>
             </a:r>
           </a:p>
           <a:p>
@@ -9608,7 +9695,7 @@
                 </a:solidFill>
                 <a:latin typeface="Consolas"/>
               </a:rPr>
-              <a:t>def sigmoid(z):</a:t>
+              <a:t>    return 1 / (1 + np.exp(-z))</a:t>
             </a:r>
           </a:p>
           <a:p>
@@ -9624,7 +9711,7 @@
                 </a:solidFill>
                 <a:latin typeface="Consolas"/>
               </a:rPr>
-              <a:t>    return 1 / (1 + np.exp(-z))</a:t>
+              <a:t>z = np.linspace(-6, 6, 100)</a:t>
             </a:r>
           </a:p>
           <a:p>
@@ -9640,22 +9727,6 @@
                 </a:solidFill>
                 <a:latin typeface="Consolas"/>
               </a:rPr>
-              <a:t>z = np.linspace(-6, 6, 100)</a:t>
-            </a:r>
-          </a:p>
-          <a:p>
-            <a:pPr>
-              <a:spcAft>
-                <a:spcPts val="0"/>
-              </a:spcAft>
-            </a:pPr>
-            <a:r>
-              <a:rPr sz="1100">
-                <a:solidFill>
-                  <a:srgbClr val="000000"/>
-                </a:solidFill>
-                <a:latin typeface="Consolas"/>
-              </a:rPr>
               <a:t>p = sigmoid(z)  # всегда в (0, 1)</a:t>
             </a:r>
           </a:p>
@@ -9669,8 +9740,8 @@
         </p:nvSpPr>
         <p:spPr>
           <a:xfrm>
-            <a:off x="640080" y="5550407"/>
-            <a:ext cx="6766560" cy="201168"/>
+            <a:off x="640080" y="5349240"/>
+            <a:ext cx="6172200" cy="201168"/>
           </a:xfrm>
           <a:prstGeom prst="rect">
             <a:avLst/>
@@ -9712,8 +9783,8 @@
         </p:blipFill>
         <p:spPr>
           <a:xfrm>
-            <a:off x="7635240" y="2073874"/>
-            <a:ext cx="4343400" cy="2984571"/>
+            <a:off x="7269480" y="1325880"/>
+            <a:ext cx="4465015" cy="2473914"/>
           </a:xfrm>
           <a:prstGeom prst="rect">
             <a:avLst/>
@@ -9780,7 +9851,7 @@
         <p:spPr>
           <a:xfrm>
             <a:off x="640080" y="1371600"/>
-            <a:ext cx="6858000" cy="1810512"/>
+            <a:ext cx="6263640" cy="2971800"/>
           </a:xfrm>
           <a:prstGeom prst="rect">
             <a:avLst/>
@@ -9804,7 +9875,7 @@
                   <a:srgbClr val="000000"/>
                 </a:solidFill>
               </a:rPr>
-              <a:t xml:space="preserve">Если </a:t>
+              <a:t xml:space="preserve">• Если </a:t>
             </a:r>
             <ns0:m xmlns:ns0="http://schemas.microsoft.com/office/drawing/2010/main">
               <m:oMath xmlns:m="http://schemas.openxmlformats.org/officeDocument/2006/math">
@@ -9849,7 +9920,7 @@
                   <a:srgbClr val="000000"/>
                 </a:solidFill>
               </a:rPr>
-              <a:t xml:space="preserve">Порог 0.5 соответствует </a:t>
+              <a:t xml:space="preserve">• Порог 0.5 соответствует </a:t>
             </a:r>
             <ns0:m xmlns:ns0="http://schemas.microsoft.com/office/drawing/2010/main">
               <m:oMath xmlns:m="http://schemas.openxmlformats.org/officeDocument/2006/math">
@@ -9914,7 +9985,7 @@
                   <a:srgbClr val="000000"/>
                 </a:solidFill>
               </a:rPr>
-              <a:t>Порог можно менять: например 0.7 в медицине — лучше ложная тревога, чем пропуск болезни</a:t>
+              <a:t>• Порог можно менять: например 0.7 в медицине — лучше ложная тревога, чем пропуск болезни</a:t>
             </a:r>
           </a:p>
           <a:p>
@@ -9929,7 +10000,7 @@
                   <a:srgbClr val="000000"/>
                 </a:solidFill>
               </a:rPr>
-              <a:t xml:space="preserve">Логистическая регрессия строит только </a:t>
+              <a:t xml:space="preserve">• Логистическая регрессия строит только </a:t>
             </a:r>
             <a:r>
               <a:rPr lang="ru-RU" dirty="0" sz="2000" b="1">
@@ -9966,8 +10037,8 @@
         </p:blipFill>
         <p:spPr>
           <a:xfrm>
-            <a:off x="7635240" y="2753239"/>
-            <a:ext cx="4343400" cy="1625840"/>
+            <a:off x="7534394" y="1325880"/>
+            <a:ext cx="3935185" cy="4407407"/>
           </a:xfrm>
           <a:prstGeom prst="rect">
             <a:avLst/>
@@ -10034,7 +10105,7 @@
         <p:spPr>
           <a:xfrm>
             <a:off x="640080" y="1371600"/>
-            <a:ext cx="6858000" cy="1810512"/>
+            <a:ext cx="6263640" cy="3520439"/>
           </a:xfrm>
           <a:prstGeom prst="rect">
             <a:avLst/>
@@ -10058,7 +10129,7 @@
                   <a:srgbClr val="000000"/>
                 </a:solidFill>
               </a:rPr>
-              <a:t xml:space="preserve">MSE с сигмоидой: </a:t>
+              <a:t xml:space="preserve">• MSE с сигмоидой: </a:t>
             </a:r>
             <ns0:m xmlns:ns0="http://schemas.microsoft.com/office/drawing/2010/main">
               <m:oMath xmlns:m="http://schemas.openxmlformats.org/officeDocument/2006/math">
@@ -10142,6 +10213,14 @@
               </a:spcAft>
             </a:pPr>
             <a:r>
+              <a:rPr lang="ru-RU" dirty="0" sz="2000">
+                <a:solidFill>
+                  <a:srgbClr val="000000"/>
+                </a:solidFill>
+              </a:rPr>
+              <a:t xml:space="preserve">• </a:t>
+            </a:r>
+            <a:r>
               <a:rPr lang="ru-RU" dirty="0" sz="2000" b="1">
                 <a:solidFill>
                   <a:srgbClr val="000000"/>
@@ -10252,7 +10331,7 @@
                   <a:srgbClr val="000000"/>
                 </a:solidFill>
               </a:rPr>
-              <a:t>Веса перестают обновляться — модель «застревает»</a:t>
+              <a:t>• Веса перестают обновляться — модель «застревает»</a:t>
             </a:r>
           </a:p>
           <a:p>
@@ -10261,6 +10340,14 @@
                 <a:spcPts val="800"/>
               </a:spcAft>
             </a:pPr>
+            <a:r>
+              <a:rPr lang="ru-RU" dirty="0" sz="2000">
+                <a:solidFill>
+                  <a:srgbClr val="000000"/>
+                </a:solidFill>
+              </a:rPr>
+              <a:t xml:space="preserve">• </a:t>
+            </a:r>
             <a:r>
               <a:rPr lang="ru-RU" dirty="0" sz="2000" b="1">
                 <a:solidFill>
@@ -10323,8 +10410,8 @@
         </p:blipFill>
         <p:spPr>
           <a:xfrm>
-            <a:off x="7635240" y="2732973"/>
-            <a:ext cx="4343400" cy="1666374"/>
+            <a:off x="7431330" y="1325880"/>
+            <a:ext cx="4141314" cy="4407407"/>
           </a:xfrm>
           <a:prstGeom prst="rect">
             <a:avLst/>
@@ -10391,7 +10478,7 @@
         <p:spPr>
           <a:xfrm>
             <a:off x="640080" y="1371600"/>
-            <a:ext cx="6858000" cy="3035807"/>
+            <a:ext cx="6263640" cy="2697480"/>
           </a:xfrm>
           <a:prstGeom prst="rect">
             <a:avLst/>
@@ -10400,7 +10487,7 @@
         </p:spPr>
         <p:txBody>
           <a:bodyPr wrap="square">
-            <a:normAutofit/>
+            <a:spAutoFit/>
           </a:bodyPr>
           <a:lstStyle/>
           <a:p>
@@ -10409,6 +10496,14 @@
                 <a:spcPts val="800"/>
               </a:spcAft>
             </a:pPr>
+            <a:r>
+              <a:rPr lang="ru-RU" dirty="0" sz="2000">
+                <a:solidFill>
+                  <a:srgbClr val="000000"/>
+                </a:solidFill>
+              </a:rPr>
+              <a:t xml:space="preserve">• </a:t>
+            </a:r>
             <ns0:m xmlns:ns0="http://schemas.microsoft.com/office/drawing/2010/main">
               <m:oMath xmlns:m="http://schemas.openxmlformats.org/officeDocument/2006/math">
                 <m:r>
@@ -10549,7 +10644,7 @@
                   <a:srgbClr val="000000"/>
                 </a:solidFill>
               </a:rPr>
-              <a:t xml:space="preserve">При </a:t>
+              <a:t xml:space="preserve">• При </a:t>
             </a:r>
             <ns0:m xmlns:ns0="http://schemas.microsoft.com/office/drawing/2010/main">
               <m:oMath xmlns:m="http://schemas.openxmlformats.org/officeDocument/2006/math">
@@ -10631,7 +10726,7 @@
                   <a:srgbClr val="000000"/>
                 </a:solidFill>
               </a:rPr>
-              <a:t xml:space="preserve">LogLoss </a:t>
+              <a:t xml:space="preserve">• LogLoss </a:t>
             </a:r>
             <a:r>
               <a:rPr lang="ru-RU" dirty="0" sz="2000" b="1">
@@ -10662,7 +10757,7 @@
                   <a:srgbClr val="000000"/>
                 </a:solidFill>
               </a:rPr>
-              <a:t xml:space="preserve">Минимизация LogLoss эквивалентна </a:t>
+              <a:t xml:space="preserve">• Минимизация LogLoss эквивалентна </a:t>
             </a:r>
             <a:r>
               <a:rPr lang="ru-RU" dirty="0" sz="2000" b="1">
@@ -10691,8 +10786,8 @@
         </p:nvSpPr>
         <p:spPr>
           <a:xfrm>
-            <a:off x="640080" y="4517136"/>
-            <a:ext cx="6766560" cy="978407"/>
+            <a:off x="640080" y="4489703"/>
+            <a:ext cx="6172200" cy="804672"/>
           </a:xfrm>
           <a:prstGeom prst="rect">
             <a:avLst/>
@@ -10736,8 +10831,8 @@
         </p:nvSpPr>
         <p:spPr>
           <a:xfrm>
-            <a:off x="713231" y="4553712"/>
-            <a:ext cx="6620256" cy="905255"/>
+            <a:off x="713231" y="4526279"/>
+            <a:ext cx="6025896" cy="731520"/>
           </a:xfrm>
           <a:prstGeom prst="rect">
             <a:avLst/>
@@ -10762,7 +10857,7 @@
                 </a:solidFill>
                 <a:latin typeface="Consolas"/>
               </a:rPr>
-              <a:t>from sklearn.metrics import log_loss</a:t>
+              <a:t>y_true = [0, 1, 1, 0]</a:t>
             </a:r>
           </a:p>
           <a:p>
@@ -10778,7 +10873,7 @@
                 </a:solidFill>
                 <a:latin typeface="Consolas"/>
               </a:rPr>
-              <a:t>y_true = [0, 1, 1, 0]</a:t>
+              <a:t>y_prob = [0.1, 0.9, 0.8, 0.3]</a:t>
             </a:r>
           </a:p>
           <a:p>
@@ -10794,7 +10889,7 @@
                 </a:solidFill>
                 <a:latin typeface="Consolas"/>
               </a:rPr>
-              <a:t>y_prob = [0.1, 0.9, 0.8, 0.3]</a:t>
+              <a:t>loss = log_loss(y_true, y_prob)</a:t>
             </a:r>
           </a:p>
           <a:p>
@@ -10810,22 +10905,6 @@
                 </a:solidFill>
                 <a:latin typeface="Consolas"/>
               </a:rPr>
-              <a:t>loss = log_loss(y_true, y_prob)</a:t>
-            </a:r>
-          </a:p>
-          <a:p>
-            <a:pPr>
-              <a:spcAft>
-                <a:spcPts val="0"/>
-              </a:spcAft>
-            </a:pPr>
-            <a:r>
-              <a:rPr sz="1100">
-                <a:solidFill>
-                  <a:srgbClr val="000000"/>
-                </a:solidFill>
-                <a:latin typeface="Consolas"/>
-              </a:rPr>
               <a:t>print(f'LogLoss = {loss:.3f}')</a:t>
             </a:r>
           </a:p>
@@ -10839,8 +10918,8 @@
         </p:nvSpPr>
         <p:spPr>
           <a:xfrm>
-            <a:off x="640080" y="5550407"/>
-            <a:ext cx="6766560" cy="201168"/>
+            <a:off x="640080" y="5349240"/>
+            <a:ext cx="6172200" cy="201168"/>
           </a:xfrm>
           <a:prstGeom prst="rect">
             <a:avLst/>
@@ -10882,8 +10961,8 @@
         </p:blipFill>
         <p:spPr>
           <a:xfrm>
-            <a:off x="7635240" y="2742668"/>
-            <a:ext cx="4343400" cy="1646984"/>
+            <a:off x="7269480" y="1325880"/>
+            <a:ext cx="4465015" cy="3956939"/>
           </a:xfrm>
           <a:prstGeom prst="rect">
             <a:avLst/>
@@ -10950,7 +11029,7 @@
         <p:spPr>
           <a:xfrm>
             <a:off x="640080" y="1371600"/>
-            <a:ext cx="6858000" cy="3209544"/>
+            <a:ext cx="6263640" cy="2971800"/>
           </a:xfrm>
           <a:prstGeom prst="rect">
             <a:avLst/>
@@ -10959,7 +11038,7 @@
         </p:spPr>
         <p:txBody>
           <a:bodyPr wrap="square">
-            <a:normAutofit/>
+            <a:spAutoFit/>
           </a:bodyPr>
           <a:lstStyle/>
           <a:p>
@@ -10974,7 +11053,7 @@
                   <a:srgbClr val="000000"/>
                 </a:solidFill>
               </a:rPr>
-              <a:t xml:space="preserve">Аналитического решения </a:t>
+              <a:t xml:space="preserve">• Аналитического решения </a:t>
             </a:r>
             <a:r>
               <a:rPr lang="ru-RU" dirty="0" sz="2000" b="1">
@@ -11005,7 +11084,7 @@
                   <a:srgbClr val="000000"/>
                 </a:solidFill>
               </a:rPr>
-              <a:t xml:space="preserve">Градиент LogLoss: </a:t>
+              <a:t xml:space="preserve">• Градиент LogLoss: </a:t>
             </a:r>
             <ns0:m xmlns:ns0="http://schemas.microsoft.com/office/drawing/2010/main">
               <m:oMath xmlns:m="http://schemas.openxmlformats.org/officeDocument/2006/math">
@@ -11099,7 +11178,7 @@
                   <a:srgbClr val="000000"/>
                 </a:solidFill>
               </a:rPr>
-              <a:t xml:space="preserve">В sklearn по умолчанию </a:t>
+              <a:t xml:space="preserve">• В sklearn по умолчанию </a:t>
             </a:r>
             <a:r>
               <a:rPr lang="ru-RU" dirty="0" sz="2000" b="1">
@@ -11130,7 +11209,7 @@
                   <a:srgbClr val="000000"/>
                 </a:solidFill>
               </a:rPr>
-              <a:t>L-BFGS сходится быстрее обычного градиентного спуска на типичных задачах</a:t>
+              <a:t>• L-BFGS сходится быстрее обычного градиентного спуска на типичных задачах</a:t>
             </a:r>
           </a:p>
         </p:txBody>
@@ -11144,7 +11223,7 @@
         <p:spPr>
           <a:xfrm>
             <a:off x="640080" y="4690872"/>
-            <a:ext cx="6766560" cy="804672"/>
+            <a:ext cx="6172200" cy="630936"/>
           </a:xfrm>
           <a:prstGeom prst="rect">
             <a:avLst/>
@@ -11189,7 +11268,7 @@
         <p:spPr>
           <a:xfrm>
             <a:off x="713231" y="4727448"/>
-            <a:ext cx="6620256" cy="731520"/>
+            <a:ext cx="6025896" cy="557784"/>
           </a:xfrm>
           <a:prstGeom prst="rect">
             <a:avLst/>
@@ -11214,7 +11293,7 @@
                 </a:solidFill>
                 <a:latin typeface="Consolas"/>
               </a:rPr>
-              <a:t>from sklearn.linear_model import LogisticRegression</a:t>
+              <a:t>clf = LogisticRegression(max_iter=1000, random_state=42)</a:t>
             </a:r>
           </a:p>
           <a:p>
@@ -11230,7 +11309,7 @@
                 </a:solidFill>
                 <a:latin typeface="Consolas"/>
               </a:rPr>
-              <a:t>clf = LogisticRegression(max_iter=1000, random_state=42)</a:t>
+              <a:t>clf.fit(X_train, y_train)</a:t>
             </a:r>
           </a:p>
           <a:p>
@@ -11246,22 +11325,6 @@
                 </a:solidFill>
                 <a:latin typeface="Consolas"/>
               </a:rPr>
-              <a:t>clf.fit(X_train, y_train)</a:t>
-            </a:r>
-          </a:p>
-          <a:p>
-            <a:pPr>
-              <a:spcAft>
-                <a:spcPts val="0"/>
-              </a:spcAft>
-            </a:pPr>
-            <a:r>
-              <a:rPr sz="1100">
-                <a:solidFill>
-                  <a:srgbClr val="000000"/>
-                </a:solidFill>
-                <a:latin typeface="Consolas"/>
-              </a:rPr>
               <a:t>proba = clf.predict_proba(X_test)[:, 1]</a:t>
             </a:r>
           </a:p>
@@ -11275,8 +11338,8 @@
         </p:nvSpPr>
         <p:spPr>
           <a:xfrm>
-            <a:off x="640080" y="5550408"/>
-            <a:ext cx="6766560" cy="201168"/>
+            <a:off x="640080" y="5376672"/>
+            <a:ext cx="6172200" cy="201168"/>
           </a:xfrm>
           <a:prstGeom prst="rect">
             <a:avLst/>
@@ -11318,8 +11381,8 @@
         </p:blipFill>
         <p:spPr>
           <a:xfrm>
-            <a:off x="7635240" y="1937384"/>
-            <a:ext cx="4343400" cy="3257550"/>
+            <a:off x="7269480" y="1325880"/>
+            <a:ext cx="4465015" cy="3303820"/>
           </a:xfrm>
           <a:prstGeom prst="rect">
             <a:avLst/>
@@ -11386,7 +11449,7 @@
         <p:spPr>
           <a:xfrm>
             <a:off x="640080" y="1371600"/>
-            <a:ext cx="6858000" cy="1810512"/>
+            <a:ext cx="6263640" cy="3246120"/>
           </a:xfrm>
           <a:prstGeom prst="rect">
             <a:avLst/>
@@ -11410,7 +11473,7 @@
                   <a:srgbClr val="000000"/>
                 </a:solidFill>
               </a:rPr>
-              <a:t xml:space="preserve">В sklearn параметр `C` — </a:t>
+              <a:t xml:space="preserve">• В sklearn параметр `C` — </a:t>
             </a:r>
             <a:r>
               <a:rPr lang="ru-RU" dirty="0" sz="2000" b="1">
@@ -11456,7 +11519,7 @@
                   <a:srgbClr val="000000"/>
                 </a:solidFill>
               </a:rPr>
-              <a:t xml:space="preserve">Если данные </a:t>
+              <a:t xml:space="preserve">• Если данные </a:t>
             </a:r>
             <a:r>
               <a:rPr lang="ru-RU" dirty="0" sz="2000" b="1">
@@ -11503,7 +11566,7 @@
                   <a:srgbClr val="000000"/>
                 </a:solidFill>
               </a:rPr>
-              <a:t>Это переобучение: модель идеальна на train, но вероятности «экстремальны»</a:t>
+              <a:t>• Это переобучение: модель идеальна на train, но вероятности «экстремальны»</a:t>
             </a:r>
           </a:p>
           <a:p>
@@ -11518,7 +11581,7 @@
                   <a:srgbClr val="000000"/>
                 </a:solidFill>
               </a:rPr>
-              <a:t xml:space="preserve">L2-регуляризация (`penalty='l2'`) </a:t>
+              <a:t xml:space="preserve">• L2-регуляризация (`penalty='l2'`) </a:t>
             </a:r>
             <a:r>
               <a:rPr lang="ru-RU" dirty="0" sz="2000" b="1">
@@ -11555,8 +11618,8 @@
         </p:blipFill>
         <p:spPr>
           <a:xfrm>
-            <a:off x="7635240" y="2739840"/>
-            <a:ext cx="4343400" cy="1652640"/>
+            <a:off x="7478448" y="1325880"/>
+            <a:ext cx="4047077" cy="4407407"/>
           </a:xfrm>
           <a:prstGeom prst="rect">
             <a:avLst/>

--- a/lessons/logisticheskaya_regressiya/presentation.pptx
+++ b/lessons/logisticheskaya_regressiya/presentation.pptx
@@ -4987,7 +4987,7 @@
         <p:spPr>
           <a:xfrm>
             <a:off x="640080" y="1371600"/>
-            <a:ext cx="6263640" cy="2697480"/>
+            <a:ext cx="6263640" cy="2514600"/>
           </a:xfrm>
           <a:prstGeom prst="rect">
             <a:avLst/>
@@ -5144,8 +5144,8 @@
         </p:blipFill>
         <p:spPr>
           <a:xfrm>
-            <a:off x="7339937" y="1325880"/>
-            <a:ext cx="4324099" cy="4407407"/>
+            <a:off x="7269480" y="1371600"/>
+            <a:ext cx="4465015" cy="4059105"/>
           </a:xfrm>
           <a:prstGeom prst="rect">
             <a:avLst/>
@@ -5212,7 +5212,7 @@
         <p:spPr>
           <a:xfrm>
             <a:off x="640080" y="1371600"/>
-            <a:ext cx="6263640" cy="2971800"/>
+            <a:ext cx="6263640" cy="2788920"/>
           </a:xfrm>
           <a:prstGeom prst="rect">
             <a:avLst/>
@@ -5358,8 +5358,8 @@
         </p:nvSpPr>
         <p:spPr>
           <a:xfrm>
-            <a:off x="640080" y="4690872"/>
-            <a:ext cx="6172200" cy="630936"/>
+            <a:off x="640080" y="5832856"/>
+            <a:ext cx="6172200" cy="604520"/>
           </a:xfrm>
           <a:prstGeom prst="rect">
             <a:avLst/>
@@ -5403,21 +5403,27 @@
         </p:nvSpPr>
         <p:spPr>
           <a:xfrm>
-            <a:off x="713231" y="4727448"/>
-            <a:ext cx="6025896" cy="557784"/>
+            <a:off x="713231" y="5878576"/>
+            <a:ext cx="6025896" cy="139700"/>
           </a:xfrm>
           <a:prstGeom prst="rect">
             <a:avLst/>
           </a:prstGeom>
           <a:noFill/>
+          <a:ln>
+            <a:noFill/>
+          </a:ln>
         </p:spPr>
         <p:txBody>
-          <a:bodyPr wrap="none">
+          <a:bodyPr wrap="none" anchor="t" lIns="0" rIns="0" tIns="0" bIns="0">
             <a:noAutofit/>
           </a:bodyPr>
           <a:lstStyle/>
           <a:p>
             <a:pPr>
+              <a:spcBef>
+                <a:spcPts val="0"/>
+              </a:spcBef>
               <a:spcAft>
                 <a:spcPts val="0"/>
               </a:spcAft>
@@ -5429,11 +5435,194 @@
                 </a:solidFill>
                 <a:latin typeface="Consolas"/>
               </a:rPr>
-              <a:t>fpr, tpr, _ = roc_curve(y_test, y_score)</a:t>
-            </a:r>
-          </a:p>
+              <a:t>fpr</a:t>
+            </a:r>
+            <a:r>
+              <a:rPr sz="1100">
+                <a:solidFill>
+                  <a:srgbClr val="000000"/>
+                </a:solidFill>
+                <a:latin typeface="Consolas"/>
+              </a:rPr>
+              <a:t>,</a:t>
+            </a:r>
+            <a:r>
+              <a:rPr sz="1100">
+                <a:solidFill>
+                  <a:srgbClr val="000000"/>
+                </a:solidFill>
+                <a:latin typeface="Consolas"/>
+              </a:rPr>
+              <a:t> </a:t>
+            </a:r>
+            <a:r>
+              <a:rPr sz="1100">
+                <a:solidFill>
+                  <a:srgbClr val="000000"/>
+                </a:solidFill>
+                <a:latin typeface="Consolas"/>
+              </a:rPr>
+              <a:t>tpr</a:t>
+            </a:r>
+            <a:r>
+              <a:rPr sz="1100">
+                <a:solidFill>
+                  <a:srgbClr val="000000"/>
+                </a:solidFill>
+                <a:latin typeface="Consolas"/>
+              </a:rPr>
+              <a:t>,</a:t>
+            </a:r>
+            <a:r>
+              <a:rPr sz="1100">
+                <a:solidFill>
+                  <a:srgbClr val="000000"/>
+                </a:solidFill>
+                <a:latin typeface="Consolas"/>
+              </a:rPr>
+              <a:t> </a:t>
+            </a:r>
+            <a:r>
+              <a:rPr sz="1100">
+                <a:solidFill>
+                  <a:srgbClr val="000000"/>
+                </a:solidFill>
+                <a:latin typeface="Consolas"/>
+              </a:rPr>
+              <a:t>_</a:t>
+            </a:r>
+            <a:r>
+              <a:rPr sz="1100">
+                <a:solidFill>
+                  <a:srgbClr val="000000"/>
+                </a:solidFill>
+                <a:latin typeface="Consolas"/>
+              </a:rPr>
+              <a:t> </a:t>
+            </a:r>
+            <a:r>
+              <a:rPr sz="1100">
+                <a:solidFill>
+                  <a:srgbClr val="666666"/>
+                </a:solidFill>
+                <a:latin typeface="Consolas"/>
+              </a:rPr>
+              <a:t>=</a:t>
+            </a:r>
+            <a:r>
+              <a:rPr sz="1100">
+                <a:solidFill>
+                  <a:srgbClr val="000000"/>
+                </a:solidFill>
+                <a:latin typeface="Consolas"/>
+              </a:rPr>
+              <a:t> </a:t>
+            </a:r>
+            <a:r>
+              <a:rPr sz="1100">
+                <a:solidFill>
+                  <a:srgbClr val="000000"/>
+                </a:solidFill>
+                <a:latin typeface="Consolas"/>
+              </a:rPr>
+              <a:t>roc_curve</a:t>
+            </a:r>
+            <a:r>
+              <a:rPr sz="1100">
+                <a:solidFill>
+                  <a:srgbClr val="000000"/>
+                </a:solidFill>
+                <a:latin typeface="Consolas"/>
+              </a:rPr>
+              <a:t>(</a:t>
+            </a:r>
+            <a:r>
+              <a:rPr sz="1100">
+                <a:solidFill>
+                  <a:srgbClr val="000000"/>
+                </a:solidFill>
+                <a:latin typeface="Consolas"/>
+              </a:rPr>
+              <a:t>y_test</a:t>
+            </a:r>
+            <a:r>
+              <a:rPr sz="1100">
+                <a:solidFill>
+                  <a:srgbClr val="000000"/>
+                </a:solidFill>
+                <a:latin typeface="Consolas"/>
+              </a:rPr>
+              <a:t>,</a:t>
+            </a:r>
+            <a:r>
+              <a:rPr sz="1100">
+                <a:solidFill>
+                  <a:srgbClr val="000000"/>
+                </a:solidFill>
+                <a:latin typeface="Consolas"/>
+              </a:rPr>
+              <a:t> </a:t>
+            </a:r>
+            <a:r>
+              <a:rPr sz="1100">
+                <a:solidFill>
+                  <a:srgbClr val="000000"/>
+                </a:solidFill>
+                <a:latin typeface="Consolas"/>
+              </a:rPr>
+              <a:t>y_score</a:t>
+            </a:r>
+            <a:r>
+              <a:rPr sz="1100">
+                <a:solidFill>
+                  <a:srgbClr val="000000"/>
+                </a:solidFill>
+                <a:latin typeface="Consolas"/>
+              </a:rPr>
+              <a:t>)</a:t>
+            </a:r>
+            <a:r>
+              <a:rPr sz="1100">
+                <a:solidFill>
+                  <a:srgbClr val="BBBBBB"/>
+                </a:solidFill>
+                <a:latin typeface="Consolas"/>
+              </a:rPr>
+              <a:t>
+</a:t>
+            </a:r>
+          </a:p>
+        </p:txBody>
+      </p:sp>
+      <p:sp>
+        <p:nvSpPr>
+          <p:cNvPr id="6" name="TextBox 5"/>
+          <p:cNvSpPr txBox="1"/>
+          <p:nvPr/>
+        </p:nvSpPr>
+        <p:spPr>
+          <a:xfrm>
+            <a:off x="713231" y="6018275"/>
+            <a:ext cx="6025896" cy="139700"/>
+          </a:xfrm>
+          <a:prstGeom prst="rect">
+            <a:avLst/>
+          </a:prstGeom>
+          <a:noFill/>
+          <a:ln>
+            <a:noFill/>
+          </a:ln>
+        </p:spPr>
+        <p:txBody>
+          <a:bodyPr wrap="none" anchor="t" lIns="0" rIns="0" tIns="0" bIns="0">
+            <a:noAutofit/>
+          </a:bodyPr>
+          <a:lstStyle/>
           <a:p>
             <a:pPr>
+              <a:spcBef>
+                <a:spcPts val="0"/>
+              </a:spcBef>
               <a:spcAft>
                 <a:spcPts val="0"/>
               </a:spcAft>
@@ -5445,11 +5634,140 @@
                 </a:solidFill>
                 <a:latin typeface="Consolas"/>
               </a:rPr>
-              <a:t>roc_auc = auc(fpr, tpr)</a:t>
-            </a:r>
-          </a:p>
+              <a:t>roc_auc</a:t>
+            </a:r>
+            <a:r>
+              <a:rPr sz="1100">
+                <a:solidFill>
+                  <a:srgbClr val="000000"/>
+                </a:solidFill>
+                <a:latin typeface="Consolas"/>
+              </a:rPr>
+              <a:t> </a:t>
+            </a:r>
+            <a:r>
+              <a:rPr sz="1100">
+                <a:solidFill>
+                  <a:srgbClr val="666666"/>
+                </a:solidFill>
+                <a:latin typeface="Consolas"/>
+              </a:rPr>
+              <a:t>=</a:t>
+            </a:r>
+            <a:r>
+              <a:rPr sz="1100">
+                <a:solidFill>
+                  <a:srgbClr val="000000"/>
+                </a:solidFill>
+                <a:latin typeface="Consolas"/>
+              </a:rPr>
+              <a:t> </a:t>
+            </a:r>
+            <a:r>
+              <a:rPr sz="1100">
+                <a:solidFill>
+                  <a:srgbClr val="000000"/>
+                </a:solidFill>
+                <a:latin typeface="Consolas"/>
+              </a:rPr>
+              <a:t>auc</a:t>
+            </a:r>
+            <a:r>
+              <a:rPr sz="1100">
+                <a:solidFill>
+                  <a:srgbClr val="000000"/>
+                </a:solidFill>
+                <a:latin typeface="Consolas"/>
+              </a:rPr>
+              <a:t>(</a:t>
+            </a:r>
+            <a:r>
+              <a:rPr sz="1100">
+                <a:solidFill>
+                  <a:srgbClr val="000000"/>
+                </a:solidFill>
+                <a:latin typeface="Consolas"/>
+              </a:rPr>
+              <a:t>fpr</a:t>
+            </a:r>
+            <a:r>
+              <a:rPr sz="1100">
+                <a:solidFill>
+                  <a:srgbClr val="000000"/>
+                </a:solidFill>
+                <a:latin typeface="Consolas"/>
+              </a:rPr>
+              <a:t>,</a:t>
+            </a:r>
+            <a:r>
+              <a:rPr sz="1100">
+                <a:solidFill>
+                  <a:srgbClr val="000000"/>
+                </a:solidFill>
+                <a:latin typeface="Consolas"/>
+              </a:rPr>
+              <a:t> </a:t>
+            </a:r>
+            <a:r>
+              <a:rPr sz="1100">
+                <a:solidFill>
+                  <a:srgbClr val="000000"/>
+                </a:solidFill>
+                <a:latin typeface="Consolas"/>
+              </a:rPr>
+              <a:t>tpr</a:t>
+            </a:r>
+            <a:r>
+              <a:rPr sz="1100">
+                <a:solidFill>
+                  <a:srgbClr val="000000"/>
+                </a:solidFill>
+                <a:latin typeface="Consolas"/>
+              </a:rPr>
+              <a:t>)</a:t>
+            </a:r>
+            <a:r>
+              <a:rPr sz="1100">
+                <a:solidFill>
+                  <a:srgbClr val="BBBBBB"/>
+                </a:solidFill>
+                <a:latin typeface="Consolas"/>
+              </a:rPr>
+              <a:t>
+</a:t>
+            </a:r>
+          </a:p>
+        </p:txBody>
+      </p:sp>
+      <p:sp>
+        <p:nvSpPr>
+          <p:cNvPr id="7" name="TextBox 6"/>
+          <p:cNvSpPr txBox="1"/>
+          <p:nvPr/>
+        </p:nvSpPr>
+        <p:spPr>
+          <a:xfrm>
+            <a:off x="713231" y="6157975"/>
+            <a:ext cx="6025896" cy="139700"/>
+          </a:xfrm>
+          <a:prstGeom prst="rect">
+            <a:avLst/>
+          </a:prstGeom>
+          <a:noFill/>
+          <a:ln>
+            <a:noFill/>
+          </a:ln>
+        </p:spPr>
+        <p:txBody>
+          <a:bodyPr wrap="none" anchor="t" lIns="0" rIns="0" tIns="0" bIns="0">
+            <a:noAutofit/>
+          </a:bodyPr>
+          <a:lstStyle/>
           <a:p>
             <a:pPr>
+              <a:spcBef>
+                <a:spcPts val="0"/>
+              </a:spcBef>
               <a:spcAft>
                 <a:spcPts val="0"/>
               </a:spcAft>
@@ -5457,24 +5775,133 @@
             <a:r>
               <a:rPr sz="1100">
                 <a:solidFill>
-                  <a:srgbClr val="000000"/>
-                </a:solidFill>
-                <a:latin typeface="Consolas"/>
-              </a:rPr>
-              <a:t>print(f'AUC-ROC = {roc_auc:.3f}')</a:t>
-            </a:r>
-          </a:p>
-        </p:txBody>
-      </p:sp>
-      <p:sp>
-        <p:nvSpPr>
-          <p:cNvPr id="6" name="TextBox 5"/>
+                  <a:srgbClr val="007020"/>
+                </a:solidFill>
+                <a:latin typeface="Consolas"/>
+              </a:rPr>
+              <a:t>print</a:t>
+            </a:r>
+            <a:r>
+              <a:rPr sz="1100">
+                <a:solidFill>
+                  <a:srgbClr val="000000"/>
+                </a:solidFill>
+                <a:latin typeface="Consolas"/>
+              </a:rPr>
+              <a:t>(</a:t>
+            </a:r>
+            <a:r>
+              <a:rPr sz="1100">
+                <a:solidFill>
+                  <a:srgbClr val="4070A0"/>
+                </a:solidFill>
+                <a:latin typeface="Consolas"/>
+              </a:rPr>
+              <a:t>f</a:t>
+            </a:r>
+            <a:r>
+              <a:rPr sz="1100">
+                <a:solidFill>
+                  <a:srgbClr val="4070A0"/>
+                </a:solidFill>
+                <a:latin typeface="Consolas"/>
+              </a:rPr>
+              <a:t>'</a:t>
+            </a:r>
+            <a:r>
+              <a:rPr sz="1100">
+                <a:solidFill>
+                  <a:srgbClr val="4070A0"/>
+                </a:solidFill>
+                <a:latin typeface="Consolas"/>
+              </a:rPr>
+              <a:t>AUC-ROC = </a:t>
+            </a:r>
+            <a:r>
+              <a:rPr sz="1100" i="1">
+                <a:solidFill>
+                  <a:srgbClr val="70A0D0"/>
+                </a:solidFill>
+                <a:latin typeface="Consolas"/>
+              </a:rPr>
+              <a:t>{</a:t>
+            </a:r>
+            <a:r>
+              <a:rPr sz="1100">
+                <a:solidFill>
+                  <a:srgbClr val="000000"/>
+                </a:solidFill>
+                <a:latin typeface="Consolas"/>
+              </a:rPr>
+              <a:t>roc_auc</a:t>
+            </a:r>
+            <a:r>
+              <a:rPr sz="1100" i="1">
+                <a:solidFill>
+                  <a:srgbClr val="70A0D0"/>
+                </a:solidFill>
+                <a:latin typeface="Consolas"/>
+              </a:rPr>
+              <a:t>:</a:t>
+            </a:r>
+            <a:r>
+              <a:rPr sz="1100">
+                <a:solidFill>
+                  <a:srgbClr val="4070A0"/>
+                </a:solidFill>
+                <a:latin typeface="Consolas"/>
+              </a:rPr>
+              <a:t>.3f</a:t>
+            </a:r>
+            <a:r>
+              <a:rPr sz="1100" i="1">
+                <a:solidFill>
+                  <a:srgbClr val="70A0D0"/>
+                </a:solidFill>
+                <a:latin typeface="Consolas"/>
+              </a:rPr>
+              <a:t>}</a:t>
+            </a:r>
+            <a:r>
+              <a:rPr sz="1100">
+                <a:solidFill>
+                  <a:srgbClr val="4070A0"/>
+                </a:solidFill>
+                <a:latin typeface="Consolas"/>
+              </a:rPr>
+              <a:t>'</a:t>
+            </a:r>
+            <a:r>
+              <a:rPr sz="1100">
+                <a:solidFill>
+                  <a:srgbClr val="000000"/>
+                </a:solidFill>
+                <a:latin typeface="Consolas"/>
+              </a:rPr>
+              <a:t>)</a:t>
+            </a:r>
+            <a:r>
+              <a:rPr sz="1100">
+                <a:solidFill>
+                  <a:srgbClr val="BBBBBB"/>
+                </a:solidFill>
+                <a:latin typeface="Consolas"/>
+              </a:rPr>
+              <a:t>
+</a:t>
+            </a:r>
+          </a:p>
+        </p:txBody>
+      </p:sp>
+      <p:sp>
+        <p:nvSpPr>
+          <p:cNvPr id="8" name="TextBox 7"/>
           <p:cNvSpPr txBox="1"/>
           <p:nvPr/>
         </p:nvSpPr>
         <p:spPr>
           <a:xfrm>
-            <a:off x="640080" y="5376672"/>
+            <a:off x="640080" y="6492240"/>
             <a:ext cx="6172200" cy="201168"/>
           </a:xfrm>
           <a:prstGeom prst="rect">
@@ -5503,7 +5930,7 @@
       </p:sp>
       <p:pic>
         <p:nvPicPr>
-          <p:cNvPr id="7" name="Picture 6" descr="roc_and_pr_curves.png"/>
+          <p:cNvPr id="9" name="Picture 8" descr="roc_and_pr_curves.png"/>
           <p:cNvPicPr>
             <a:picLocks noChangeAspect="1"/>
           </p:cNvPicPr>
@@ -5517,8 +5944,8 @@
         </p:blipFill>
         <p:spPr>
           <a:xfrm>
-            <a:off x="7540016" y="1325880"/>
-            <a:ext cx="3923942" cy="4407408"/>
+            <a:off x="7269480" y="1371600"/>
+            <a:ext cx="4465015" cy="4059105"/>
           </a:xfrm>
           <a:prstGeom prst="rect">
             <a:avLst/>
@@ -5585,7 +6012,7 @@
         <p:spPr>
           <a:xfrm>
             <a:off x="640080" y="1371600"/>
-            <a:ext cx="6263640" cy="2971800"/>
+            <a:ext cx="6263640" cy="2788920"/>
           </a:xfrm>
           <a:prstGeom prst="rect">
             <a:avLst/>
@@ -5769,7 +6196,26 @@
                   <a:srgbClr val="000000"/>
                 </a:solidFill>
               </a:rPr>
-              <a:t>• В sklearn: `multi_class='multinomial'`; альтернатива — One-vs-Rest (K независимых бинарных классификаторов)</a:t>
+              <a:t xml:space="preserve">• В sklearn: </a:t>
+            </a:r>
+            <a:r>
+              <a:rPr lang="ru-RU" dirty="0" sz="2000">
+                <a:latin typeface="Consolas"/>
+                <a:cs typeface="Consolas"/>
+                <a:ea typeface="Consolas"/>
+                <a:solidFill>
+                  <a:srgbClr val="000000"/>
+                </a:solidFill>
+              </a:rPr>
+              <a:t>multi_class='multinomial'</a:t>
+            </a:r>
+            <a:r>
+              <a:rPr lang="ru-RU" dirty="0" sz="2000">
+                <a:solidFill>
+                  <a:srgbClr val="000000"/>
+                </a:solidFill>
+              </a:rPr>
+              <a:t>; альтернатива — One-vs-Rest (K независимых бинарных классификаторов)</a:t>
             </a:r>
           </a:p>
         </p:txBody>
@@ -5790,8 +6236,8 @@
         </p:blipFill>
         <p:spPr>
           <a:xfrm>
-            <a:off x="7269480" y="1325880"/>
-            <a:ext cx="4465015" cy="3007448"/>
+            <a:off x="7269480" y="1371600"/>
+            <a:ext cx="4465015" cy="3125510"/>
           </a:xfrm>
           <a:prstGeom prst="rect">
             <a:avLst/>
@@ -5858,7 +6304,7 @@
         <p:spPr>
           <a:xfrm>
             <a:off x="640080" y="1371600"/>
-            <a:ext cx="6263640" cy="3246120"/>
+            <a:ext cx="6263640" cy="3063240"/>
           </a:xfrm>
           <a:prstGeom prst="rect">
             <a:avLst/>
@@ -6165,8 +6611,8 @@
         </p:blipFill>
         <p:spPr>
           <a:xfrm>
-            <a:off x="7461312" y="1325880"/>
-            <a:ext cx="4081349" cy="4407407"/>
+            <a:off x="7269480" y="1371600"/>
+            <a:ext cx="4465015" cy="4059105"/>
           </a:xfrm>
           <a:prstGeom prst="rect">
             <a:avLst/>
@@ -6233,7 +6679,7 @@
         <p:spPr>
           <a:xfrm>
             <a:off x="640080" y="1371600"/>
-            <a:ext cx="6263640" cy="2971800"/>
+            <a:ext cx="6263640" cy="3063240"/>
           </a:xfrm>
           <a:prstGeom prst="rect">
             <a:avLst/>
@@ -6257,7 +6703,26 @@
                   <a:srgbClr val="000000"/>
                 </a:solidFill>
               </a:rPr>
-              <a:t xml:space="preserve">• `make_pipeline(StandardScaler(), LogisticRegression(...))` — </a:t>
+              <a:t xml:space="preserve">• </a:t>
+            </a:r>
+            <a:r>
+              <a:rPr lang="ru-RU" dirty="0" sz="2000">
+                <a:latin typeface="Consolas"/>
+                <a:cs typeface="Consolas"/>
+                <a:ea typeface="Consolas"/>
+                <a:solidFill>
+                  <a:srgbClr val="000000"/>
+                </a:solidFill>
+              </a:rPr>
+              <a:t>make_pipeline(StandardScaler(), LogisticRegression(...))</a:t>
+            </a:r>
+            <a:r>
+              <a:rPr lang="ru-RU" dirty="0" sz="2000">
+                <a:solidFill>
+                  <a:srgbClr val="000000"/>
+                </a:solidFill>
+              </a:rPr>
+              <a:t xml:space="preserve"> — </a:t>
             </a:r>
             <a:r>
               <a:rPr lang="ru-RU" dirty="0" sz="2000" b="1">
@@ -6288,7 +6753,45 @@
                   <a:srgbClr val="000000"/>
                 </a:solidFill>
               </a:rPr>
-              <a:t>• `LogisticRegression(C=1.0, max_iter=1000)` — L-BFGS; `max_iter` часто увеличивают (по умолчанию 100)</a:t>
+              <a:t xml:space="preserve">• </a:t>
+            </a:r>
+            <a:r>
+              <a:rPr lang="ru-RU" dirty="0" sz="2000">
+                <a:latin typeface="Consolas"/>
+                <a:cs typeface="Consolas"/>
+                <a:ea typeface="Consolas"/>
+                <a:solidFill>
+                  <a:srgbClr val="000000"/>
+                </a:solidFill>
+              </a:rPr>
+              <a:t>LogisticRegression(C=1.0, max_iter=1000)</a:t>
+            </a:r>
+            <a:r>
+              <a:rPr lang="ru-RU" dirty="0" sz="2000">
+                <a:solidFill>
+                  <a:srgbClr val="000000"/>
+                </a:solidFill>
+              </a:rPr>
+              <a:t xml:space="preserve"> — L-BFGS; </a:t>
+            </a:r>
+            <a:r>
+              <a:rPr lang="ru-RU" dirty="0" sz="2000">
+                <a:latin typeface="Consolas"/>
+                <a:cs typeface="Consolas"/>
+                <a:ea typeface="Consolas"/>
+                <a:solidFill>
+                  <a:srgbClr val="000000"/>
+                </a:solidFill>
+              </a:rPr>
+              <a:t>max_iter</a:t>
+            </a:r>
+            <a:r>
+              <a:rPr lang="ru-RU" dirty="0" sz="2000">
+                <a:solidFill>
+                  <a:srgbClr val="000000"/>
+                </a:solidFill>
+              </a:rPr>
+              <a:t xml:space="preserve"> часто увеличивают (по умолчанию 100)</a:t>
             </a:r>
           </a:p>
           <a:p>
@@ -6303,7 +6806,45 @@
                   <a:srgbClr val="000000"/>
                 </a:solidFill>
               </a:rPr>
-              <a:t>• `predict_proba` — вероятности класса 1; `predict` — бинарное решение по порогу 0.5</a:t>
+              <a:t xml:space="preserve">• </a:t>
+            </a:r>
+            <a:r>
+              <a:rPr lang="ru-RU" dirty="0" sz="2000">
+                <a:latin typeface="Consolas"/>
+                <a:cs typeface="Consolas"/>
+                <a:ea typeface="Consolas"/>
+                <a:solidFill>
+                  <a:srgbClr val="000000"/>
+                </a:solidFill>
+              </a:rPr>
+              <a:t>predict_proba</a:t>
+            </a:r>
+            <a:r>
+              <a:rPr lang="ru-RU" dirty="0" sz="2000">
+                <a:solidFill>
+                  <a:srgbClr val="000000"/>
+                </a:solidFill>
+              </a:rPr>
+              <a:t xml:space="preserve"> — вероятности класса 1; </a:t>
+            </a:r>
+            <a:r>
+              <a:rPr lang="ru-RU" dirty="0" sz="2000">
+                <a:latin typeface="Consolas"/>
+                <a:cs typeface="Consolas"/>
+                <a:ea typeface="Consolas"/>
+                <a:solidFill>
+                  <a:srgbClr val="000000"/>
+                </a:solidFill>
+              </a:rPr>
+              <a:t>predict</a:t>
+            </a:r>
+            <a:r>
+              <a:rPr lang="ru-RU" dirty="0" sz="2000">
+                <a:solidFill>
+                  <a:srgbClr val="000000"/>
+                </a:solidFill>
+              </a:rPr>
+              <a:t xml:space="preserve"> — бинарное решение по порогу 0.5</a:t>
             </a:r>
           </a:p>
           <a:p>
@@ -6347,8 +6888,8 @@
         </p:nvSpPr>
         <p:spPr>
           <a:xfrm>
-            <a:off x="640080" y="4690872"/>
-            <a:ext cx="6172200" cy="630936"/>
+            <a:off x="640080" y="5832856"/>
+            <a:ext cx="6172200" cy="604520"/>
           </a:xfrm>
           <a:prstGeom prst="rect">
             <a:avLst/>
@@ -6392,21 +6933,27 @@
         </p:nvSpPr>
         <p:spPr>
           <a:xfrm>
-            <a:off x="713231" y="4727448"/>
-            <a:ext cx="6025896" cy="557784"/>
+            <a:off x="713231" y="5878576"/>
+            <a:ext cx="6025896" cy="139700"/>
           </a:xfrm>
           <a:prstGeom prst="rect">
             <a:avLst/>
           </a:prstGeom>
           <a:noFill/>
+          <a:ln>
+            <a:noFill/>
+          </a:ln>
         </p:spPr>
         <p:txBody>
-          <a:bodyPr wrap="none">
+          <a:bodyPr wrap="none" anchor="t" lIns="0" rIns="0" tIns="0" bIns="0">
             <a:noAutofit/>
           </a:bodyPr>
           <a:lstStyle/>
           <a:p>
             <a:pPr>
+              <a:spcBef>
+                <a:spcPts val="0"/>
+              </a:spcBef>
               <a:spcAft>
                 <a:spcPts val="0"/>
               </a:spcAft>
@@ -6418,11 +6965,176 @@
                 </a:solidFill>
                 <a:latin typeface="Consolas"/>
               </a:rPr>
-              <a:t>clf = LogisticRegression(C=1.0, random_state=42)</a:t>
-            </a:r>
-          </a:p>
+              <a:t>clf</a:t>
+            </a:r>
+            <a:r>
+              <a:rPr sz="1100">
+                <a:solidFill>
+                  <a:srgbClr val="000000"/>
+                </a:solidFill>
+                <a:latin typeface="Consolas"/>
+              </a:rPr>
+              <a:t> </a:t>
+            </a:r>
+            <a:r>
+              <a:rPr sz="1100">
+                <a:solidFill>
+                  <a:srgbClr val="666666"/>
+                </a:solidFill>
+                <a:latin typeface="Consolas"/>
+              </a:rPr>
+              <a:t>=</a:t>
+            </a:r>
+            <a:r>
+              <a:rPr sz="1100">
+                <a:solidFill>
+                  <a:srgbClr val="000000"/>
+                </a:solidFill>
+                <a:latin typeface="Consolas"/>
+              </a:rPr>
+              <a:t> </a:t>
+            </a:r>
+            <a:r>
+              <a:rPr sz="1100">
+                <a:solidFill>
+                  <a:srgbClr val="000000"/>
+                </a:solidFill>
+                <a:latin typeface="Consolas"/>
+              </a:rPr>
+              <a:t>LogisticRegression</a:t>
+            </a:r>
+            <a:r>
+              <a:rPr sz="1100">
+                <a:solidFill>
+                  <a:srgbClr val="000000"/>
+                </a:solidFill>
+                <a:latin typeface="Consolas"/>
+              </a:rPr>
+              <a:t>(</a:t>
+            </a:r>
+            <a:r>
+              <a:rPr sz="1100">
+                <a:solidFill>
+                  <a:srgbClr val="000000"/>
+                </a:solidFill>
+                <a:latin typeface="Consolas"/>
+              </a:rPr>
+              <a:t>C</a:t>
+            </a:r>
+            <a:r>
+              <a:rPr sz="1100">
+                <a:solidFill>
+                  <a:srgbClr val="666666"/>
+                </a:solidFill>
+                <a:latin typeface="Consolas"/>
+              </a:rPr>
+              <a:t>=</a:t>
+            </a:r>
+            <a:r>
+              <a:rPr sz="1100">
+                <a:solidFill>
+                  <a:srgbClr val="40A070"/>
+                </a:solidFill>
+                <a:latin typeface="Consolas"/>
+              </a:rPr>
+              <a:t>1.0</a:t>
+            </a:r>
+            <a:r>
+              <a:rPr sz="1100">
+                <a:solidFill>
+                  <a:srgbClr val="000000"/>
+                </a:solidFill>
+                <a:latin typeface="Consolas"/>
+              </a:rPr>
+              <a:t>,</a:t>
+            </a:r>
+            <a:r>
+              <a:rPr sz="1100">
+                <a:solidFill>
+                  <a:srgbClr val="000000"/>
+                </a:solidFill>
+                <a:latin typeface="Consolas"/>
+              </a:rPr>
+              <a:t> </a:t>
+            </a:r>
+            <a:r>
+              <a:rPr sz="1100">
+                <a:solidFill>
+                  <a:srgbClr val="000000"/>
+                </a:solidFill>
+                <a:latin typeface="Consolas"/>
+              </a:rPr>
+              <a:t>random_state</a:t>
+            </a:r>
+            <a:r>
+              <a:rPr sz="1100">
+                <a:solidFill>
+                  <a:srgbClr val="666666"/>
+                </a:solidFill>
+                <a:latin typeface="Consolas"/>
+              </a:rPr>
+              <a:t>=</a:t>
+            </a:r>
+            <a:r>
+              <a:rPr sz="1100">
+                <a:solidFill>
+                  <a:srgbClr val="40A070"/>
+                </a:solidFill>
+                <a:latin typeface="Consolas"/>
+              </a:rPr>
+              <a:t>42</a:t>
+            </a:r>
+            <a:r>
+              <a:rPr sz="1100">
+                <a:solidFill>
+                  <a:srgbClr val="000000"/>
+                </a:solidFill>
+                <a:latin typeface="Consolas"/>
+              </a:rPr>
+              <a:t>)</a:t>
+            </a:r>
+            <a:r>
+              <a:rPr sz="1100">
+                <a:solidFill>
+                  <a:srgbClr val="BBBBBB"/>
+                </a:solidFill>
+                <a:latin typeface="Consolas"/>
+              </a:rPr>
+              <a:t>
+</a:t>
+            </a:r>
+          </a:p>
+        </p:txBody>
+      </p:sp>
+      <p:sp>
+        <p:nvSpPr>
+          <p:cNvPr id="6" name="TextBox 5"/>
+          <p:cNvSpPr txBox="1"/>
+          <p:nvPr/>
+        </p:nvSpPr>
+        <p:spPr>
+          <a:xfrm>
+            <a:off x="713231" y="6018275"/>
+            <a:ext cx="6025896" cy="139700"/>
+          </a:xfrm>
+          <a:prstGeom prst="rect">
+            <a:avLst/>
+          </a:prstGeom>
+          <a:noFill/>
+          <a:ln>
+            <a:noFill/>
+          </a:ln>
+        </p:spPr>
+        <p:txBody>
+          <a:bodyPr wrap="none" anchor="t" lIns="0" rIns="0" tIns="0" bIns="0">
+            <a:noAutofit/>
+          </a:bodyPr>
+          <a:lstStyle/>
           <a:p>
             <a:pPr>
+              <a:spcBef>
+                <a:spcPts val="0"/>
+              </a:spcBef>
               <a:spcAft>
                 <a:spcPts val="0"/>
               </a:spcAft>
@@ -6434,11 +7146,122 @@
                 </a:solidFill>
                 <a:latin typeface="Consolas"/>
               </a:rPr>
-              <a:t>clf.fit(X_train, y_train)</a:t>
-            </a:r>
-          </a:p>
+              <a:t>clf</a:t>
+            </a:r>
+            <a:r>
+              <a:rPr sz="1100">
+                <a:solidFill>
+                  <a:srgbClr val="666666"/>
+                </a:solidFill>
+                <a:latin typeface="Consolas"/>
+              </a:rPr>
+              <a:t>.</a:t>
+            </a:r>
+            <a:r>
+              <a:rPr sz="1100">
+                <a:solidFill>
+                  <a:srgbClr val="000000"/>
+                </a:solidFill>
+                <a:latin typeface="Consolas"/>
+              </a:rPr>
+              <a:t>fit</a:t>
+            </a:r>
+            <a:r>
+              <a:rPr sz="1100">
+                <a:solidFill>
+                  <a:srgbClr val="000000"/>
+                </a:solidFill>
+                <a:latin typeface="Consolas"/>
+              </a:rPr>
+              <a:t>(</a:t>
+            </a:r>
+            <a:r>
+              <a:rPr sz="1100">
+                <a:solidFill>
+                  <a:srgbClr val="000000"/>
+                </a:solidFill>
+                <a:latin typeface="Consolas"/>
+              </a:rPr>
+              <a:t>X_train</a:t>
+            </a:r>
+            <a:r>
+              <a:rPr sz="1100">
+                <a:solidFill>
+                  <a:srgbClr val="000000"/>
+                </a:solidFill>
+                <a:latin typeface="Consolas"/>
+              </a:rPr>
+              <a:t>,</a:t>
+            </a:r>
+            <a:r>
+              <a:rPr sz="1100">
+                <a:solidFill>
+                  <a:srgbClr val="000000"/>
+                </a:solidFill>
+                <a:latin typeface="Consolas"/>
+              </a:rPr>
+              <a:t> </a:t>
+            </a:r>
+            <a:r>
+              <a:rPr sz="1100">
+                <a:solidFill>
+                  <a:srgbClr val="000000"/>
+                </a:solidFill>
+                <a:latin typeface="Consolas"/>
+              </a:rPr>
+              <a:t>y_train</a:t>
+            </a:r>
+            <a:r>
+              <a:rPr sz="1100">
+                <a:solidFill>
+                  <a:srgbClr val="000000"/>
+                </a:solidFill>
+                <a:latin typeface="Consolas"/>
+              </a:rPr>
+              <a:t>)</a:t>
+            </a:r>
+            <a:r>
+              <a:rPr sz="1100">
+                <a:solidFill>
+                  <a:srgbClr val="BBBBBB"/>
+                </a:solidFill>
+                <a:latin typeface="Consolas"/>
+              </a:rPr>
+              <a:t>
+</a:t>
+            </a:r>
+          </a:p>
+        </p:txBody>
+      </p:sp>
+      <p:sp>
+        <p:nvSpPr>
+          <p:cNvPr id="7" name="TextBox 6"/>
+          <p:cNvSpPr txBox="1"/>
+          <p:nvPr/>
+        </p:nvSpPr>
+        <p:spPr>
+          <a:xfrm>
+            <a:off x="713231" y="6157975"/>
+            <a:ext cx="6025896" cy="139700"/>
+          </a:xfrm>
+          <a:prstGeom prst="rect">
+            <a:avLst/>
+          </a:prstGeom>
+          <a:noFill/>
+          <a:ln>
+            <a:noFill/>
+          </a:ln>
+        </p:spPr>
+        <p:txBody>
+          <a:bodyPr wrap="none" anchor="t" lIns="0" rIns="0" tIns="0" bIns="0">
+            <a:noAutofit/>
+          </a:bodyPr>
+          <a:lstStyle/>
           <a:p>
             <a:pPr>
+              <a:spcBef>
+                <a:spcPts val="0"/>
+              </a:spcBef>
               <a:spcAft>
                 <a:spcPts val="0"/>
               </a:spcAft>
@@ -6450,20 +7273,111 @@
                 </a:solidFill>
                 <a:latin typeface="Consolas"/>
               </a:rPr>
-              <a:t>y_pred = clf.predict(X_test)</a:t>
-            </a:r>
-          </a:p>
-        </p:txBody>
-      </p:sp>
-      <p:sp>
-        <p:nvSpPr>
-          <p:cNvPr id="6" name="TextBox 5"/>
+              <a:t>y_pred</a:t>
+            </a:r>
+            <a:r>
+              <a:rPr sz="1100">
+                <a:solidFill>
+                  <a:srgbClr val="000000"/>
+                </a:solidFill>
+                <a:latin typeface="Consolas"/>
+              </a:rPr>
+              <a:t> </a:t>
+            </a:r>
+            <a:r>
+              <a:rPr sz="1100">
+                <a:solidFill>
+                  <a:srgbClr val="666666"/>
+                </a:solidFill>
+                <a:latin typeface="Consolas"/>
+              </a:rPr>
+              <a:t>=</a:t>
+            </a:r>
+            <a:r>
+              <a:rPr sz="1100">
+                <a:solidFill>
+                  <a:srgbClr val="000000"/>
+                </a:solidFill>
+                <a:latin typeface="Consolas"/>
+              </a:rPr>
+              <a:t> </a:t>
+            </a:r>
+            <a:r>
+              <a:rPr sz="1100">
+                <a:solidFill>
+                  <a:srgbClr val="000000"/>
+                </a:solidFill>
+                <a:latin typeface="Consolas"/>
+              </a:rPr>
+              <a:t>clf</a:t>
+            </a:r>
+            <a:r>
+              <a:rPr sz="1100">
+                <a:solidFill>
+                  <a:srgbClr val="666666"/>
+                </a:solidFill>
+                <a:latin typeface="Consolas"/>
+              </a:rPr>
+              <a:t>.</a:t>
+            </a:r>
+            <a:r>
+              <a:rPr sz="1100">
+                <a:solidFill>
+                  <a:srgbClr val="000000"/>
+                </a:solidFill>
+                <a:latin typeface="Consolas"/>
+              </a:rPr>
+              <a:t>predict</a:t>
+            </a:r>
+            <a:r>
+              <a:rPr sz="1100">
+                <a:solidFill>
+                  <a:srgbClr val="000000"/>
+                </a:solidFill>
+                <a:latin typeface="Consolas"/>
+              </a:rPr>
+              <a:t>(</a:t>
+            </a:r>
+            <a:r>
+              <a:rPr sz="1100">
+                <a:solidFill>
+                  <a:srgbClr val="000000"/>
+                </a:solidFill>
+                <a:latin typeface="Consolas"/>
+              </a:rPr>
+              <a:t>X_test</a:t>
+            </a:r>
+            <a:r>
+              <a:rPr sz="1100">
+                <a:solidFill>
+                  <a:srgbClr val="000000"/>
+                </a:solidFill>
+                <a:latin typeface="Consolas"/>
+              </a:rPr>
+              <a:t>)</a:t>
+            </a:r>
+            <a:r>
+              <a:rPr sz="1100">
+                <a:solidFill>
+                  <a:srgbClr val="BBBBBB"/>
+                </a:solidFill>
+                <a:latin typeface="Consolas"/>
+              </a:rPr>
+              <a:t>
+</a:t>
+            </a:r>
+          </a:p>
+        </p:txBody>
+      </p:sp>
+      <p:sp>
+        <p:nvSpPr>
+          <p:cNvPr id="8" name="TextBox 7"/>
           <p:cNvSpPr txBox="1"/>
           <p:nvPr/>
         </p:nvSpPr>
         <p:spPr>
           <a:xfrm>
-            <a:off x="640080" y="5376672"/>
+            <a:off x="640080" y="6492240"/>
             <a:ext cx="6172200" cy="201168"/>
           </a:xfrm>
           <a:prstGeom prst="rect">
@@ -6492,7 +7406,7 @@
       </p:sp>
       <p:pic>
         <p:nvPicPr>
-          <p:cNvPr id="7" name="Picture 6" descr="logreg_pipeline.png"/>
+          <p:cNvPr id="9" name="Picture 8" descr="logreg_pipeline.png"/>
           <p:cNvPicPr>
             <a:picLocks noChangeAspect="1"/>
           </p:cNvPicPr>
@@ -6506,8 +7420,8 @@
         </p:blipFill>
         <p:spPr>
           <a:xfrm>
-            <a:off x="7269480" y="1325880"/>
-            <a:ext cx="4465015" cy="1327629"/>
+            <a:off x="7269480" y="1371600"/>
+            <a:ext cx="4465015" cy="1428805"/>
           </a:xfrm>
           <a:prstGeom prst="rect">
             <a:avLst/>
@@ -6574,7 +7488,7 @@
         <p:spPr>
           <a:xfrm>
             <a:off x="640080" y="1371600"/>
-            <a:ext cx="6263640" cy="2569463"/>
+            <a:ext cx="6263640" cy="2514600"/>
           </a:xfrm>
           <a:prstGeom prst="rect">
             <a:avLst/>
@@ -6629,7 +7543,26 @@
                   <a:srgbClr val="000000"/>
                 </a:solidFill>
               </a:rPr>
-              <a:t xml:space="preserve"> `class_weight='balanced'` — больший штраф за ошибки на минорном классе</a:t>
+              <a:t xml:space="preserve"> </a:t>
+            </a:r>
+            <a:r>
+              <a:rPr lang="ru-RU" dirty="0" sz="2000">
+                <a:latin typeface="Consolas"/>
+                <a:cs typeface="Consolas"/>
+                <a:ea typeface="Consolas"/>
+                <a:solidFill>
+                  <a:srgbClr val="000000"/>
+                </a:solidFill>
+              </a:rPr>
+              <a:t>class_weight='balanced'</a:t>
+            </a:r>
+            <a:r>
+              <a:rPr lang="ru-RU" dirty="0" sz="2000">
+                <a:solidFill>
+                  <a:srgbClr val="000000"/>
+                </a:solidFill>
+              </a:rPr>
+              <a:t xml:space="preserve"> — больший штраф за ошибки на минорном классе</a:t>
             </a:r>
           </a:p>
           <a:p>
@@ -6704,8 +7637,8 @@
         </p:nvSpPr>
         <p:spPr>
           <a:xfrm>
-            <a:off x="640080" y="4288536"/>
-            <a:ext cx="6172200" cy="978407"/>
+            <a:off x="640080" y="5553456"/>
+            <a:ext cx="6172200" cy="883920"/>
           </a:xfrm>
           <a:prstGeom prst="rect">
             <a:avLst/>
@@ -6749,21 +7682,27 @@
         </p:nvSpPr>
         <p:spPr>
           <a:xfrm>
-            <a:off x="713231" y="4325112"/>
-            <a:ext cx="6025896" cy="905255"/>
+            <a:off x="713231" y="5599176"/>
+            <a:ext cx="6025896" cy="139700"/>
           </a:xfrm>
           <a:prstGeom prst="rect">
             <a:avLst/>
           </a:prstGeom>
           <a:noFill/>
+          <a:ln>
+            <a:noFill/>
+          </a:ln>
         </p:spPr>
         <p:txBody>
-          <a:bodyPr wrap="none">
+          <a:bodyPr wrap="none" anchor="t" lIns="0" rIns="0" tIns="0" bIns="0">
             <a:noAutofit/>
           </a:bodyPr>
           <a:lstStyle/>
           <a:p>
             <a:pPr>
+              <a:spcBef>
+                <a:spcPts val="0"/>
+              </a:spcBef>
               <a:spcAft>
                 <a:spcPts val="0"/>
               </a:spcAft>
@@ -6775,11 +7714,95 @@
                 </a:solidFill>
                 <a:latin typeface="Consolas"/>
               </a:rPr>
-              <a:t>clf = LogisticRegression(</a:t>
-            </a:r>
-          </a:p>
+              <a:t>clf</a:t>
+            </a:r>
+            <a:r>
+              <a:rPr sz="1100">
+                <a:solidFill>
+                  <a:srgbClr val="000000"/>
+                </a:solidFill>
+                <a:latin typeface="Consolas"/>
+              </a:rPr>
+              <a:t> </a:t>
+            </a:r>
+            <a:r>
+              <a:rPr sz="1100">
+                <a:solidFill>
+                  <a:srgbClr val="666666"/>
+                </a:solidFill>
+                <a:latin typeface="Consolas"/>
+              </a:rPr>
+              <a:t>=</a:t>
+            </a:r>
+            <a:r>
+              <a:rPr sz="1100">
+                <a:solidFill>
+                  <a:srgbClr val="000000"/>
+                </a:solidFill>
+                <a:latin typeface="Consolas"/>
+              </a:rPr>
+              <a:t> </a:t>
+            </a:r>
+            <a:r>
+              <a:rPr sz="1100">
+                <a:solidFill>
+                  <a:srgbClr val="000000"/>
+                </a:solidFill>
+                <a:latin typeface="Consolas"/>
+              </a:rPr>
+              <a:t>LogisticRegression</a:t>
+            </a:r>
+            <a:r>
+              <a:rPr sz="1100">
+                <a:solidFill>
+                  <a:srgbClr val="000000"/>
+                </a:solidFill>
+                <a:latin typeface="Consolas"/>
+              </a:rPr>
+              <a:t>(</a:t>
+            </a:r>
+            <a:r>
+              <a:rPr sz="1100">
+                <a:solidFill>
+                  <a:srgbClr val="BBBBBB"/>
+                </a:solidFill>
+                <a:latin typeface="Consolas"/>
+              </a:rPr>
+              <a:t>
+</a:t>
+            </a:r>
+          </a:p>
+        </p:txBody>
+      </p:sp>
+      <p:sp>
+        <p:nvSpPr>
+          <p:cNvPr id="6" name="TextBox 5"/>
+          <p:cNvSpPr txBox="1"/>
+          <p:nvPr/>
+        </p:nvSpPr>
+        <p:spPr>
+          <a:xfrm>
+            <a:off x="713231" y="5738876"/>
+            <a:ext cx="6025896" cy="139700"/>
+          </a:xfrm>
+          <a:prstGeom prst="rect">
+            <a:avLst/>
+          </a:prstGeom>
+          <a:noFill/>
+          <a:ln>
+            <a:noFill/>
+          </a:ln>
+        </p:spPr>
+        <p:txBody>
+          <a:bodyPr wrap="none" anchor="t" lIns="0" rIns="0" tIns="0" bIns="0">
+            <a:noAutofit/>
+          </a:bodyPr>
+          <a:lstStyle/>
           <a:p>
             <a:pPr>
+              <a:spcBef>
+                <a:spcPts val="0"/>
+              </a:spcBef>
               <a:spcAft>
                 <a:spcPts val="0"/>
               </a:spcAft>
@@ -6791,11 +7814,140 @@
                 </a:solidFill>
                 <a:latin typeface="Consolas"/>
               </a:rPr>
-              <a:t>    class_weight='balanced', random_state=42</a:t>
-            </a:r>
-          </a:p>
+              <a:t>    </a:t>
+            </a:r>
+            <a:r>
+              <a:rPr sz="1100">
+                <a:solidFill>
+                  <a:srgbClr val="000000"/>
+                </a:solidFill>
+                <a:latin typeface="Consolas"/>
+              </a:rPr>
+              <a:t>class_weight</a:t>
+            </a:r>
+            <a:r>
+              <a:rPr sz="1100">
+                <a:solidFill>
+                  <a:srgbClr val="666666"/>
+                </a:solidFill>
+                <a:latin typeface="Consolas"/>
+              </a:rPr>
+              <a:t>=</a:t>
+            </a:r>
+            <a:r>
+              <a:rPr sz="1100">
+                <a:solidFill>
+                  <a:srgbClr val="4070A0"/>
+                </a:solidFill>
+                <a:latin typeface="Consolas"/>
+              </a:rPr>
+              <a:t>'</a:t>
+            </a:r>
+            <a:r>
+              <a:rPr sz="1100">
+                <a:solidFill>
+                  <a:srgbClr val="4070A0"/>
+                </a:solidFill>
+                <a:latin typeface="Consolas"/>
+              </a:rPr>
+              <a:t>balanced</a:t>
+            </a:r>
+            <a:r>
+              <a:rPr sz="1100">
+                <a:solidFill>
+                  <a:srgbClr val="4070A0"/>
+                </a:solidFill>
+                <a:latin typeface="Consolas"/>
+              </a:rPr>
+              <a:t>'</a:t>
+            </a:r>
+            <a:r>
+              <a:rPr sz="1100">
+                <a:solidFill>
+                  <a:srgbClr val="000000"/>
+                </a:solidFill>
+                <a:latin typeface="Consolas"/>
+              </a:rPr>
+              <a:t>,</a:t>
+            </a:r>
+            <a:r>
+              <a:rPr sz="1100">
+                <a:solidFill>
+                  <a:srgbClr val="000000"/>
+                </a:solidFill>
+                <a:latin typeface="Consolas"/>
+              </a:rPr>
+              <a:t> </a:t>
+            </a:r>
+            <a:r>
+              <a:rPr sz="1100">
+                <a:solidFill>
+                  <a:srgbClr val="000000"/>
+                </a:solidFill>
+                <a:latin typeface="Consolas"/>
+              </a:rPr>
+              <a:t>random_state</a:t>
+            </a:r>
+            <a:r>
+              <a:rPr sz="1100">
+                <a:solidFill>
+                  <a:srgbClr val="666666"/>
+                </a:solidFill>
+                <a:latin typeface="Consolas"/>
+              </a:rPr>
+              <a:t>=</a:t>
+            </a:r>
+            <a:r>
+              <a:rPr sz="1100">
+                <a:solidFill>
+                  <a:srgbClr val="40A070"/>
+                </a:solidFill>
+                <a:latin typeface="Consolas"/>
+              </a:rPr>
+              <a:t>42</a:t>
+            </a:r>
+            <a:r>
+              <a:rPr sz="1100">
+                <a:solidFill>
+                  <a:srgbClr val="BBBBBB"/>
+                </a:solidFill>
+                <a:latin typeface="Consolas"/>
+              </a:rPr>
+              <a:t>
+</a:t>
+            </a:r>
+          </a:p>
+        </p:txBody>
+      </p:sp>
+      <p:sp>
+        <p:nvSpPr>
+          <p:cNvPr id="7" name="TextBox 6"/>
+          <p:cNvSpPr txBox="1"/>
+          <p:nvPr/>
+        </p:nvSpPr>
+        <p:spPr>
+          <a:xfrm>
+            <a:off x="713231" y="5878576"/>
+            <a:ext cx="6025896" cy="139700"/>
+          </a:xfrm>
+          <a:prstGeom prst="rect">
+            <a:avLst/>
+          </a:prstGeom>
+          <a:noFill/>
+          <a:ln>
+            <a:noFill/>
+          </a:ln>
+        </p:spPr>
+        <p:txBody>
+          <a:bodyPr wrap="none" anchor="t" lIns="0" rIns="0" tIns="0" bIns="0">
+            <a:noAutofit/>
+          </a:bodyPr>
+          <a:lstStyle/>
           <a:p>
             <a:pPr>
+              <a:spcBef>
+                <a:spcPts val="0"/>
+              </a:spcBef>
               <a:spcAft>
                 <a:spcPts val="0"/>
               </a:spcAft>
@@ -6809,9 +7961,48 @@
               </a:rPr>
               <a:t>)</a:t>
             </a:r>
-          </a:p>
+            <a:r>
+              <a:rPr sz="1100">
+                <a:solidFill>
+                  <a:srgbClr val="BBBBBB"/>
+                </a:solidFill>
+                <a:latin typeface="Consolas"/>
+              </a:rPr>
+              <a:t>
+</a:t>
+            </a:r>
+          </a:p>
+        </p:txBody>
+      </p:sp>
+      <p:sp>
+        <p:nvSpPr>
+          <p:cNvPr id="8" name="TextBox 7"/>
+          <p:cNvSpPr txBox="1"/>
+          <p:nvPr/>
+        </p:nvSpPr>
+        <p:spPr>
+          <a:xfrm>
+            <a:off x="713231" y="6018275"/>
+            <a:ext cx="6025896" cy="139700"/>
+          </a:xfrm>
+          <a:prstGeom prst="rect">
+            <a:avLst/>
+          </a:prstGeom>
+          <a:noFill/>
+          <a:ln>
+            <a:noFill/>
+          </a:ln>
+        </p:spPr>
+        <p:txBody>
+          <a:bodyPr wrap="none" anchor="t" lIns="0" rIns="0" tIns="0" bIns="0">
+            <a:noAutofit/>
+          </a:bodyPr>
+          <a:lstStyle/>
           <a:p>
             <a:pPr>
+              <a:spcBef>
+                <a:spcPts val="0"/>
+              </a:spcBef>
               <a:spcAft>
                 <a:spcPts val="0"/>
               </a:spcAft>
@@ -6823,36 +8014,157 @@
                 </a:solidFill>
                 <a:latin typeface="Consolas"/>
               </a:rPr>
-              <a:t>clf.fit(X_train, y_train)</a:t>
-            </a:r>
-          </a:p>
+              <a:t>clf</a:t>
+            </a:r>
+            <a:r>
+              <a:rPr sz="1100">
+                <a:solidFill>
+                  <a:srgbClr val="666666"/>
+                </a:solidFill>
+                <a:latin typeface="Consolas"/>
+              </a:rPr>
+              <a:t>.</a:t>
+            </a:r>
+            <a:r>
+              <a:rPr sz="1100">
+                <a:solidFill>
+                  <a:srgbClr val="000000"/>
+                </a:solidFill>
+                <a:latin typeface="Consolas"/>
+              </a:rPr>
+              <a:t>fit</a:t>
+            </a:r>
+            <a:r>
+              <a:rPr sz="1100">
+                <a:solidFill>
+                  <a:srgbClr val="000000"/>
+                </a:solidFill>
+                <a:latin typeface="Consolas"/>
+              </a:rPr>
+              <a:t>(</a:t>
+            </a:r>
+            <a:r>
+              <a:rPr sz="1100">
+                <a:solidFill>
+                  <a:srgbClr val="000000"/>
+                </a:solidFill>
+                <a:latin typeface="Consolas"/>
+              </a:rPr>
+              <a:t>X_train</a:t>
+            </a:r>
+            <a:r>
+              <a:rPr sz="1100">
+                <a:solidFill>
+                  <a:srgbClr val="000000"/>
+                </a:solidFill>
+                <a:latin typeface="Consolas"/>
+              </a:rPr>
+              <a:t>,</a:t>
+            </a:r>
+            <a:r>
+              <a:rPr sz="1100">
+                <a:solidFill>
+                  <a:srgbClr val="000000"/>
+                </a:solidFill>
+                <a:latin typeface="Consolas"/>
+              </a:rPr>
+              <a:t> </a:t>
+            </a:r>
+            <a:r>
+              <a:rPr sz="1100">
+                <a:solidFill>
+                  <a:srgbClr val="000000"/>
+                </a:solidFill>
+                <a:latin typeface="Consolas"/>
+              </a:rPr>
+              <a:t>y_train</a:t>
+            </a:r>
+            <a:r>
+              <a:rPr sz="1100">
+                <a:solidFill>
+                  <a:srgbClr val="000000"/>
+                </a:solidFill>
+                <a:latin typeface="Consolas"/>
+              </a:rPr>
+              <a:t>)</a:t>
+            </a:r>
+            <a:r>
+              <a:rPr sz="1100">
+                <a:solidFill>
+                  <a:srgbClr val="BBBBBB"/>
+                </a:solidFill>
+                <a:latin typeface="Consolas"/>
+              </a:rPr>
+              <a:t>
+</a:t>
+            </a:r>
+          </a:p>
+        </p:txBody>
+      </p:sp>
+      <p:sp>
+        <p:nvSpPr>
+          <p:cNvPr id="9" name="TextBox 8"/>
+          <p:cNvSpPr txBox="1"/>
+          <p:nvPr/>
+        </p:nvSpPr>
+        <p:spPr>
+          <a:xfrm>
+            <a:off x="713231" y="6157975"/>
+            <a:ext cx="6025896" cy="139700"/>
+          </a:xfrm>
+          <a:prstGeom prst="rect">
+            <a:avLst/>
+          </a:prstGeom>
+          <a:noFill/>
+          <a:ln>
+            <a:noFill/>
+          </a:ln>
+        </p:spPr>
+        <p:txBody>
+          <a:bodyPr wrap="none" anchor="t" lIns="0" rIns="0" tIns="0" bIns="0">
+            <a:noAutofit/>
+          </a:bodyPr>
+          <a:lstStyle/>
           <a:p>
             <a:pPr>
+              <a:spcBef>
+                <a:spcPts val="0"/>
+              </a:spcBef>
               <a:spcAft>
                 <a:spcPts val="0"/>
               </a:spcAft>
             </a:pPr>
             <a:r>
-              <a:rPr sz="1100">
-                <a:solidFill>
-                  <a:srgbClr val="000000"/>
+              <a:rPr sz="1100" i="1">
+                <a:solidFill>
+                  <a:srgbClr val="60A0B0"/>
                 </a:solidFill>
                 <a:latin typeface="Consolas"/>
               </a:rPr>
               <a:t># веса классов подобраны автоматически</a:t>
             </a:r>
-          </a:p>
-        </p:txBody>
-      </p:sp>
-      <p:sp>
-        <p:nvSpPr>
-          <p:cNvPr id="6" name="TextBox 5"/>
+            <a:r>
+              <a:rPr sz="1100">
+                <a:solidFill>
+                  <a:srgbClr val="BBBBBB"/>
+                </a:solidFill>
+                <a:latin typeface="Consolas"/>
+              </a:rPr>
+              <a:t>
+</a:t>
+            </a:r>
+          </a:p>
+        </p:txBody>
+      </p:sp>
+      <p:sp>
+        <p:nvSpPr>
+          <p:cNvPr id="10" name="TextBox 9"/>
           <p:cNvSpPr txBox="1"/>
           <p:nvPr/>
         </p:nvSpPr>
         <p:spPr>
           <a:xfrm>
-            <a:off x="640080" y="5321807"/>
+            <a:off x="640080" y="6492240"/>
             <a:ext cx="6172200" cy="201168"/>
           </a:xfrm>
           <a:prstGeom prst="rect">
@@ -6881,7 +8193,7 @@
       </p:sp>
       <p:pic>
         <p:nvPicPr>
-          <p:cNvPr id="7" name="Picture 6" descr="class_weight_balanced.png"/>
+          <p:cNvPr id="11" name="Picture 10" descr="class_weight_balanced.png"/>
           <p:cNvPicPr>
             <a:picLocks noChangeAspect="1"/>
           </p:cNvPicPr>
@@ -6895,8 +8207,8 @@
         </p:blipFill>
         <p:spPr>
           <a:xfrm>
-            <a:off x="7398032" y="1325880"/>
-            <a:ext cx="4207910" cy="4407407"/>
+            <a:off x="7292492" y="1371600"/>
+            <a:ext cx="4418990" cy="4017264"/>
           </a:xfrm>
           <a:prstGeom prst="rect">
             <a:avLst/>
@@ -6963,7 +8275,7 @@
         <p:spPr>
           <a:xfrm>
             <a:off x="640080" y="1371600"/>
-            <a:ext cx="6263640" cy="2697480"/>
+            <a:ext cx="6263640" cy="2514600"/>
           </a:xfrm>
           <a:prstGeom prst="rect">
             <a:avLst/>
@@ -7033,7 +8345,26 @@
                   <a:srgbClr val="000000"/>
                 </a:solidFill>
               </a:rPr>
-              <a:t>• Для них — `CalibratedClassifierCV` (Platt scaling, Isotonic regression)</a:t>
+              <a:t xml:space="preserve">• Для них — </a:t>
+            </a:r>
+            <a:r>
+              <a:rPr lang="ru-RU" dirty="0" sz="2000">
+                <a:latin typeface="Consolas"/>
+                <a:cs typeface="Consolas"/>
+                <a:ea typeface="Consolas"/>
+                <a:solidFill>
+                  <a:srgbClr val="000000"/>
+                </a:solidFill>
+              </a:rPr>
+              <a:t>CalibratedClassifierCV</a:t>
+            </a:r>
+            <a:r>
+              <a:rPr lang="ru-RU" dirty="0" sz="2000">
+                <a:solidFill>
+                  <a:srgbClr val="000000"/>
+                </a:solidFill>
+              </a:rPr>
+              <a:t xml:space="preserve"> (Platt scaling, Isotonic regression)</a:t>
             </a:r>
           </a:p>
           <a:p>
@@ -7069,8 +8400,8 @@
         </p:nvSpPr>
         <p:spPr>
           <a:xfrm>
-            <a:off x="640080" y="4690872"/>
-            <a:ext cx="6172200" cy="630936"/>
+            <a:off x="640080" y="5832856"/>
+            <a:ext cx="6172200" cy="604520"/>
           </a:xfrm>
           <a:prstGeom prst="rect">
             <a:avLst/>
@@ -7114,21 +8445,27 @@
         </p:nvSpPr>
         <p:spPr>
           <a:xfrm>
-            <a:off x="713231" y="4727448"/>
-            <a:ext cx="6025896" cy="557784"/>
+            <a:off x="713231" y="5878576"/>
+            <a:ext cx="6025896" cy="139700"/>
           </a:xfrm>
           <a:prstGeom prst="rect">
             <a:avLst/>
           </a:prstGeom>
           <a:noFill/>
+          <a:ln>
+            <a:noFill/>
+          </a:ln>
         </p:spPr>
         <p:txBody>
-          <a:bodyPr wrap="none">
+          <a:bodyPr wrap="none" anchor="t" lIns="0" rIns="0" tIns="0" bIns="0">
             <a:noAutofit/>
           </a:bodyPr>
           <a:lstStyle/>
           <a:p>
             <a:pPr>
+              <a:spcBef>
+                <a:spcPts val="0"/>
+              </a:spcBef>
               <a:spcAft>
                 <a:spcPts val="0"/>
               </a:spcAft>
@@ -7140,11 +8477,158 @@
                 </a:solidFill>
                 <a:latin typeface="Consolas"/>
               </a:rPr>
-              <a:t>cal = CalibratedClassifierCV(clf, cv=3)</a:t>
-            </a:r>
-          </a:p>
+              <a:t>cal</a:t>
+            </a:r>
+            <a:r>
+              <a:rPr sz="1100">
+                <a:solidFill>
+                  <a:srgbClr val="000000"/>
+                </a:solidFill>
+                <a:latin typeface="Consolas"/>
+              </a:rPr>
+              <a:t> </a:t>
+            </a:r>
+            <a:r>
+              <a:rPr sz="1100">
+                <a:solidFill>
+                  <a:srgbClr val="666666"/>
+                </a:solidFill>
+                <a:latin typeface="Consolas"/>
+              </a:rPr>
+              <a:t>=</a:t>
+            </a:r>
+            <a:r>
+              <a:rPr sz="1100">
+                <a:solidFill>
+                  <a:srgbClr val="000000"/>
+                </a:solidFill>
+                <a:latin typeface="Consolas"/>
+              </a:rPr>
+              <a:t> </a:t>
+            </a:r>
+            <a:r>
+              <a:rPr sz="1100">
+                <a:solidFill>
+                  <a:srgbClr val="000000"/>
+                </a:solidFill>
+                <a:latin typeface="Consolas"/>
+              </a:rPr>
+              <a:t>CalibratedClassifierCV</a:t>
+            </a:r>
+            <a:r>
+              <a:rPr sz="1100">
+                <a:solidFill>
+                  <a:srgbClr val="000000"/>
+                </a:solidFill>
+                <a:latin typeface="Consolas"/>
+              </a:rPr>
+              <a:t>(</a:t>
+            </a:r>
+            <a:r>
+              <a:rPr sz="1100">
+                <a:solidFill>
+                  <a:srgbClr val="000000"/>
+                </a:solidFill>
+                <a:latin typeface="Consolas"/>
+              </a:rPr>
+              <a:t>clf</a:t>
+            </a:r>
+            <a:r>
+              <a:rPr sz="1100">
+                <a:solidFill>
+                  <a:srgbClr val="000000"/>
+                </a:solidFill>
+                <a:latin typeface="Consolas"/>
+              </a:rPr>
+              <a:t>,</a:t>
+            </a:r>
+            <a:r>
+              <a:rPr sz="1100">
+                <a:solidFill>
+                  <a:srgbClr val="000000"/>
+                </a:solidFill>
+                <a:latin typeface="Consolas"/>
+              </a:rPr>
+              <a:t> </a:t>
+            </a:r>
+            <a:r>
+              <a:rPr sz="1100">
+                <a:solidFill>
+                  <a:srgbClr val="000000"/>
+                </a:solidFill>
+                <a:latin typeface="Consolas"/>
+              </a:rPr>
+              <a:t>cv</a:t>
+            </a:r>
+            <a:r>
+              <a:rPr sz="1100">
+                <a:solidFill>
+                  <a:srgbClr val="666666"/>
+                </a:solidFill>
+                <a:latin typeface="Consolas"/>
+              </a:rPr>
+              <a:t>=</a:t>
+            </a:r>
+            <a:r>
+              <a:rPr sz="1100">
+                <a:solidFill>
+                  <a:srgbClr val="40A070"/>
+                </a:solidFill>
+                <a:latin typeface="Consolas"/>
+              </a:rPr>
+              <a:t>3</a:t>
+            </a:r>
+            <a:r>
+              <a:rPr sz="1100">
+                <a:solidFill>
+                  <a:srgbClr val="000000"/>
+                </a:solidFill>
+                <a:latin typeface="Consolas"/>
+              </a:rPr>
+              <a:t>)</a:t>
+            </a:r>
+            <a:r>
+              <a:rPr sz="1100">
+                <a:solidFill>
+                  <a:srgbClr val="BBBBBB"/>
+                </a:solidFill>
+                <a:latin typeface="Consolas"/>
+              </a:rPr>
+              <a:t>
+</a:t>
+            </a:r>
+          </a:p>
+        </p:txBody>
+      </p:sp>
+      <p:sp>
+        <p:nvSpPr>
+          <p:cNvPr id="6" name="TextBox 5"/>
+          <p:cNvSpPr txBox="1"/>
+          <p:nvPr/>
+        </p:nvSpPr>
+        <p:spPr>
+          <a:xfrm>
+            <a:off x="713231" y="6018275"/>
+            <a:ext cx="6025896" cy="139700"/>
+          </a:xfrm>
+          <a:prstGeom prst="rect">
+            <a:avLst/>
+          </a:prstGeom>
+          <a:noFill/>
+          <a:ln>
+            <a:noFill/>
+          </a:ln>
+        </p:spPr>
+        <p:txBody>
+          <a:bodyPr wrap="none" anchor="t" lIns="0" rIns="0" tIns="0" bIns="0">
+            <a:noAutofit/>
+          </a:bodyPr>
+          <a:lstStyle/>
           <a:p>
             <a:pPr>
+              <a:spcBef>
+                <a:spcPts val="0"/>
+              </a:spcBef>
               <a:spcAft>
                 <a:spcPts val="0"/>
               </a:spcAft>
@@ -7156,11 +8640,122 @@
                 </a:solidFill>
                 <a:latin typeface="Consolas"/>
               </a:rPr>
-              <a:t>cal.fit(X_train, y_train)</a:t>
-            </a:r>
-          </a:p>
+              <a:t>cal</a:t>
+            </a:r>
+            <a:r>
+              <a:rPr sz="1100">
+                <a:solidFill>
+                  <a:srgbClr val="666666"/>
+                </a:solidFill>
+                <a:latin typeface="Consolas"/>
+              </a:rPr>
+              <a:t>.</a:t>
+            </a:r>
+            <a:r>
+              <a:rPr sz="1100">
+                <a:solidFill>
+                  <a:srgbClr val="000000"/>
+                </a:solidFill>
+                <a:latin typeface="Consolas"/>
+              </a:rPr>
+              <a:t>fit</a:t>
+            </a:r>
+            <a:r>
+              <a:rPr sz="1100">
+                <a:solidFill>
+                  <a:srgbClr val="000000"/>
+                </a:solidFill>
+                <a:latin typeface="Consolas"/>
+              </a:rPr>
+              <a:t>(</a:t>
+            </a:r>
+            <a:r>
+              <a:rPr sz="1100">
+                <a:solidFill>
+                  <a:srgbClr val="000000"/>
+                </a:solidFill>
+                <a:latin typeface="Consolas"/>
+              </a:rPr>
+              <a:t>X_train</a:t>
+            </a:r>
+            <a:r>
+              <a:rPr sz="1100">
+                <a:solidFill>
+                  <a:srgbClr val="000000"/>
+                </a:solidFill>
+                <a:latin typeface="Consolas"/>
+              </a:rPr>
+              <a:t>,</a:t>
+            </a:r>
+            <a:r>
+              <a:rPr sz="1100">
+                <a:solidFill>
+                  <a:srgbClr val="000000"/>
+                </a:solidFill>
+                <a:latin typeface="Consolas"/>
+              </a:rPr>
+              <a:t> </a:t>
+            </a:r>
+            <a:r>
+              <a:rPr sz="1100">
+                <a:solidFill>
+                  <a:srgbClr val="000000"/>
+                </a:solidFill>
+                <a:latin typeface="Consolas"/>
+              </a:rPr>
+              <a:t>y_train</a:t>
+            </a:r>
+            <a:r>
+              <a:rPr sz="1100">
+                <a:solidFill>
+                  <a:srgbClr val="000000"/>
+                </a:solidFill>
+                <a:latin typeface="Consolas"/>
+              </a:rPr>
+              <a:t>)</a:t>
+            </a:r>
+            <a:r>
+              <a:rPr sz="1100">
+                <a:solidFill>
+                  <a:srgbClr val="BBBBBB"/>
+                </a:solidFill>
+                <a:latin typeface="Consolas"/>
+              </a:rPr>
+              <a:t>
+</a:t>
+            </a:r>
+          </a:p>
+        </p:txBody>
+      </p:sp>
+      <p:sp>
+        <p:nvSpPr>
+          <p:cNvPr id="7" name="TextBox 6"/>
+          <p:cNvSpPr txBox="1"/>
+          <p:nvPr/>
+        </p:nvSpPr>
+        <p:spPr>
+          <a:xfrm>
+            <a:off x="713231" y="6157975"/>
+            <a:ext cx="6025896" cy="139700"/>
+          </a:xfrm>
+          <a:prstGeom prst="rect">
+            <a:avLst/>
+          </a:prstGeom>
+          <a:noFill/>
+          <a:ln>
+            <a:noFill/>
+          </a:ln>
+        </p:spPr>
+        <p:txBody>
+          <a:bodyPr wrap="none" anchor="t" lIns="0" rIns="0" tIns="0" bIns="0">
+            <a:noAutofit/>
+          </a:bodyPr>
+          <a:lstStyle/>
           <a:p>
             <a:pPr>
+              <a:spcBef>
+                <a:spcPts val="0"/>
+              </a:spcBef>
               <a:spcAft>
                 <a:spcPts val="0"/>
               </a:spcAft>
@@ -7172,20 +8767,165 @@
                 </a:solidFill>
                 <a:latin typeface="Consolas"/>
               </a:rPr>
-              <a:t>p_cal = cal.predict_proba(X_test)[:, 1]</a:t>
-            </a:r>
-          </a:p>
-        </p:txBody>
-      </p:sp>
-      <p:sp>
-        <p:nvSpPr>
-          <p:cNvPr id="6" name="TextBox 5"/>
+              <a:t>p_cal</a:t>
+            </a:r>
+            <a:r>
+              <a:rPr sz="1100">
+                <a:solidFill>
+                  <a:srgbClr val="000000"/>
+                </a:solidFill>
+                <a:latin typeface="Consolas"/>
+              </a:rPr>
+              <a:t> </a:t>
+            </a:r>
+            <a:r>
+              <a:rPr sz="1100">
+                <a:solidFill>
+                  <a:srgbClr val="666666"/>
+                </a:solidFill>
+                <a:latin typeface="Consolas"/>
+              </a:rPr>
+              <a:t>=</a:t>
+            </a:r>
+            <a:r>
+              <a:rPr sz="1100">
+                <a:solidFill>
+                  <a:srgbClr val="000000"/>
+                </a:solidFill>
+                <a:latin typeface="Consolas"/>
+              </a:rPr>
+              <a:t> </a:t>
+            </a:r>
+            <a:r>
+              <a:rPr sz="1100">
+                <a:solidFill>
+                  <a:srgbClr val="000000"/>
+                </a:solidFill>
+                <a:latin typeface="Consolas"/>
+              </a:rPr>
+              <a:t>cal</a:t>
+            </a:r>
+            <a:r>
+              <a:rPr sz="1100">
+                <a:solidFill>
+                  <a:srgbClr val="666666"/>
+                </a:solidFill>
+                <a:latin typeface="Consolas"/>
+              </a:rPr>
+              <a:t>.</a:t>
+            </a:r>
+            <a:r>
+              <a:rPr sz="1100">
+                <a:solidFill>
+                  <a:srgbClr val="000000"/>
+                </a:solidFill>
+                <a:latin typeface="Consolas"/>
+              </a:rPr>
+              <a:t>predict_proba</a:t>
+            </a:r>
+            <a:r>
+              <a:rPr sz="1100">
+                <a:solidFill>
+                  <a:srgbClr val="000000"/>
+                </a:solidFill>
+                <a:latin typeface="Consolas"/>
+              </a:rPr>
+              <a:t>(</a:t>
+            </a:r>
+            <a:r>
+              <a:rPr sz="1100">
+                <a:solidFill>
+                  <a:srgbClr val="000000"/>
+                </a:solidFill>
+                <a:latin typeface="Consolas"/>
+              </a:rPr>
+              <a:t>X_test</a:t>
+            </a:r>
+            <a:r>
+              <a:rPr sz="1100">
+                <a:solidFill>
+                  <a:srgbClr val="000000"/>
+                </a:solidFill>
+                <a:latin typeface="Consolas"/>
+              </a:rPr>
+              <a:t>)</a:t>
+            </a:r>
+            <a:r>
+              <a:rPr sz="1100">
+                <a:solidFill>
+                  <a:srgbClr val="000000"/>
+                </a:solidFill>
+                <a:latin typeface="Consolas"/>
+              </a:rPr>
+              <a:t>[</a:t>
+            </a:r>
+            <a:r>
+              <a:rPr sz="1100">
+                <a:solidFill>
+                  <a:srgbClr val="000000"/>
+                </a:solidFill>
+                <a:latin typeface="Consolas"/>
+              </a:rPr>
+              <a:t>:</a:t>
+            </a:r>
+            <a:r>
+              <a:rPr sz="1100">
+                <a:solidFill>
+                  <a:srgbClr val="000000"/>
+                </a:solidFill>
+                <a:latin typeface="Consolas"/>
+              </a:rPr>
+              <a:t>,</a:t>
+            </a:r>
+            <a:r>
+              <a:rPr sz="1100">
+                <a:solidFill>
+                  <a:srgbClr val="000000"/>
+                </a:solidFill>
+                <a:latin typeface="Consolas"/>
+              </a:rPr>
+              <a:t> </a:t>
+            </a:r>
+            <a:r>
+              <a:rPr sz="1100">
+                <a:solidFill>
+                  <a:srgbClr val="40A070"/>
+                </a:solidFill>
+                <a:latin typeface="Consolas"/>
+              </a:rPr>
+              <a:t>1</a:t>
+            </a:r>
+            <a:r>
+              <a:rPr sz="1100">
+                <a:solidFill>
+                  <a:srgbClr val="000000"/>
+                </a:solidFill>
+                <a:latin typeface="Consolas"/>
+              </a:rPr>
+              <a:t>]</a:t>
+            </a:r>
+            <a:r>
+              <a:rPr sz="1100">
+                <a:solidFill>
+                  <a:srgbClr val="BBBBBB"/>
+                </a:solidFill>
+                <a:latin typeface="Consolas"/>
+              </a:rPr>
+              <a:t>
+</a:t>
+            </a:r>
+          </a:p>
+        </p:txBody>
+      </p:sp>
+      <p:sp>
+        <p:nvSpPr>
+          <p:cNvPr id="8" name="TextBox 7"/>
           <p:cNvSpPr txBox="1"/>
           <p:nvPr/>
         </p:nvSpPr>
         <p:spPr>
           <a:xfrm>
-            <a:off x="640080" y="5376672"/>
+            <a:off x="640080" y="6492240"/>
             <a:ext cx="6172200" cy="201168"/>
           </a:xfrm>
           <a:prstGeom prst="rect">
@@ -7214,7 +8954,7 @@
       </p:sp>
       <p:pic>
         <p:nvPicPr>
-          <p:cNvPr id="7" name="Picture 6" descr="calibration_reliability.png"/>
+          <p:cNvPr id="9" name="Picture 8" descr="calibration_reliability.png"/>
           <p:cNvPicPr>
             <a:picLocks noChangeAspect="1"/>
           </p:cNvPicPr>
@@ -7228,8 +8968,8 @@
         </p:blipFill>
         <p:spPr>
           <a:xfrm>
-            <a:off x="7474430" y="1325880"/>
-            <a:ext cx="4055115" cy="4407408"/>
+            <a:off x="7269480" y="1371600"/>
+            <a:ext cx="4465015" cy="4059105"/>
           </a:xfrm>
           <a:prstGeom prst="rect">
             <a:avLst/>
@@ -7296,7 +9036,7 @@
         <p:spPr>
           <a:xfrm>
             <a:off x="640080" y="1371600"/>
-            <a:ext cx="6263640" cy="2697480"/>
+            <a:ext cx="6263640" cy="2514600"/>
           </a:xfrm>
           <a:prstGeom prst="rect">
             <a:avLst/>
@@ -7519,8 +9259,8 @@
         </p:nvSpPr>
         <p:spPr>
           <a:xfrm>
-            <a:off x="640080" y="4690872"/>
-            <a:ext cx="6172200" cy="630936"/>
+            <a:off x="640080" y="5832856"/>
+            <a:ext cx="6172200" cy="604520"/>
           </a:xfrm>
           <a:prstGeom prst="rect">
             <a:avLst/>
@@ -7564,21 +9304,27 @@
         </p:nvSpPr>
         <p:spPr>
           <a:xfrm>
-            <a:off x="713231" y="4727448"/>
-            <a:ext cx="6025896" cy="557784"/>
+            <a:off x="713231" y="5878576"/>
+            <a:ext cx="6025896" cy="139700"/>
           </a:xfrm>
           <a:prstGeom prst="rect">
             <a:avLst/>
           </a:prstGeom>
           <a:noFill/>
+          <a:ln>
+            <a:noFill/>
+          </a:ln>
         </p:spPr>
         <p:txBody>
-          <a:bodyPr wrap="none">
+          <a:bodyPr wrap="none" anchor="t" lIns="0" rIns="0" tIns="0" bIns="0">
             <a:noAutofit/>
           </a:bodyPr>
           <a:lstStyle/>
           <a:p>
             <a:pPr>
+              <a:spcBef>
+                <a:spcPts val="0"/>
+              </a:spcBef>
               <a:spcAft>
                 <a:spcPts val="0"/>
               </a:spcAft>
@@ -7590,11 +9336,203 @@
                 </a:solidFill>
                 <a:latin typeface="Consolas"/>
               </a:rPr>
-              <a:t>mlp = MLPClassifier(hidden_layer_sizes=(8,), max_iter=500)</a:t>
-            </a:r>
-          </a:p>
+              <a:t>mlp</a:t>
+            </a:r>
+            <a:r>
+              <a:rPr sz="1100">
+                <a:solidFill>
+                  <a:srgbClr val="000000"/>
+                </a:solidFill>
+                <a:latin typeface="Consolas"/>
+              </a:rPr>
+              <a:t> </a:t>
+            </a:r>
+            <a:r>
+              <a:rPr sz="1100">
+                <a:solidFill>
+                  <a:srgbClr val="666666"/>
+                </a:solidFill>
+                <a:latin typeface="Consolas"/>
+              </a:rPr>
+              <a:t>=</a:t>
+            </a:r>
+            <a:r>
+              <a:rPr sz="1100">
+                <a:solidFill>
+                  <a:srgbClr val="000000"/>
+                </a:solidFill>
+                <a:latin typeface="Consolas"/>
+              </a:rPr>
+              <a:t> </a:t>
+            </a:r>
+            <a:r>
+              <a:rPr sz="1100">
+                <a:solidFill>
+                  <a:srgbClr val="000000"/>
+                </a:solidFill>
+                <a:latin typeface="Consolas"/>
+              </a:rPr>
+              <a:t>MLPClassifier</a:t>
+            </a:r>
+            <a:r>
+              <a:rPr sz="1100">
+                <a:solidFill>
+                  <a:srgbClr val="000000"/>
+                </a:solidFill>
+                <a:latin typeface="Consolas"/>
+              </a:rPr>
+              <a:t>(</a:t>
+            </a:r>
+            <a:r>
+              <a:rPr sz="1100">
+                <a:solidFill>
+                  <a:srgbClr val="000000"/>
+                </a:solidFill>
+                <a:latin typeface="Consolas"/>
+              </a:rPr>
+              <a:t>hidden_layer_sizes</a:t>
+            </a:r>
+            <a:r>
+              <a:rPr sz="1100">
+                <a:solidFill>
+                  <a:srgbClr val="666666"/>
+                </a:solidFill>
+                <a:latin typeface="Consolas"/>
+              </a:rPr>
+              <a:t>=</a:t>
+            </a:r>
+            <a:r>
+              <a:rPr sz="1100">
+                <a:solidFill>
+                  <a:srgbClr val="000000"/>
+                </a:solidFill>
+                <a:latin typeface="Consolas"/>
+              </a:rPr>
+              <a:t>(</a:t>
+            </a:r>
+            <a:r>
+              <a:rPr sz="1100">
+                <a:solidFill>
+                  <a:srgbClr val="40A070"/>
+                </a:solidFill>
+                <a:latin typeface="Consolas"/>
+              </a:rPr>
+              <a:t>8</a:t>
+            </a:r>
+            <a:r>
+              <a:rPr sz="1100">
+                <a:solidFill>
+                  <a:srgbClr val="000000"/>
+                </a:solidFill>
+                <a:latin typeface="Consolas"/>
+              </a:rPr>
+              <a:t>,</a:t>
+            </a:r>
+            <a:r>
+              <a:rPr sz="1100">
+                <a:solidFill>
+                  <a:srgbClr val="000000"/>
+                </a:solidFill>
+                <a:latin typeface="Consolas"/>
+              </a:rPr>
+              <a:t>)</a:t>
+            </a:r>
+            <a:r>
+              <a:rPr sz="1100">
+                <a:solidFill>
+                  <a:srgbClr val="000000"/>
+                </a:solidFill>
+                <a:latin typeface="Consolas"/>
+              </a:rPr>
+              <a:t>,</a:t>
+            </a:r>
+            <a:r>
+              <a:rPr sz="1100">
+                <a:solidFill>
+                  <a:srgbClr val="000000"/>
+                </a:solidFill>
+                <a:latin typeface="Consolas"/>
+              </a:rPr>
+              <a:t> </a:t>
+            </a:r>
+            <a:r>
+              <a:rPr sz="1100">
+                <a:solidFill>
+                  <a:srgbClr val="000000"/>
+                </a:solidFill>
+                <a:latin typeface="Consolas"/>
+              </a:rPr>
+              <a:t>max_iter</a:t>
+            </a:r>
+            <a:r>
+              <a:rPr sz="1100">
+                <a:solidFill>
+                  <a:srgbClr val="666666"/>
+                </a:solidFill>
+                <a:latin typeface="Consolas"/>
+              </a:rPr>
+              <a:t>=</a:t>
+            </a:r>
+            <a:r>
+              <a:rPr sz="1100">
+                <a:solidFill>
+                  <a:srgbClr val="40A070"/>
+                </a:solidFill>
+                <a:latin typeface="Consolas"/>
+              </a:rPr>
+              <a:t>500</a:t>
+            </a:r>
+            <a:r>
+              <a:rPr sz="1100">
+                <a:solidFill>
+                  <a:srgbClr val="000000"/>
+                </a:solidFill>
+                <a:latin typeface="Consolas"/>
+              </a:rPr>
+              <a:t>)</a:t>
+            </a:r>
+            <a:r>
+              <a:rPr sz="1100">
+                <a:solidFill>
+                  <a:srgbClr val="BBBBBB"/>
+                </a:solidFill>
+                <a:latin typeface="Consolas"/>
+              </a:rPr>
+              <a:t>
+</a:t>
+            </a:r>
+          </a:p>
+        </p:txBody>
+      </p:sp>
+      <p:sp>
+        <p:nvSpPr>
+          <p:cNvPr id="6" name="TextBox 5"/>
+          <p:cNvSpPr txBox="1"/>
+          <p:nvPr/>
+        </p:nvSpPr>
+        <p:spPr>
+          <a:xfrm>
+            <a:off x="713231" y="6018275"/>
+            <a:ext cx="6025896" cy="139700"/>
+          </a:xfrm>
+          <a:prstGeom prst="rect">
+            <a:avLst/>
+          </a:prstGeom>
+          <a:noFill/>
+          <a:ln>
+            <a:noFill/>
+          </a:ln>
+        </p:spPr>
+        <p:txBody>
+          <a:bodyPr wrap="none" anchor="t" lIns="0" rIns="0" tIns="0" bIns="0">
+            <a:noAutofit/>
+          </a:bodyPr>
+          <a:lstStyle/>
           <a:p>
             <a:pPr>
+              <a:spcBef>
+                <a:spcPts val="0"/>
+              </a:spcBef>
               <a:spcAft>
                 <a:spcPts val="0"/>
               </a:spcAft>
@@ -7606,36 +9544,157 @@
                 </a:solidFill>
                 <a:latin typeface="Consolas"/>
               </a:rPr>
-              <a:t>mlp.fit(X_train, y_train)</a:t>
-            </a:r>
-          </a:p>
+              <a:t>mlp</a:t>
+            </a:r>
+            <a:r>
+              <a:rPr sz="1100">
+                <a:solidFill>
+                  <a:srgbClr val="666666"/>
+                </a:solidFill>
+                <a:latin typeface="Consolas"/>
+              </a:rPr>
+              <a:t>.</a:t>
+            </a:r>
+            <a:r>
+              <a:rPr sz="1100">
+                <a:solidFill>
+                  <a:srgbClr val="000000"/>
+                </a:solidFill>
+                <a:latin typeface="Consolas"/>
+              </a:rPr>
+              <a:t>fit</a:t>
+            </a:r>
+            <a:r>
+              <a:rPr sz="1100">
+                <a:solidFill>
+                  <a:srgbClr val="000000"/>
+                </a:solidFill>
+                <a:latin typeface="Consolas"/>
+              </a:rPr>
+              <a:t>(</a:t>
+            </a:r>
+            <a:r>
+              <a:rPr sz="1100">
+                <a:solidFill>
+                  <a:srgbClr val="000000"/>
+                </a:solidFill>
+                <a:latin typeface="Consolas"/>
+              </a:rPr>
+              <a:t>X_train</a:t>
+            </a:r>
+            <a:r>
+              <a:rPr sz="1100">
+                <a:solidFill>
+                  <a:srgbClr val="000000"/>
+                </a:solidFill>
+                <a:latin typeface="Consolas"/>
+              </a:rPr>
+              <a:t>,</a:t>
+            </a:r>
+            <a:r>
+              <a:rPr sz="1100">
+                <a:solidFill>
+                  <a:srgbClr val="000000"/>
+                </a:solidFill>
+                <a:latin typeface="Consolas"/>
+              </a:rPr>
+              <a:t> </a:t>
+            </a:r>
+            <a:r>
+              <a:rPr sz="1100">
+                <a:solidFill>
+                  <a:srgbClr val="000000"/>
+                </a:solidFill>
+                <a:latin typeface="Consolas"/>
+              </a:rPr>
+              <a:t>y_train</a:t>
+            </a:r>
+            <a:r>
+              <a:rPr sz="1100">
+                <a:solidFill>
+                  <a:srgbClr val="000000"/>
+                </a:solidFill>
+                <a:latin typeface="Consolas"/>
+              </a:rPr>
+              <a:t>)</a:t>
+            </a:r>
+            <a:r>
+              <a:rPr sz="1100">
+                <a:solidFill>
+                  <a:srgbClr val="BBBBBB"/>
+                </a:solidFill>
+                <a:latin typeface="Consolas"/>
+              </a:rPr>
+              <a:t>
+</a:t>
+            </a:r>
+          </a:p>
+        </p:txBody>
+      </p:sp>
+      <p:sp>
+        <p:nvSpPr>
+          <p:cNvPr id="7" name="TextBox 6"/>
+          <p:cNvSpPr txBox="1"/>
+          <p:nvPr/>
+        </p:nvSpPr>
+        <p:spPr>
+          <a:xfrm>
+            <a:off x="713231" y="6157975"/>
+            <a:ext cx="6025896" cy="139700"/>
+          </a:xfrm>
+          <a:prstGeom prst="rect">
+            <a:avLst/>
+          </a:prstGeom>
+          <a:noFill/>
+          <a:ln>
+            <a:noFill/>
+          </a:ln>
+        </p:spPr>
+        <p:txBody>
+          <a:bodyPr wrap="none" anchor="t" lIns="0" rIns="0" tIns="0" bIns="0">
+            <a:noAutofit/>
+          </a:bodyPr>
+          <a:lstStyle/>
           <a:p>
             <a:pPr>
+              <a:spcBef>
+                <a:spcPts val="0"/>
+              </a:spcBef>
               <a:spcAft>
                 <a:spcPts val="0"/>
               </a:spcAft>
             </a:pPr>
             <a:r>
-              <a:rPr sz="1100">
-                <a:solidFill>
-                  <a:srgbClr val="000000"/>
+              <a:rPr sz="1100" i="1">
+                <a:solidFill>
+                  <a:srgbClr val="60A0B0"/>
                 </a:solidFill>
                 <a:latin typeface="Consolas"/>
               </a:rPr>
               <a:t># один скрытый слой ≈ нелинейная логистическая</a:t>
             </a:r>
-          </a:p>
-        </p:txBody>
-      </p:sp>
-      <p:sp>
-        <p:nvSpPr>
-          <p:cNvPr id="6" name="TextBox 5"/>
+            <a:r>
+              <a:rPr sz="1100">
+                <a:solidFill>
+                  <a:srgbClr val="BBBBBB"/>
+                </a:solidFill>
+                <a:latin typeface="Consolas"/>
+              </a:rPr>
+              <a:t>
+</a:t>
+            </a:r>
+          </a:p>
+        </p:txBody>
+      </p:sp>
+      <p:sp>
+        <p:nvSpPr>
+          <p:cNvPr id="8" name="TextBox 7"/>
           <p:cNvSpPr txBox="1"/>
           <p:nvPr/>
         </p:nvSpPr>
         <p:spPr>
           <a:xfrm>
-            <a:off x="640080" y="5376672"/>
+            <a:off x="640080" y="6492240"/>
             <a:ext cx="6172200" cy="201168"/>
           </a:xfrm>
           <a:prstGeom prst="rect">
@@ -7664,7 +9723,7 @@
       </p:sp>
       <p:pic>
         <p:nvPicPr>
-          <p:cNvPr id="7" name="Picture 6" descr="nonlinear_decision_boundary.png"/>
+          <p:cNvPr id="9" name="Picture 8" descr="nonlinear_decision_boundary.png"/>
           <p:cNvPicPr>
             <a:picLocks noChangeAspect="1"/>
           </p:cNvPicPr>
@@ -7678,8 +9737,8 @@
         </p:blipFill>
         <p:spPr>
           <a:xfrm>
-            <a:off x="7476303" y="1325880"/>
-            <a:ext cx="4051367" cy="4407408"/>
+            <a:off x="7269480" y="1371600"/>
+            <a:ext cx="4465015" cy="4059105"/>
           </a:xfrm>
           <a:prstGeom prst="rect">
             <a:avLst/>
@@ -7746,7 +9805,7 @@
         <p:spPr>
           <a:xfrm>
             <a:off x="640080" y="1371600"/>
-            <a:ext cx="6263640" cy="2971800"/>
+            <a:ext cx="6263640" cy="2788920"/>
           </a:xfrm>
           <a:prstGeom prst="rect">
             <a:avLst/>
@@ -8012,8 +10071,8 @@
         </p:blipFill>
         <p:spPr>
           <a:xfrm>
-            <a:off x="7416339" y="1325880"/>
-            <a:ext cx="4171296" cy="4407407"/>
+            <a:off x="7269480" y="1371600"/>
+            <a:ext cx="4465015" cy="4059105"/>
           </a:xfrm>
           <a:prstGeom prst="rect">
             <a:avLst/>
@@ -8080,7 +10139,7 @@
         <p:spPr>
           <a:xfrm>
             <a:off x="640080" y="1371600"/>
-            <a:ext cx="5532120" cy="2423160"/>
+            <a:ext cx="5532120" cy="2240280"/>
           </a:xfrm>
           <a:prstGeom prst="rect">
             <a:avLst/>
@@ -8127,7 +10186,45 @@
                   <a:srgbClr val="000000"/>
                 </a:solidFill>
               </a:rPr>
-              <a:t>• Используй `Pipeline` и `StandardScaler` — чувствительность к масштабу из-за регуляризации</a:t>
+              <a:t xml:space="preserve">• Используй </a:t>
+            </a:r>
+            <a:r>
+              <a:rPr lang="ru-RU" dirty="0" sz="2000">
+                <a:latin typeface="Consolas"/>
+                <a:cs typeface="Consolas"/>
+                <a:ea typeface="Consolas"/>
+                <a:solidFill>
+                  <a:srgbClr val="000000"/>
+                </a:solidFill>
+              </a:rPr>
+              <a:t>Pipeline</a:t>
+            </a:r>
+            <a:r>
+              <a:rPr lang="ru-RU" dirty="0" sz="2000">
+                <a:solidFill>
+                  <a:srgbClr val="000000"/>
+                </a:solidFill>
+              </a:rPr>
+              <a:t xml:space="preserve"> и </a:t>
+            </a:r>
+            <a:r>
+              <a:rPr lang="ru-RU" dirty="0" sz="2000">
+                <a:latin typeface="Consolas"/>
+                <a:cs typeface="Consolas"/>
+                <a:ea typeface="Consolas"/>
+                <a:solidFill>
+                  <a:srgbClr val="000000"/>
+                </a:solidFill>
+              </a:rPr>
+              <a:t>StandardScaler</a:t>
+            </a:r>
+            <a:r>
+              <a:rPr lang="ru-RU" dirty="0" sz="2000">
+                <a:solidFill>
+                  <a:srgbClr val="000000"/>
+                </a:solidFill>
+              </a:rPr>
+              <a:t xml:space="preserve"> — чувствительность к масштабу из-за регуляризации</a:t>
             </a:r>
           </a:p>
           <a:p>
@@ -8142,7 +10239,26 @@
                   <a:srgbClr val="000000"/>
                 </a:solidFill>
               </a:rPr>
-              <a:t>• Смотри на `predict_proba` — вероятности важнее бинарных решений</a:t>
+              <a:t xml:space="preserve">• Смотри на </a:t>
+            </a:r>
+            <a:r>
+              <a:rPr lang="ru-RU" dirty="0" sz="2000">
+                <a:latin typeface="Consolas"/>
+                <a:cs typeface="Consolas"/>
+                <a:ea typeface="Consolas"/>
+                <a:solidFill>
+                  <a:srgbClr val="000000"/>
+                </a:solidFill>
+              </a:rPr>
+              <a:t>predict_proba</a:t>
+            </a:r>
+            <a:r>
+              <a:rPr lang="ru-RU" dirty="0" sz="2000">
+                <a:solidFill>
+                  <a:srgbClr val="000000"/>
+                </a:solidFill>
+              </a:rPr>
+              <a:t xml:space="preserve"> — вероятности важнее бинарных решений</a:t>
             </a:r>
           </a:p>
         </p:txBody>
@@ -8156,7 +10272,7 @@
         <p:spPr>
           <a:xfrm>
             <a:off x="6355080" y="1371600"/>
-            <a:ext cx="5532120" cy="2423160"/>
+            <a:ext cx="5532120" cy="2240280"/>
           </a:xfrm>
           <a:prstGeom prst="rect">
             <a:avLst/>
@@ -8180,7 +10296,18 @@
                   <a:srgbClr val="000000"/>
                 </a:solidFill>
               </a:rPr>
-              <a:t>• При дисбалансе используй PR-кривую, F1-score и `class_weight='balanced'`</a:t>
+              <a:t xml:space="preserve">• При дисбалансе используй PR-кривую, F1-score и </a:t>
+            </a:r>
+            <a:r>
+              <a:rPr lang="ru-RU" dirty="0" sz="2000">
+                <a:latin typeface="Consolas"/>
+                <a:cs typeface="Consolas"/>
+                <a:ea typeface="Consolas"/>
+                <a:solidFill>
+                  <a:srgbClr val="000000"/>
+                </a:solidFill>
+              </a:rPr>
+              <a:t>class_weight='balanced'</a:t>
             </a:r>
           </a:p>
           <a:p>
@@ -8195,7 +10322,26 @@
                   <a:srgbClr val="000000"/>
                 </a:solidFill>
               </a:rPr>
-              <a:t>• Для мультикласса — `multinomial` с Softmax</a:t>
+              <a:t xml:space="preserve">• Для мультикласса — </a:t>
+            </a:r>
+            <a:r>
+              <a:rPr lang="ru-RU" dirty="0" sz="2000">
+                <a:latin typeface="Consolas"/>
+                <a:cs typeface="Consolas"/>
+                <a:ea typeface="Consolas"/>
+                <a:solidFill>
+                  <a:srgbClr val="000000"/>
+                </a:solidFill>
+              </a:rPr>
+              <a:t>multinomial</a:t>
+            </a:r>
+            <a:r>
+              <a:rPr lang="ru-RU" dirty="0" sz="2000">
+                <a:solidFill>
+                  <a:srgbClr val="000000"/>
+                </a:solidFill>
+              </a:rPr>
+              <a:t xml:space="preserve"> с Softmax</a:t>
             </a:r>
           </a:p>
           <a:p>
@@ -8275,7 +10421,7 @@
         <p:spPr>
           <a:xfrm>
             <a:off x="640080" y="1371600"/>
-            <a:ext cx="6263640" cy="3246120"/>
+            <a:ext cx="6263640" cy="3063240"/>
           </a:xfrm>
           <a:prstGeom prst="rect">
             <a:avLst/>
@@ -8397,8 +10543,8 @@
         </p:blipFill>
         <p:spPr>
           <a:xfrm>
-            <a:off x="7269480" y="1325880"/>
-            <a:ext cx="4465015" cy="3123673"/>
+            <a:off x="7269480" y="1371600"/>
+            <a:ext cx="4465015" cy="3000490"/>
           </a:xfrm>
           <a:prstGeom prst="rect">
             <a:avLst/>
@@ -8911,7 +11057,7 @@
         <p:spPr>
           <a:xfrm>
             <a:off x="640080" y="1371600"/>
-            <a:ext cx="6263640" cy="2770631"/>
+            <a:ext cx="6263640" cy="2788920"/>
           </a:xfrm>
           <a:prstGeom prst="rect">
             <a:avLst/>
@@ -9076,8 +11222,8 @@
         </p:nvSpPr>
         <p:spPr>
           <a:xfrm>
-            <a:off x="640080" y="4489703"/>
-            <a:ext cx="6172200" cy="804672"/>
+            <a:off x="640080" y="5693156"/>
+            <a:ext cx="6172200" cy="744220"/>
           </a:xfrm>
           <a:prstGeom prst="rect">
             <a:avLst/>
@@ -9121,37 +11267,154 @@
         </p:nvSpPr>
         <p:spPr>
           <a:xfrm>
-            <a:off x="713231" y="4526279"/>
-            <a:ext cx="6025896" cy="731520"/>
+            <a:off x="713231" y="5738876"/>
+            <a:ext cx="6025896" cy="139700"/>
           </a:xfrm>
           <a:prstGeom prst="rect">
             <a:avLst/>
           </a:prstGeom>
           <a:noFill/>
+          <a:ln>
+            <a:noFill/>
+          </a:ln>
         </p:spPr>
         <p:txBody>
-          <a:bodyPr wrap="none">
+          <a:bodyPr wrap="none" anchor="t" lIns="0" rIns="0" tIns="0" bIns="0">
             <a:noAutofit/>
           </a:bodyPr>
           <a:lstStyle/>
           <a:p>
             <a:pPr>
+              <a:spcBef>
+                <a:spcPts val="0"/>
+              </a:spcBef>
               <a:spcAft>
                 <a:spcPts val="0"/>
               </a:spcAft>
             </a:pPr>
             <a:r>
-              <a:rPr sz="1100">
-                <a:solidFill>
-                  <a:srgbClr val="000000"/>
-                </a:solidFill>
-                <a:latin typeface="Consolas"/>
-              </a:rPr>
-              <a:t>from sklearn.linear_model import LinearRegression</a:t>
-            </a:r>
-          </a:p>
+              <a:rPr sz="1100" b="1">
+                <a:solidFill>
+                  <a:srgbClr val="007020"/>
+                </a:solidFill>
+                <a:latin typeface="Consolas"/>
+              </a:rPr>
+              <a:t>from</a:t>
+            </a:r>
+            <a:r>
+              <a:rPr sz="1100">
+                <a:solidFill>
+                  <a:srgbClr val="BBBBBB"/>
+                </a:solidFill>
+                <a:latin typeface="Consolas"/>
+              </a:rPr>
+              <a:t> </a:t>
+            </a:r>
+            <a:r>
+              <a:rPr sz="1100" b="1">
+                <a:solidFill>
+                  <a:srgbClr val="0E84B5"/>
+                </a:solidFill>
+                <a:latin typeface="Consolas"/>
+              </a:rPr>
+              <a:t>sklearn</a:t>
+            </a:r>
+            <a:r>
+              <a:rPr sz="1100" b="1">
+                <a:solidFill>
+                  <a:srgbClr val="0E84B5"/>
+                </a:solidFill>
+                <a:latin typeface="Consolas"/>
+              </a:rPr>
+              <a:t>.</a:t>
+            </a:r>
+            <a:r>
+              <a:rPr sz="1100" b="1">
+                <a:solidFill>
+                  <a:srgbClr val="0E84B5"/>
+                </a:solidFill>
+                <a:latin typeface="Consolas"/>
+              </a:rPr>
+              <a:t>linear_model</a:t>
+            </a:r>
+            <a:r>
+              <a:rPr sz="1100">
+                <a:solidFill>
+                  <a:srgbClr val="BBBBBB"/>
+                </a:solidFill>
+                <a:latin typeface="Consolas"/>
+              </a:rPr>
+              <a:t> </a:t>
+            </a:r>
+            <a:r>
+              <a:rPr sz="1100" b="1">
+                <a:solidFill>
+                  <a:srgbClr val="007020"/>
+                </a:solidFill>
+                <a:latin typeface="Consolas"/>
+              </a:rPr>
+              <a:t>import</a:t>
+            </a:r>
+            <a:r>
+              <a:rPr sz="1100">
+                <a:solidFill>
+                  <a:srgbClr val="000000"/>
+                </a:solidFill>
+                <a:latin typeface="Consolas"/>
+              </a:rPr>
+              <a:t> </a:t>
+            </a:r>
+            <a:r>
+              <a:rPr sz="1100">
+                <a:solidFill>
+                  <a:srgbClr val="000000"/>
+                </a:solidFill>
+                <a:latin typeface="Consolas"/>
+              </a:rPr>
+              <a:t>LinearRegression</a:t>
+            </a:r>
+            <a:r>
+              <a:rPr sz="1100">
+                <a:solidFill>
+                  <a:srgbClr val="BBBBBB"/>
+                </a:solidFill>
+                <a:latin typeface="Consolas"/>
+              </a:rPr>
+              <a:t>
+</a:t>
+            </a:r>
+          </a:p>
+        </p:txBody>
+      </p:sp>
+      <p:sp>
+        <p:nvSpPr>
+          <p:cNvPr id="6" name="TextBox 5"/>
+          <p:cNvSpPr txBox="1"/>
+          <p:nvPr/>
+        </p:nvSpPr>
+        <p:spPr>
+          <a:xfrm>
+            <a:off x="713231" y="5878576"/>
+            <a:ext cx="6025896" cy="139700"/>
+          </a:xfrm>
+          <a:prstGeom prst="rect">
+            <a:avLst/>
+          </a:prstGeom>
+          <a:noFill/>
+          <a:ln>
+            <a:noFill/>
+          </a:ln>
+        </p:spPr>
+        <p:txBody>
+          <a:bodyPr wrap="none" anchor="t" lIns="0" rIns="0" tIns="0" bIns="0">
+            <a:noAutofit/>
+          </a:bodyPr>
+          <a:lstStyle/>
           <a:p>
             <a:pPr>
+              <a:spcBef>
+                <a:spcPts val="0"/>
+              </a:spcBef>
               <a:spcAft>
                 <a:spcPts val="0"/>
               </a:spcAft>
@@ -9163,11 +11426,176 @@
                 </a:solidFill>
                 <a:latin typeface="Consolas"/>
               </a:rPr>
-              <a:t>lr = LinearRegression().fit(X, y_binary)</a:t>
-            </a:r>
-          </a:p>
+              <a:t>lr</a:t>
+            </a:r>
+            <a:r>
+              <a:rPr sz="1100">
+                <a:solidFill>
+                  <a:srgbClr val="000000"/>
+                </a:solidFill>
+                <a:latin typeface="Consolas"/>
+              </a:rPr>
+              <a:t> </a:t>
+            </a:r>
+            <a:r>
+              <a:rPr sz="1100">
+                <a:solidFill>
+                  <a:srgbClr val="666666"/>
+                </a:solidFill>
+                <a:latin typeface="Consolas"/>
+              </a:rPr>
+              <a:t>=</a:t>
+            </a:r>
+            <a:r>
+              <a:rPr sz="1100">
+                <a:solidFill>
+                  <a:srgbClr val="000000"/>
+                </a:solidFill>
+                <a:latin typeface="Consolas"/>
+              </a:rPr>
+              <a:t> </a:t>
+            </a:r>
+            <a:r>
+              <a:rPr sz="1100">
+                <a:solidFill>
+                  <a:srgbClr val="000000"/>
+                </a:solidFill>
+                <a:latin typeface="Consolas"/>
+              </a:rPr>
+              <a:t>LinearRegression</a:t>
+            </a:r>
+            <a:r>
+              <a:rPr sz="1100">
+                <a:solidFill>
+                  <a:srgbClr val="000000"/>
+                </a:solidFill>
+                <a:latin typeface="Consolas"/>
+              </a:rPr>
+              <a:t>(</a:t>
+            </a:r>
+            <a:r>
+              <a:rPr sz="1100">
+                <a:solidFill>
+                  <a:srgbClr val="000000"/>
+                </a:solidFill>
+                <a:latin typeface="Consolas"/>
+              </a:rPr>
+              <a:t>)</a:t>
+            </a:r>
+            <a:r>
+              <a:rPr sz="1100">
+                <a:solidFill>
+                  <a:srgbClr val="666666"/>
+                </a:solidFill>
+                <a:latin typeface="Consolas"/>
+              </a:rPr>
+              <a:t>.</a:t>
+            </a:r>
+            <a:r>
+              <a:rPr sz="1100">
+                <a:solidFill>
+                  <a:srgbClr val="000000"/>
+                </a:solidFill>
+                <a:latin typeface="Consolas"/>
+              </a:rPr>
+              <a:t>fit</a:t>
+            </a:r>
+            <a:r>
+              <a:rPr sz="1100">
+                <a:solidFill>
+                  <a:srgbClr val="000000"/>
+                </a:solidFill>
+                <a:latin typeface="Consolas"/>
+              </a:rPr>
+              <a:t>(</a:t>
+            </a:r>
+            <a:r>
+              <a:rPr sz="1100">
+                <a:solidFill>
+                  <a:srgbClr val="000000"/>
+                </a:solidFill>
+                <a:latin typeface="Consolas"/>
+              </a:rPr>
+              <a:t>X</a:t>
+            </a:r>
+            <a:r>
+              <a:rPr sz="1100">
+                <a:solidFill>
+                  <a:srgbClr val="000000"/>
+                </a:solidFill>
+                <a:latin typeface="Consolas"/>
+              </a:rPr>
+              <a:t>,</a:t>
+            </a:r>
+            <a:r>
+              <a:rPr sz="1100">
+                <a:solidFill>
+                  <a:srgbClr val="000000"/>
+                </a:solidFill>
+                <a:latin typeface="Consolas"/>
+              </a:rPr>
+              <a:t> </a:t>
+            </a:r>
+            <a:r>
+              <a:rPr sz="1100">
+                <a:solidFill>
+                  <a:srgbClr val="000000"/>
+                </a:solidFill>
+                <a:latin typeface="Consolas"/>
+              </a:rPr>
+              <a:t>y_binary</a:t>
+            </a:r>
+            <a:r>
+              <a:rPr sz="1100">
+                <a:solidFill>
+                  <a:srgbClr val="000000"/>
+                </a:solidFill>
+                <a:latin typeface="Consolas"/>
+              </a:rPr>
+              <a:t>)</a:t>
+            </a:r>
+            <a:r>
+              <a:rPr sz="1100">
+                <a:solidFill>
+                  <a:srgbClr val="BBBBBB"/>
+                </a:solidFill>
+                <a:latin typeface="Consolas"/>
+              </a:rPr>
+              <a:t>
+</a:t>
+            </a:r>
+          </a:p>
+        </p:txBody>
+      </p:sp>
+      <p:sp>
+        <p:nvSpPr>
+          <p:cNvPr id="7" name="TextBox 6"/>
+          <p:cNvSpPr txBox="1"/>
+          <p:nvPr/>
+        </p:nvSpPr>
+        <p:spPr>
+          <a:xfrm>
+            <a:off x="713231" y="6018275"/>
+            <a:ext cx="6025896" cy="139700"/>
+          </a:xfrm>
+          <a:prstGeom prst="rect">
+            <a:avLst/>
+          </a:prstGeom>
+          <a:noFill/>
+          <a:ln>
+            <a:noFill/>
+          </a:ln>
+        </p:spPr>
+        <p:txBody>
+          <a:bodyPr wrap="none" anchor="t" lIns="0" rIns="0" tIns="0" bIns="0">
+            <a:noAutofit/>
+          </a:bodyPr>
+          <a:lstStyle/>
           <a:p>
             <a:pPr>
+              <a:spcBef>
+                <a:spcPts val="0"/>
+              </a:spcBef>
               <a:spcAft>
                 <a:spcPts val="0"/>
               </a:spcAft>
@@ -9179,11 +11607,131 @@
                 </a:solidFill>
                 <a:latin typeface="Consolas"/>
               </a:rPr>
-              <a:t>pred = lr.predict(X_new)</a:t>
-            </a:r>
-          </a:p>
+              <a:t>pred</a:t>
+            </a:r>
+            <a:r>
+              <a:rPr sz="1100">
+                <a:solidFill>
+                  <a:srgbClr val="000000"/>
+                </a:solidFill>
+                <a:latin typeface="Consolas"/>
+              </a:rPr>
+              <a:t> </a:t>
+            </a:r>
+            <a:r>
+              <a:rPr sz="1100">
+                <a:solidFill>
+                  <a:srgbClr val="666666"/>
+                </a:solidFill>
+                <a:latin typeface="Consolas"/>
+              </a:rPr>
+              <a:t>=</a:t>
+            </a:r>
+            <a:r>
+              <a:rPr sz="1100">
+                <a:solidFill>
+                  <a:srgbClr val="000000"/>
+                </a:solidFill>
+                <a:latin typeface="Consolas"/>
+              </a:rPr>
+              <a:t> </a:t>
+            </a:r>
+            <a:r>
+              <a:rPr sz="1100">
+                <a:solidFill>
+                  <a:srgbClr val="000000"/>
+                </a:solidFill>
+                <a:latin typeface="Consolas"/>
+              </a:rPr>
+              <a:t>lr</a:t>
+            </a:r>
+            <a:r>
+              <a:rPr sz="1100">
+                <a:solidFill>
+                  <a:srgbClr val="666666"/>
+                </a:solidFill>
+                <a:latin typeface="Consolas"/>
+              </a:rPr>
+              <a:t>.</a:t>
+            </a:r>
+            <a:r>
+              <a:rPr sz="1100">
+                <a:solidFill>
+                  <a:srgbClr val="000000"/>
+                </a:solidFill>
+                <a:latin typeface="Consolas"/>
+              </a:rPr>
+              <a:t>predict</a:t>
+            </a:r>
+            <a:r>
+              <a:rPr sz="1100">
+                <a:solidFill>
+                  <a:srgbClr val="000000"/>
+                </a:solidFill>
+                <a:latin typeface="Consolas"/>
+              </a:rPr>
+              <a:t>(</a:t>
+            </a:r>
+            <a:r>
+              <a:rPr sz="1100">
+                <a:solidFill>
+                  <a:srgbClr val="000000"/>
+                </a:solidFill>
+                <a:latin typeface="Consolas"/>
+              </a:rPr>
+              <a:t>X_new</a:t>
+            </a:r>
+            <a:r>
+              <a:rPr sz="1100">
+                <a:solidFill>
+                  <a:srgbClr val="000000"/>
+                </a:solidFill>
+                <a:latin typeface="Consolas"/>
+              </a:rPr>
+              <a:t>)</a:t>
+            </a:r>
+            <a:r>
+              <a:rPr sz="1100">
+                <a:solidFill>
+                  <a:srgbClr val="BBBBBB"/>
+                </a:solidFill>
+                <a:latin typeface="Consolas"/>
+              </a:rPr>
+              <a:t>
+</a:t>
+            </a:r>
+          </a:p>
+        </p:txBody>
+      </p:sp>
+      <p:sp>
+        <p:nvSpPr>
+          <p:cNvPr id="8" name="TextBox 7"/>
+          <p:cNvSpPr txBox="1"/>
+          <p:nvPr/>
+        </p:nvSpPr>
+        <p:spPr>
+          <a:xfrm>
+            <a:off x="713231" y="6157975"/>
+            <a:ext cx="6025896" cy="139700"/>
+          </a:xfrm>
+          <a:prstGeom prst="rect">
+            <a:avLst/>
+          </a:prstGeom>
+          <a:noFill/>
+          <a:ln>
+            <a:noFill/>
+          </a:ln>
+        </p:spPr>
+        <p:txBody>
+          <a:bodyPr wrap="none" anchor="t" lIns="0" rIns="0" tIns="0" bIns="0">
+            <a:noAutofit/>
+          </a:bodyPr>
+          <a:lstStyle/>
           <a:p>
             <a:pPr>
+              <a:spcBef>
+                <a:spcPts val="0"/>
+              </a:spcBef>
               <a:spcAft>
                 <a:spcPts val="0"/>
               </a:spcAft>
@@ -9191,24 +11739,178 @@
             <a:r>
               <a:rPr sz="1100">
                 <a:solidFill>
-                  <a:srgbClr val="000000"/>
-                </a:solidFill>
-                <a:latin typeface="Consolas"/>
-              </a:rPr>
-              <a:t>print(pred.min(), pred.max())  # часто вне [0, 1]</a:t>
-            </a:r>
-          </a:p>
-        </p:txBody>
-      </p:sp>
-      <p:sp>
-        <p:nvSpPr>
-          <p:cNvPr id="6" name="TextBox 5"/>
+                  <a:srgbClr val="007020"/>
+                </a:solidFill>
+                <a:latin typeface="Consolas"/>
+              </a:rPr>
+              <a:t>print</a:t>
+            </a:r>
+            <a:r>
+              <a:rPr sz="1100">
+                <a:solidFill>
+                  <a:srgbClr val="000000"/>
+                </a:solidFill>
+                <a:latin typeface="Consolas"/>
+              </a:rPr>
+              <a:t>(</a:t>
+            </a:r>
+            <a:r>
+              <a:rPr sz="1100">
+                <a:solidFill>
+                  <a:srgbClr val="000000"/>
+                </a:solidFill>
+                <a:latin typeface="Consolas"/>
+              </a:rPr>
+              <a:t>pred</a:t>
+            </a:r>
+            <a:r>
+              <a:rPr sz="1100">
+                <a:solidFill>
+                  <a:srgbClr val="666666"/>
+                </a:solidFill>
+                <a:latin typeface="Consolas"/>
+              </a:rPr>
+              <a:t>.</a:t>
+            </a:r>
+            <a:r>
+              <a:rPr sz="1100">
+                <a:solidFill>
+                  <a:srgbClr val="000000"/>
+                </a:solidFill>
+                <a:latin typeface="Consolas"/>
+              </a:rPr>
+              <a:t>min</a:t>
+            </a:r>
+            <a:r>
+              <a:rPr sz="1100">
+                <a:solidFill>
+                  <a:srgbClr val="000000"/>
+                </a:solidFill>
+                <a:latin typeface="Consolas"/>
+              </a:rPr>
+              <a:t>(</a:t>
+            </a:r>
+            <a:r>
+              <a:rPr sz="1100">
+                <a:solidFill>
+                  <a:srgbClr val="000000"/>
+                </a:solidFill>
+                <a:latin typeface="Consolas"/>
+              </a:rPr>
+              <a:t>)</a:t>
+            </a:r>
+            <a:r>
+              <a:rPr sz="1100">
+                <a:solidFill>
+                  <a:srgbClr val="000000"/>
+                </a:solidFill>
+                <a:latin typeface="Consolas"/>
+              </a:rPr>
+              <a:t>,</a:t>
+            </a:r>
+            <a:r>
+              <a:rPr sz="1100">
+                <a:solidFill>
+                  <a:srgbClr val="000000"/>
+                </a:solidFill>
+                <a:latin typeface="Consolas"/>
+              </a:rPr>
+              <a:t> </a:t>
+            </a:r>
+            <a:r>
+              <a:rPr sz="1100">
+                <a:solidFill>
+                  <a:srgbClr val="000000"/>
+                </a:solidFill>
+                <a:latin typeface="Consolas"/>
+              </a:rPr>
+              <a:t>pred</a:t>
+            </a:r>
+            <a:r>
+              <a:rPr sz="1100">
+                <a:solidFill>
+                  <a:srgbClr val="666666"/>
+                </a:solidFill>
+                <a:latin typeface="Consolas"/>
+              </a:rPr>
+              <a:t>.</a:t>
+            </a:r>
+            <a:r>
+              <a:rPr sz="1100">
+                <a:solidFill>
+                  <a:srgbClr val="000000"/>
+                </a:solidFill>
+                <a:latin typeface="Consolas"/>
+              </a:rPr>
+              <a:t>max</a:t>
+            </a:r>
+            <a:r>
+              <a:rPr sz="1100">
+                <a:solidFill>
+                  <a:srgbClr val="000000"/>
+                </a:solidFill>
+                <a:latin typeface="Consolas"/>
+              </a:rPr>
+              <a:t>(</a:t>
+            </a:r>
+            <a:r>
+              <a:rPr sz="1100">
+                <a:solidFill>
+                  <a:srgbClr val="000000"/>
+                </a:solidFill>
+                <a:latin typeface="Consolas"/>
+              </a:rPr>
+              <a:t>)</a:t>
+            </a:r>
+            <a:r>
+              <a:rPr sz="1100">
+                <a:solidFill>
+                  <a:srgbClr val="000000"/>
+                </a:solidFill>
+                <a:latin typeface="Consolas"/>
+              </a:rPr>
+              <a:t>)</a:t>
+            </a:r>
+            <a:r>
+              <a:rPr sz="1100">
+                <a:solidFill>
+                  <a:srgbClr val="000000"/>
+                </a:solidFill>
+                <a:latin typeface="Consolas"/>
+              </a:rPr>
+              <a:t>  </a:t>
+            </a:r>
+            <a:r>
+              <a:rPr sz="1100" i="1">
+                <a:solidFill>
+                  <a:srgbClr val="60A0B0"/>
+                </a:solidFill>
+                <a:latin typeface="Consolas"/>
+              </a:rPr>
+              <a:t># часто вне [0, 1]</a:t>
+            </a:r>
+            <a:r>
+              <a:rPr sz="1100">
+                <a:solidFill>
+                  <a:srgbClr val="BBBBBB"/>
+                </a:solidFill>
+                <a:latin typeface="Consolas"/>
+              </a:rPr>
+              <a:t>
+</a:t>
+            </a:r>
+          </a:p>
+        </p:txBody>
+      </p:sp>
+      <p:sp>
+        <p:nvSpPr>
+          <p:cNvPr id="9" name="TextBox 8"/>
           <p:cNvSpPr txBox="1"/>
           <p:nvPr/>
         </p:nvSpPr>
         <p:spPr>
           <a:xfrm>
-            <a:off x="640080" y="5349240"/>
+            <a:off x="640080" y="6492240"/>
             <a:ext cx="6172200" cy="201168"/>
           </a:xfrm>
           <a:prstGeom prst="rect">
@@ -9237,7 +11939,7 @@
       </p:sp>
       <p:pic>
         <p:nvPicPr>
-          <p:cNvPr id="7" name="Picture 6" descr="linear_reg_on_classification.png"/>
+          <p:cNvPr id="10" name="Picture 9" descr="linear_reg_on_classification.png"/>
           <p:cNvPicPr>
             <a:picLocks noChangeAspect="1"/>
           </p:cNvPicPr>
@@ -9251,8 +11953,8 @@
         </p:blipFill>
         <p:spPr>
           <a:xfrm>
-            <a:off x="7269480" y="1325880"/>
-            <a:ext cx="4465015" cy="3835542"/>
+            <a:off x="7269480" y="1371600"/>
+            <a:ext cx="4465015" cy="4059105"/>
           </a:xfrm>
           <a:prstGeom prst="rect">
             <a:avLst/>
@@ -9319,7 +12021,7 @@
         <p:spPr>
           <a:xfrm>
             <a:off x="640080" y="1371600"/>
-            <a:ext cx="6263640" cy="2697480"/>
+            <a:ext cx="6263640" cy="2514600"/>
           </a:xfrm>
           <a:prstGeom prst="rect">
             <a:avLst/>
@@ -9608,8 +12310,8 @@
         </p:nvSpPr>
         <p:spPr>
           <a:xfrm>
-            <a:off x="640080" y="4489703"/>
-            <a:ext cx="6172200" cy="804672"/>
+            <a:off x="640080" y="5693156"/>
+            <a:ext cx="6172200" cy="744220"/>
           </a:xfrm>
           <a:prstGeom prst="rect">
             <a:avLst/>
@@ -9653,37 +12355,136 @@
         </p:nvSpPr>
         <p:spPr>
           <a:xfrm>
-            <a:off x="713231" y="4526279"/>
-            <a:ext cx="6025896" cy="731520"/>
+            <a:off x="713231" y="5738876"/>
+            <a:ext cx="6025896" cy="139700"/>
           </a:xfrm>
           <a:prstGeom prst="rect">
             <a:avLst/>
           </a:prstGeom>
           <a:noFill/>
+          <a:ln>
+            <a:noFill/>
+          </a:ln>
         </p:spPr>
         <p:txBody>
-          <a:bodyPr wrap="none">
+          <a:bodyPr wrap="none" anchor="t" lIns="0" rIns="0" tIns="0" bIns="0">
             <a:noAutofit/>
           </a:bodyPr>
           <a:lstStyle/>
           <a:p>
             <a:pPr>
+              <a:spcBef>
+                <a:spcPts val="0"/>
+              </a:spcBef>
               <a:spcAft>
                 <a:spcPts val="0"/>
               </a:spcAft>
             </a:pPr>
             <a:r>
-              <a:rPr sz="1100">
-                <a:solidFill>
-                  <a:srgbClr val="000000"/>
-                </a:solidFill>
-                <a:latin typeface="Consolas"/>
-              </a:rPr>
-              <a:t>def sigmoid(z):</a:t>
-            </a:r>
-          </a:p>
+              <a:rPr sz="1100" b="1">
+                <a:solidFill>
+                  <a:srgbClr val="007020"/>
+                </a:solidFill>
+                <a:latin typeface="Consolas"/>
+              </a:rPr>
+              <a:t>def</a:t>
+            </a:r>
+            <a:r>
+              <a:rPr sz="1100">
+                <a:solidFill>
+                  <a:srgbClr val="BBBBBB"/>
+                </a:solidFill>
+                <a:latin typeface="Consolas"/>
+              </a:rPr>
+              <a:t> </a:t>
+            </a:r>
+            <a:r>
+              <a:rPr sz="1100">
+                <a:solidFill>
+                  <a:srgbClr val="06287E"/>
+                </a:solidFill>
+                <a:latin typeface="Consolas"/>
+              </a:rPr>
+              <a:t>sigmoid</a:t>
+            </a:r>
+            <a:r>
+              <a:rPr sz="1100">
+                <a:solidFill>
+                  <a:srgbClr val="000000"/>
+                </a:solidFill>
+                <a:latin typeface="Consolas"/>
+              </a:rPr>
+              <a:t>(</a:t>
+            </a:r>
+            <a:r>
+              <a:rPr sz="1100">
+                <a:solidFill>
+                  <a:srgbClr val="000000"/>
+                </a:solidFill>
+                <a:latin typeface="Consolas"/>
+              </a:rPr>
+              <a:t>z</a:t>
+            </a:r>
+            <a:r>
+              <a:rPr sz="1100">
+                <a:solidFill>
+                  <a:srgbClr val="000000"/>
+                </a:solidFill>
+                <a:latin typeface="Consolas"/>
+              </a:rPr>
+              <a:t>)</a:t>
+            </a:r>
+            <a:r>
+              <a:rPr sz="1100">
+                <a:solidFill>
+                  <a:srgbClr val="000000"/>
+                </a:solidFill>
+                <a:latin typeface="Consolas"/>
+              </a:rPr>
+              <a:t>:</a:t>
+            </a:r>
+            <a:r>
+              <a:rPr sz="1100">
+                <a:solidFill>
+                  <a:srgbClr val="BBBBBB"/>
+                </a:solidFill>
+                <a:latin typeface="Consolas"/>
+              </a:rPr>
+              <a:t>
+</a:t>
+            </a:r>
+          </a:p>
+        </p:txBody>
+      </p:sp>
+      <p:sp>
+        <p:nvSpPr>
+          <p:cNvPr id="6" name="TextBox 5"/>
+          <p:cNvSpPr txBox="1"/>
+          <p:nvPr/>
+        </p:nvSpPr>
+        <p:spPr>
+          <a:xfrm>
+            <a:off x="713231" y="5878576"/>
+            <a:ext cx="6025896" cy="139700"/>
+          </a:xfrm>
+          <a:prstGeom prst="rect">
+            <a:avLst/>
+          </a:prstGeom>
+          <a:noFill/>
+          <a:ln>
+            <a:noFill/>
+          </a:ln>
+        </p:spPr>
+        <p:txBody>
+          <a:bodyPr wrap="none" anchor="t" lIns="0" rIns="0" tIns="0" bIns="0">
+            <a:noAutofit/>
+          </a:bodyPr>
+          <a:lstStyle/>
           <a:p>
             <a:pPr>
+              <a:spcBef>
+                <a:spcPts val="0"/>
+              </a:spcBef>
               <a:spcAft>
                 <a:spcPts val="0"/>
               </a:spcAft>
@@ -9695,11 +12496,221 @@
                 </a:solidFill>
                 <a:latin typeface="Consolas"/>
               </a:rPr>
-              <a:t>    return 1 / (1 + np.exp(-z))</a:t>
-            </a:r>
-          </a:p>
+              <a:t>    </a:t>
+            </a:r>
+            <a:r>
+              <a:rPr sz="1100" b="1">
+                <a:solidFill>
+                  <a:srgbClr val="007020"/>
+                </a:solidFill>
+                <a:latin typeface="Consolas"/>
+              </a:rPr>
+              <a:t>return</a:t>
+            </a:r>
+            <a:r>
+              <a:rPr sz="1100">
+                <a:solidFill>
+                  <a:srgbClr val="000000"/>
+                </a:solidFill>
+                <a:latin typeface="Consolas"/>
+              </a:rPr>
+              <a:t> </a:t>
+            </a:r>
+            <a:r>
+              <a:rPr sz="1100">
+                <a:solidFill>
+                  <a:srgbClr val="40A070"/>
+                </a:solidFill>
+                <a:latin typeface="Consolas"/>
+              </a:rPr>
+              <a:t>1</a:t>
+            </a:r>
+            <a:r>
+              <a:rPr sz="1100">
+                <a:solidFill>
+                  <a:srgbClr val="000000"/>
+                </a:solidFill>
+                <a:latin typeface="Consolas"/>
+              </a:rPr>
+              <a:t> </a:t>
+            </a:r>
+            <a:r>
+              <a:rPr sz="1100">
+                <a:solidFill>
+                  <a:srgbClr val="666666"/>
+                </a:solidFill>
+                <a:latin typeface="Consolas"/>
+              </a:rPr>
+              <a:t>/</a:t>
+            </a:r>
+            <a:r>
+              <a:rPr sz="1100">
+                <a:solidFill>
+                  <a:srgbClr val="000000"/>
+                </a:solidFill>
+                <a:latin typeface="Consolas"/>
+              </a:rPr>
+              <a:t> </a:t>
+            </a:r>
+            <a:r>
+              <a:rPr sz="1100">
+                <a:solidFill>
+                  <a:srgbClr val="000000"/>
+                </a:solidFill>
+                <a:latin typeface="Consolas"/>
+              </a:rPr>
+              <a:t>(</a:t>
+            </a:r>
+            <a:r>
+              <a:rPr sz="1100">
+                <a:solidFill>
+                  <a:srgbClr val="40A070"/>
+                </a:solidFill>
+                <a:latin typeface="Consolas"/>
+              </a:rPr>
+              <a:t>1</a:t>
+            </a:r>
+            <a:r>
+              <a:rPr sz="1100">
+                <a:solidFill>
+                  <a:srgbClr val="000000"/>
+                </a:solidFill>
+                <a:latin typeface="Consolas"/>
+              </a:rPr>
+              <a:t> </a:t>
+            </a:r>
+            <a:r>
+              <a:rPr sz="1100">
+                <a:solidFill>
+                  <a:srgbClr val="666666"/>
+                </a:solidFill>
+                <a:latin typeface="Consolas"/>
+              </a:rPr>
+              <a:t>+</a:t>
+            </a:r>
+            <a:r>
+              <a:rPr sz="1100">
+                <a:solidFill>
+                  <a:srgbClr val="000000"/>
+                </a:solidFill>
+                <a:latin typeface="Consolas"/>
+              </a:rPr>
+              <a:t> </a:t>
+            </a:r>
+            <a:r>
+              <a:rPr sz="1100">
+                <a:solidFill>
+                  <a:srgbClr val="000000"/>
+                </a:solidFill>
+                <a:latin typeface="Consolas"/>
+              </a:rPr>
+              <a:t>np</a:t>
+            </a:r>
+            <a:r>
+              <a:rPr sz="1100">
+                <a:solidFill>
+                  <a:srgbClr val="666666"/>
+                </a:solidFill>
+                <a:latin typeface="Consolas"/>
+              </a:rPr>
+              <a:t>.</a:t>
+            </a:r>
+            <a:r>
+              <a:rPr sz="1100">
+                <a:solidFill>
+                  <a:srgbClr val="000000"/>
+                </a:solidFill>
+                <a:latin typeface="Consolas"/>
+              </a:rPr>
+              <a:t>exp</a:t>
+            </a:r>
+            <a:r>
+              <a:rPr sz="1100">
+                <a:solidFill>
+                  <a:srgbClr val="000000"/>
+                </a:solidFill>
+                <a:latin typeface="Consolas"/>
+              </a:rPr>
+              <a:t>(</a:t>
+            </a:r>
+            <a:r>
+              <a:rPr sz="1100">
+                <a:solidFill>
+                  <a:srgbClr val="666666"/>
+                </a:solidFill>
+                <a:latin typeface="Consolas"/>
+              </a:rPr>
+              <a:t>-</a:t>
+            </a:r>
+            <a:r>
+              <a:rPr sz="1100">
+                <a:solidFill>
+                  <a:srgbClr val="000000"/>
+                </a:solidFill>
+                <a:latin typeface="Consolas"/>
+              </a:rPr>
+              <a:t>z</a:t>
+            </a:r>
+            <a:r>
+              <a:rPr sz="1100">
+                <a:solidFill>
+                  <a:srgbClr val="000000"/>
+                </a:solidFill>
+                <a:latin typeface="Consolas"/>
+              </a:rPr>
+              <a:t>)</a:t>
+            </a:r>
+            <a:r>
+              <a:rPr sz="1100">
+                <a:solidFill>
+                  <a:srgbClr val="000000"/>
+                </a:solidFill>
+                <a:latin typeface="Consolas"/>
+              </a:rPr>
+              <a:t>)</a:t>
+            </a:r>
+            <a:r>
+              <a:rPr sz="1100">
+                <a:solidFill>
+                  <a:srgbClr val="BBBBBB"/>
+                </a:solidFill>
+                <a:latin typeface="Consolas"/>
+              </a:rPr>
+              <a:t>
+</a:t>
+            </a:r>
+          </a:p>
+        </p:txBody>
+      </p:sp>
+      <p:sp>
+        <p:nvSpPr>
+          <p:cNvPr id="7" name="TextBox 6"/>
+          <p:cNvSpPr txBox="1"/>
+          <p:nvPr/>
+        </p:nvSpPr>
+        <p:spPr>
+          <a:xfrm>
+            <a:off x="713231" y="6018275"/>
+            <a:ext cx="6025896" cy="139700"/>
+          </a:xfrm>
+          <a:prstGeom prst="rect">
+            <a:avLst/>
+          </a:prstGeom>
+          <a:noFill/>
+          <a:ln>
+            <a:noFill/>
+          </a:ln>
+        </p:spPr>
+        <p:txBody>
+          <a:bodyPr wrap="none" anchor="t" lIns="0" rIns="0" tIns="0" bIns="0">
+            <a:noAutofit/>
+          </a:bodyPr>
+          <a:lstStyle/>
           <a:p>
             <a:pPr>
+              <a:spcBef>
+                <a:spcPts val="0"/>
+              </a:spcBef>
               <a:spcAft>
                 <a:spcPts val="0"/>
               </a:spcAft>
@@ -9711,11 +12722,194 @@
                 </a:solidFill>
                 <a:latin typeface="Consolas"/>
               </a:rPr>
-              <a:t>z = np.linspace(-6, 6, 100)</a:t>
-            </a:r>
-          </a:p>
+              <a:t>z</a:t>
+            </a:r>
+            <a:r>
+              <a:rPr sz="1100">
+                <a:solidFill>
+                  <a:srgbClr val="000000"/>
+                </a:solidFill>
+                <a:latin typeface="Consolas"/>
+              </a:rPr>
+              <a:t> </a:t>
+            </a:r>
+            <a:r>
+              <a:rPr sz="1100">
+                <a:solidFill>
+                  <a:srgbClr val="666666"/>
+                </a:solidFill>
+                <a:latin typeface="Consolas"/>
+              </a:rPr>
+              <a:t>=</a:t>
+            </a:r>
+            <a:r>
+              <a:rPr sz="1100">
+                <a:solidFill>
+                  <a:srgbClr val="000000"/>
+                </a:solidFill>
+                <a:latin typeface="Consolas"/>
+              </a:rPr>
+              <a:t> </a:t>
+            </a:r>
+            <a:r>
+              <a:rPr sz="1100">
+                <a:solidFill>
+                  <a:srgbClr val="000000"/>
+                </a:solidFill>
+                <a:latin typeface="Consolas"/>
+              </a:rPr>
+              <a:t>np</a:t>
+            </a:r>
+            <a:r>
+              <a:rPr sz="1100">
+                <a:solidFill>
+                  <a:srgbClr val="666666"/>
+                </a:solidFill>
+                <a:latin typeface="Consolas"/>
+              </a:rPr>
+              <a:t>.</a:t>
+            </a:r>
+            <a:r>
+              <a:rPr sz="1100">
+                <a:solidFill>
+                  <a:srgbClr val="000000"/>
+                </a:solidFill>
+                <a:latin typeface="Consolas"/>
+              </a:rPr>
+              <a:t>linspace</a:t>
+            </a:r>
+            <a:r>
+              <a:rPr sz="1100">
+                <a:solidFill>
+                  <a:srgbClr val="000000"/>
+                </a:solidFill>
+                <a:latin typeface="Consolas"/>
+              </a:rPr>
+              <a:t>(</a:t>
+            </a:r>
+            <a:r>
+              <a:rPr sz="1100">
+                <a:solidFill>
+                  <a:srgbClr val="666666"/>
+                </a:solidFill>
+                <a:latin typeface="Consolas"/>
+              </a:rPr>
+              <a:t>-</a:t>
+            </a:r>
+            <a:r>
+              <a:rPr sz="1100">
+                <a:solidFill>
+                  <a:srgbClr val="40A070"/>
+                </a:solidFill>
+                <a:latin typeface="Consolas"/>
+              </a:rPr>
+              <a:t>6</a:t>
+            </a:r>
+            <a:r>
+              <a:rPr sz="1100">
+                <a:solidFill>
+                  <a:srgbClr val="000000"/>
+                </a:solidFill>
+                <a:latin typeface="Consolas"/>
+              </a:rPr>
+              <a:t>,</a:t>
+            </a:r>
+            <a:r>
+              <a:rPr sz="1100">
+                <a:solidFill>
+                  <a:srgbClr val="000000"/>
+                </a:solidFill>
+                <a:latin typeface="Consolas"/>
+              </a:rPr>
+              <a:t> </a:t>
+            </a:r>
+            <a:r>
+              <a:rPr sz="1100">
+                <a:solidFill>
+                  <a:srgbClr val="40A070"/>
+                </a:solidFill>
+                <a:latin typeface="Consolas"/>
+              </a:rPr>
+              <a:t>6</a:t>
+            </a:r>
+            <a:r>
+              <a:rPr sz="1100">
+                <a:solidFill>
+                  <a:srgbClr val="000000"/>
+                </a:solidFill>
+                <a:latin typeface="Consolas"/>
+              </a:rPr>
+              <a:t>,</a:t>
+            </a:r>
+            <a:r>
+              <a:rPr sz="1100">
+                <a:solidFill>
+                  <a:srgbClr val="000000"/>
+                </a:solidFill>
+                <a:latin typeface="Consolas"/>
+              </a:rPr>
+              <a:t> </a:t>
+            </a:r>
+            <a:r>
+              <a:rPr sz="1100">
+                <a:solidFill>
+                  <a:srgbClr val="40A070"/>
+                </a:solidFill>
+                <a:latin typeface="Consolas"/>
+              </a:rPr>
+              <a:t>100</a:t>
+            </a:r>
+            <a:r>
+              <a:rPr sz="1100">
+                <a:solidFill>
+                  <a:srgbClr val="000000"/>
+                </a:solidFill>
+                <a:latin typeface="Consolas"/>
+              </a:rPr>
+              <a:t>)</a:t>
+            </a:r>
+            <a:r>
+              <a:rPr sz="1100">
+                <a:solidFill>
+                  <a:srgbClr val="BBBBBB"/>
+                </a:solidFill>
+                <a:latin typeface="Consolas"/>
+              </a:rPr>
+              <a:t>
+</a:t>
+            </a:r>
+          </a:p>
+        </p:txBody>
+      </p:sp>
+      <p:sp>
+        <p:nvSpPr>
+          <p:cNvPr id="8" name="TextBox 7"/>
+          <p:cNvSpPr txBox="1"/>
+          <p:nvPr/>
+        </p:nvSpPr>
+        <p:spPr>
+          <a:xfrm>
+            <a:off x="713231" y="6157975"/>
+            <a:ext cx="6025896" cy="139700"/>
+          </a:xfrm>
+          <a:prstGeom prst="rect">
+            <a:avLst/>
+          </a:prstGeom>
+          <a:noFill/>
+          <a:ln>
+            <a:noFill/>
+          </a:ln>
+        </p:spPr>
+        <p:txBody>
+          <a:bodyPr wrap="none" anchor="t" lIns="0" rIns="0" tIns="0" bIns="0">
+            <a:noAutofit/>
+          </a:bodyPr>
+          <a:lstStyle/>
           <a:p>
             <a:pPr>
+              <a:spcBef>
+                <a:spcPts val="0"/>
+              </a:spcBef>
               <a:spcAft>
                 <a:spcPts val="0"/>
               </a:spcAft>
@@ -9727,20 +12921,111 @@
                 </a:solidFill>
                 <a:latin typeface="Consolas"/>
               </a:rPr>
-              <a:t>p = sigmoid(z)  # всегда в (0, 1)</a:t>
-            </a:r>
-          </a:p>
-        </p:txBody>
-      </p:sp>
-      <p:sp>
-        <p:nvSpPr>
-          <p:cNvPr id="6" name="TextBox 5"/>
+              <a:t>p</a:t>
+            </a:r>
+            <a:r>
+              <a:rPr sz="1100">
+                <a:solidFill>
+                  <a:srgbClr val="000000"/>
+                </a:solidFill>
+                <a:latin typeface="Consolas"/>
+              </a:rPr>
+              <a:t> </a:t>
+            </a:r>
+            <a:r>
+              <a:rPr sz="1100">
+                <a:solidFill>
+                  <a:srgbClr val="666666"/>
+                </a:solidFill>
+                <a:latin typeface="Consolas"/>
+              </a:rPr>
+              <a:t>=</a:t>
+            </a:r>
+            <a:r>
+              <a:rPr sz="1100">
+                <a:solidFill>
+                  <a:srgbClr val="000000"/>
+                </a:solidFill>
+                <a:latin typeface="Consolas"/>
+              </a:rPr>
+              <a:t> </a:t>
+            </a:r>
+            <a:r>
+              <a:rPr sz="1100">
+                <a:solidFill>
+                  <a:srgbClr val="000000"/>
+                </a:solidFill>
+                <a:latin typeface="Consolas"/>
+              </a:rPr>
+              <a:t>sigmoid</a:t>
+            </a:r>
+            <a:r>
+              <a:rPr sz="1100">
+                <a:solidFill>
+                  <a:srgbClr val="000000"/>
+                </a:solidFill>
+                <a:latin typeface="Consolas"/>
+              </a:rPr>
+              <a:t>(</a:t>
+            </a:r>
+            <a:r>
+              <a:rPr sz="1100">
+                <a:solidFill>
+                  <a:srgbClr val="000000"/>
+                </a:solidFill>
+                <a:latin typeface="Consolas"/>
+              </a:rPr>
+              <a:t>z</a:t>
+            </a:r>
+            <a:r>
+              <a:rPr sz="1100">
+                <a:solidFill>
+                  <a:srgbClr val="000000"/>
+                </a:solidFill>
+                <a:latin typeface="Consolas"/>
+              </a:rPr>
+              <a:t>)</a:t>
+            </a:r>
+            <a:r>
+              <a:rPr sz="1100">
+                <a:solidFill>
+                  <a:srgbClr val="000000"/>
+                </a:solidFill>
+                <a:latin typeface="Consolas"/>
+              </a:rPr>
+              <a:t>  </a:t>
+            </a:r>
+            <a:r>
+              <a:rPr sz="1100" i="1">
+                <a:solidFill>
+                  <a:srgbClr val="60A0B0"/>
+                </a:solidFill>
+                <a:latin typeface="Consolas"/>
+              </a:rPr>
+              <a:t># всегда в (0, 1)</a:t>
+            </a:r>
+            <a:r>
+              <a:rPr sz="1100">
+                <a:solidFill>
+                  <a:srgbClr val="BBBBBB"/>
+                </a:solidFill>
+                <a:latin typeface="Consolas"/>
+              </a:rPr>
+              <a:t>
+</a:t>
+            </a:r>
+          </a:p>
+        </p:txBody>
+      </p:sp>
+      <p:sp>
+        <p:nvSpPr>
+          <p:cNvPr id="9" name="TextBox 8"/>
           <p:cNvSpPr txBox="1"/>
           <p:nvPr/>
         </p:nvSpPr>
         <p:spPr>
           <a:xfrm>
-            <a:off x="640080" y="5349240"/>
+            <a:off x="640080" y="6492240"/>
             <a:ext cx="6172200" cy="201168"/>
           </a:xfrm>
           <a:prstGeom prst="rect">
@@ -9769,7 +13054,7 @@
       </p:sp>
       <p:pic>
         <p:nvPicPr>
-          <p:cNvPr id="7" name="Picture 6" descr="sigmoid_curve.png"/>
+          <p:cNvPr id="10" name="Picture 9" descr="sigmoid_curve.png"/>
           <p:cNvPicPr>
             <a:picLocks noChangeAspect="1"/>
           </p:cNvPicPr>
@@ -9783,8 +13068,8 @@
         </p:blipFill>
         <p:spPr>
           <a:xfrm>
-            <a:off x="7269480" y="1325880"/>
-            <a:ext cx="4465015" cy="2473914"/>
+            <a:off x="7269480" y="1371600"/>
+            <a:ext cx="4465015" cy="2795099"/>
           </a:xfrm>
           <a:prstGeom prst="rect">
             <a:avLst/>
@@ -9851,7 +13136,7 @@
         <p:spPr>
           <a:xfrm>
             <a:off x="640080" y="1371600"/>
-            <a:ext cx="6263640" cy="2971800"/>
+            <a:ext cx="6263640" cy="2788920"/>
           </a:xfrm>
           <a:prstGeom prst="rect">
             <a:avLst/>
@@ -10037,8 +13322,8 @@
         </p:blipFill>
         <p:spPr>
           <a:xfrm>
-            <a:off x="7534394" y="1325880"/>
-            <a:ext cx="3935185" cy="4407407"/>
+            <a:off x="7269480" y="1371600"/>
+            <a:ext cx="4465015" cy="4059105"/>
           </a:xfrm>
           <a:prstGeom prst="rect">
             <a:avLst/>
@@ -10105,7 +13390,7 @@
         <p:spPr>
           <a:xfrm>
             <a:off x="640080" y="1371600"/>
-            <a:ext cx="6263640" cy="3520439"/>
+            <a:ext cx="6263640" cy="3337560"/>
           </a:xfrm>
           <a:prstGeom prst="rect">
             <a:avLst/>
@@ -10410,8 +13695,8 @@
         </p:blipFill>
         <p:spPr>
           <a:xfrm>
-            <a:off x="7431330" y="1325880"/>
-            <a:ext cx="4141314" cy="4407407"/>
+            <a:off x="7269480" y="1371600"/>
+            <a:ext cx="4465015" cy="4059105"/>
           </a:xfrm>
           <a:prstGeom prst="rect">
             <a:avLst/>
@@ -10478,7 +13763,7 @@
         <p:spPr>
           <a:xfrm>
             <a:off x="640080" y="1371600"/>
-            <a:ext cx="6263640" cy="2697480"/>
+            <a:ext cx="6263640" cy="2514600"/>
           </a:xfrm>
           <a:prstGeom prst="rect">
             <a:avLst/>
@@ -10786,8 +14071,8 @@
         </p:nvSpPr>
         <p:spPr>
           <a:xfrm>
-            <a:off x="640080" y="4489703"/>
-            <a:ext cx="6172200" cy="804672"/>
+            <a:off x="640080" y="5693156"/>
+            <a:ext cx="6172200" cy="744220"/>
           </a:xfrm>
           <a:prstGeom prst="rect">
             <a:avLst/>
@@ -10831,21 +14116,27 @@
         </p:nvSpPr>
         <p:spPr>
           <a:xfrm>
-            <a:off x="713231" y="4526279"/>
-            <a:ext cx="6025896" cy="731520"/>
+            <a:off x="713231" y="5738876"/>
+            <a:ext cx="6025896" cy="139700"/>
           </a:xfrm>
           <a:prstGeom prst="rect">
             <a:avLst/>
           </a:prstGeom>
           <a:noFill/>
+          <a:ln>
+            <a:noFill/>
+          </a:ln>
         </p:spPr>
         <p:txBody>
-          <a:bodyPr wrap="none">
+          <a:bodyPr wrap="none" anchor="t" lIns="0" rIns="0" tIns="0" bIns="0">
             <a:noAutofit/>
           </a:bodyPr>
           <a:lstStyle/>
           <a:p>
             <a:pPr>
+              <a:spcBef>
+                <a:spcPts val="0"/>
+              </a:spcBef>
               <a:spcAft>
                 <a:spcPts val="0"/>
               </a:spcAft>
@@ -10857,11 +14148,185 @@
                 </a:solidFill>
                 <a:latin typeface="Consolas"/>
               </a:rPr>
-              <a:t>y_true = [0, 1, 1, 0]</a:t>
-            </a:r>
-          </a:p>
+              <a:t>y_true</a:t>
+            </a:r>
+            <a:r>
+              <a:rPr sz="1100">
+                <a:solidFill>
+                  <a:srgbClr val="000000"/>
+                </a:solidFill>
+                <a:latin typeface="Consolas"/>
+              </a:rPr>
+              <a:t> </a:t>
+            </a:r>
+            <a:r>
+              <a:rPr sz="1100">
+                <a:solidFill>
+                  <a:srgbClr val="666666"/>
+                </a:solidFill>
+                <a:latin typeface="Consolas"/>
+              </a:rPr>
+              <a:t>=</a:t>
+            </a:r>
+            <a:r>
+              <a:rPr sz="1100">
+                <a:solidFill>
+                  <a:srgbClr val="000000"/>
+                </a:solidFill>
+                <a:latin typeface="Consolas"/>
+              </a:rPr>
+              <a:t> </a:t>
+            </a:r>
+            <a:r>
+              <a:rPr sz="1100">
+                <a:solidFill>
+                  <a:srgbClr val="000000"/>
+                </a:solidFill>
+                <a:latin typeface="Consolas"/>
+              </a:rPr>
+              <a:t>[</a:t>
+            </a:r>
+            <a:r>
+              <a:rPr sz="1100">
+                <a:solidFill>
+                  <a:srgbClr val="40A070"/>
+                </a:solidFill>
+                <a:latin typeface="Consolas"/>
+              </a:rPr>
+              <a:t>0</a:t>
+            </a:r>
+            <a:r>
+              <a:rPr sz="1100">
+                <a:solidFill>
+                  <a:srgbClr val="000000"/>
+                </a:solidFill>
+                <a:latin typeface="Consolas"/>
+              </a:rPr>
+              <a:t>,</a:t>
+            </a:r>
+            <a:r>
+              <a:rPr sz="1100">
+                <a:solidFill>
+                  <a:srgbClr val="000000"/>
+                </a:solidFill>
+                <a:latin typeface="Consolas"/>
+              </a:rPr>
+              <a:t> </a:t>
+            </a:r>
+            <a:r>
+              <a:rPr sz="1100">
+                <a:solidFill>
+                  <a:srgbClr val="40A070"/>
+                </a:solidFill>
+                <a:latin typeface="Consolas"/>
+              </a:rPr>
+              <a:t>1</a:t>
+            </a:r>
+            <a:r>
+              <a:rPr sz="1100">
+                <a:solidFill>
+                  <a:srgbClr val="000000"/>
+                </a:solidFill>
+                <a:latin typeface="Consolas"/>
+              </a:rPr>
+              <a:t>,</a:t>
+            </a:r>
+            <a:r>
+              <a:rPr sz="1100">
+                <a:solidFill>
+                  <a:srgbClr val="000000"/>
+                </a:solidFill>
+                <a:latin typeface="Consolas"/>
+              </a:rPr>
+              <a:t> </a:t>
+            </a:r>
+            <a:r>
+              <a:rPr sz="1100">
+                <a:solidFill>
+                  <a:srgbClr val="40A070"/>
+                </a:solidFill>
+                <a:latin typeface="Consolas"/>
+              </a:rPr>
+              <a:t>1</a:t>
+            </a:r>
+            <a:r>
+              <a:rPr sz="1100">
+                <a:solidFill>
+                  <a:srgbClr val="000000"/>
+                </a:solidFill>
+                <a:latin typeface="Consolas"/>
+              </a:rPr>
+              <a:t>,</a:t>
+            </a:r>
+            <a:r>
+              <a:rPr sz="1100">
+                <a:solidFill>
+                  <a:srgbClr val="000000"/>
+                </a:solidFill>
+                <a:latin typeface="Consolas"/>
+              </a:rPr>
+              <a:t> </a:t>
+            </a:r>
+            <a:r>
+              <a:rPr sz="1100">
+                <a:solidFill>
+                  <a:srgbClr val="40A070"/>
+                </a:solidFill>
+                <a:latin typeface="Consolas"/>
+              </a:rPr>
+              <a:t>0</a:t>
+            </a:r>
+            <a:r>
+              <a:rPr sz="1100">
+                <a:solidFill>
+                  <a:srgbClr val="000000"/>
+                </a:solidFill>
+                <a:latin typeface="Consolas"/>
+              </a:rPr>
+              <a:t>]</a:t>
+            </a:r>
+            <a:r>
+              <a:rPr sz="1100">
+                <a:solidFill>
+                  <a:srgbClr val="BBBBBB"/>
+                </a:solidFill>
+                <a:latin typeface="Consolas"/>
+              </a:rPr>
+              <a:t>
+</a:t>
+            </a:r>
+          </a:p>
+        </p:txBody>
+      </p:sp>
+      <p:sp>
+        <p:nvSpPr>
+          <p:cNvPr id="6" name="TextBox 5"/>
+          <p:cNvSpPr txBox="1"/>
+          <p:nvPr/>
+        </p:nvSpPr>
+        <p:spPr>
+          <a:xfrm>
+            <a:off x="713231" y="5878576"/>
+            <a:ext cx="6025896" cy="139700"/>
+          </a:xfrm>
+          <a:prstGeom prst="rect">
+            <a:avLst/>
+          </a:prstGeom>
+          <a:noFill/>
+          <a:ln>
+            <a:noFill/>
+          </a:ln>
+        </p:spPr>
+        <p:txBody>
+          <a:bodyPr wrap="none" anchor="t" lIns="0" rIns="0" tIns="0" bIns="0">
+            <a:noAutofit/>
+          </a:bodyPr>
+          <a:lstStyle/>
           <a:p>
             <a:pPr>
+              <a:spcBef>
+                <a:spcPts val="0"/>
+              </a:spcBef>
               <a:spcAft>
                 <a:spcPts val="0"/>
               </a:spcAft>
@@ -10873,11 +14338,185 @@
                 </a:solidFill>
                 <a:latin typeface="Consolas"/>
               </a:rPr>
-              <a:t>y_prob = [0.1, 0.9, 0.8, 0.3]</a:t>
-            </a:r>
-          </a:p>
+              <a:t>y_prob</a:t>
+            </a:r>
+            <a:r>
+              <a:rPr sz="1100">
+                <a:solidFill>
+                  <a:srgbClr val="000000"/>
+                </a:solidFill>
+                <a:latin typeface="Consolas"/>
+              </a:rPr>
+              <a:t> </a:t>
+            </a:r>
+            <a:r>
+              <a:rPr sz="1100">
+                <a:solidFill>
+                  <a:srgbClr val="666666"/>
+                </a:solidFill>
+                <a:latin typeface="Consolas"/>
+              </a:rPr>
+              <a:t>=</a:t>
+            </a:r>
+            <a:r>
+              <a:rPr sz="1100">
+                <a:solidFill>
+                  <a:srgbClr val="000000"/>
+                </a:solidFill>
+                <a:latin typeface="Consolas"/>
+              </a:rPr>
+              <a:t> </a:t>
+            </a:r>
+            <a:r>
+              <a:rPr sz="1100">
+                <a:solidFill>
+                  <a:srgbClr val="000000"/>
+                </a:solidFill>
+                <a:latin typeface="Consolas"/>
+              </a:rPr>
+              <a:t>[</a:t>
+            </a:r>
+            <a:r>
+              <a:rPr sz="1100">
+                <a:solidFill>
+                  <a:srgbClr val="40A070"/>
+                </a:solidFill>
+                <a:latin typeface="Consolas"/>
+              </a:rPr>
+              <a:t>0.1</a:t>
+            </a:r>
+            <a:r>
+              <a:rPr sz="1100">
+                <a:solidFill>
+                  <a:srgbClr val="000000"/>
+                </a:solidFill>
+                <a:latin typeface="Consolas"/>
+              </a:rPr>
+              <a:t>,</a:t>
+            </a:r>
+            <a:r>
+              <a:rPr sz="1100">
+                <a:solidFill>
+                  <a:srgbClr val="000000"/>
+                </a:solidFill>
+                <a:latin typeface="Consolas"/>
+              </a:rPr>
+              <a:t> </a:t>
+            </a:r>
+            <a:r>
+              <a:rPr sz="1100">
+                <a:solidFill>
+                  <a:srgbClr val="40A070"/>
+                </a:solidFill>
+                <a:latin typeface="Consolas"/>
+              </a:rPr>
+              <a:t>0.9</a:t>
+            </a:r>
+            <a:r>
+              <a:rPr sz="1100">
+                <a:solidFill>
+                  <a:srgbClr val="000000"/>
+                </a:solidFill>
+                <a:latin typeface="Consolas"/>
+              </a:rPr>
+              <a:t>,</a:t>
+            </a:r>
+            <a:r>
+              <a:rPr sz="1100">
+                <a:solidFill>
+                  <a:srgbClr val="000000"/>
+                </a:solidFill>
+                <a:latin typeface="Consolas"/>
+              </a:rPr>
+              <a:t> </a:t>
+            </a:r>
+            <a:r>
+              <a:rPr sz="1100">
+                <a:solidFill>
+                  <a:srgbClr val="40A070"/>
+                </a:solidFill>
+                <a:latin typeface="Consolas"/>
+              </a:rPr>
+              <a:t>0.8</a:t>
+            </a:r>
+            <a:r>
+              <a:rPr sz="1100">
+                <a:solidFill>
+                  <a:srgbClr val="000000"/>
+                </a:solidFill>
+                <a:latin typeface="Consolas"/>
+              </a:rPr>
+              <a:t>,</a:t>
+            </a:r>
+            <a:r>
+              <a:rPr sz="1100">
+                <a:solidFill>
+                  <a:srgbClr val="000000"/>
+                </a:solidFill>
+                <a:latin typeface="Consolas"/>
+              </a:rPr>
+              <a:t> </a:t>
+            </a:r>
+            <a:r>
+              <a:rPr sz="1100">
+                <a:solidFill>
+                  <a:srgbClr val="40A070"/>
+                </a:solidFill>
+                <a:latin typeface="Consolas"/>
+              </a:rPr>
+              <a:t>0.3</a:t>
+            </a:r>
+            <a:r>
+              <a:rPr sz="1100">
+                <a:solidFill>
+                  <a:srgbClr val="000000"/>
+                </a:solidFill>
+                <a:latin typeface="Consolas"/>
+              </a:rPr>
+              <a:t>]</a:t>
+            </a:r>
+            <a:r>
+              <a:rPr sz="1100">
+                <a:solidFill>
+                  <a:srgbClr val="BBBBBB"/>
+                </a:solidFill>
+                <a:latin typeface="Consolas"/>
+              </a:rPr>
+              <a:t>
+</a:t>
+            </a:r>
+          </a:p>
+        </p:txBody>
+      </p:sp>
+      <p:sp>
+        <p:nvSpPr>
+          <p:cNvPr id="7" name="TextBox 6"/>
+          <p:cNvSpPr txBox="1"/>
+          <p:nvPr/>
+        </p:nvSpPr>
+        <p:spPr>
+          <a:xfrm>
+            <a:off x="713231" y="6018275"/>
+            <a:ext cx="6025896" cy="139700"/>
+          </a:xfrm>
+          <a:prstGeom prst="rect">
+            <a:avLst/>
+          </a:prstGeom>
+          <a:noFill/>
+          <a:ln>
+            <a:noFill/>
+          </a:ln>
+        </p:spPr>
+        <p:txBody>
+          <a:bodyPr wrap="none" anchor="t" lIns="0" rIns="0" tIns="0" bIns="0">
+            <a:noAutofit/>
+          </a:bodyPr>
+          <a:lstStyle/>
           <a:p>
             <a:pPr>
+              <a:spcBef>
+                <a:spcPts val="0"/>
+              </a:spcBef>
               <a:spcAft>
                 <a:spcPts val="0"/>
               </a:spcAft>
@@ -10889,11 +14528,140 @@
                 </a:solidFill>
                 <a:latin typeface="Consolas"/>
               </a:rPr>
-              <a:t>loss = log_loss(y_true, y_prob)</a:t>
-            </a:r>
-          </a:p>
+              <a:t>loss</a:t>
+            </a:r>
+            <a:r>
+              <a:rPr sz="1100">
+                <a:solidFill>
+                  <a:srgbClr val="000000"/>
+                </a:solidFill>
+                <a:latin typeface="Consolas"/>
+              </a:rPr>
+              <a:t> </a:t>
+            </a:r>
+            <a:r>
+              <a:rPr sz="1100">
+                <a:solidFill>
+                  <a:srgbClr val="666666"/>
+                </a:solidFill>
+                <a:latin typeface="Consolas"/>
+              </a:rPr>
+              <a:t>=</a:t>
+            </a:r>
+            <a:r>
+              <a:rPr sz="1100">
+                <a:solidFill>
+                  <a:srgbClr val="000000"/>
+                </a:solidFill>
+                <a:latin typeface="Consolas"/>
+              </a:rPr>
+              <a:t> </a:t>
+            </a:r>
+            <a:r>
+              <a:rPr sz="1100">
+                <a:solidFill>
+                  <a:srgbClr val="000000"/>
+                </a:solidFill>
+                <a:latin typeface="Consolas"/>
+              </a:rPr>
+              <a:t>log_loss</a:t>
+            </a:r>
+            <a:r>
+              <a:rPr sz="1100">
+                <a:solidFill>
+                  <a:srgbClr val="000000"/>
+                </a:solidFill>
+                <a:latin typeface="Consolas"/>
+              </a:rPr>
+              <a:t>(</a:t>
+            </a:r>
+            <a:r>
+              <a:rPr sz="1100">
+                <a:solidFill>
+                  <a:srgbClr val="000000"/>
+                </a:solidFill>
+                <a:latin typeface="Consolas"/>
+              </a:rPr>
+              <a:t>y_true</a:t>
+            </a:r>
+            <a:r>
+              <a:rPr sz="1100">
+                <a:solidFill>
+                  <a:srgbClr val="000000"/>
+                </a:solidFill>
+                <a:latin typeface="Consolas"/>
+              </a:rPr>
+              <a:t>,</a:t>
+            </a:r>
+            <a:r>
+              <a:rPr sz="1100">
+                <a:solidFill>
+                  <a:srgbClr val="000000"/>
+                </a:solidFill>
+                <a:latin typeface="Consolas"/>
+              </a:rPr>
+              <a:t> </a:t>
+            </a:r>
+            <a:r>
+              <a:rPr sz="1100">
+                <a:solidFill>
+                  <a:srgbClr val="000000"/>
+                </a:solidFill>
+                <a:latin typeface="Consolas"/>
+              </a:rPr>
+              <a:t>y_prob</a:t>
+            </a:r>
+            <a:r>
+              <a:rPr sz="1100">
+                <a:solidFill>
+                  <a:srgbClr val="000000"/>
+                </a:solidFill>
+                <a:latin typeface="Consolas"/>
+              </a:rPr>
+              <a:t>)</a:t>
+            </a:r>
+            <a:r>
+              <a:rPr sz="1100">
+                <a:solidFill>
+                  <a:srgbClr val="BBBBBB"/>
+                </a:solidFill>
+                <a:latin typeface="Consolas"/>
+              </a:rPr>
+              <a:t>
+</a:t>
+            </a:r>
+          </a:p>
+        </p:txBody>
+      </p:sp>
+      <p:sp>
+        <p:nvSpPr>
+          <p:cNvPr id="8" name="TextBox 7"/>
+          <p:cNvSpPr txBox="1"/>
+          <p:nvPr/>
+        </p:nvSpPr>
+        <p:spPr>
+          <a:xfrm>
+            <a:off x="713231" y="6157975"/>
+            <a:ext cx="6025896" cy="139700"/>
+          </a:xfrm>
+          <a:prstGeom prst="rect">
+            <a:avLst/>
+          </a:prstGeom>
+          <a:noFill/>
+          <a:ln>
+            <a:noFill/>
+          </a:ln>
+        </p:spPr>
+        <p:txBody>
+          <a:bodyPr wrap="none" anchor="t" lIns="0" rIns="0" tIns="0" bIns="0">
+            <a:noAutofit/>
+          </a:bodyPr>
+          <a:lstStyle/>
           <a:p>
             <a:pPr>
+              <a:spcBef>
+                <a:spcPts val="0"/>
+              </a:spcBef>
               <a:spcAft>
                 <a:spcPts val="0"/>
               </a:spcAft>
@@ -10901,24 +14669,133 @@
             <a:r>
               <a:rPr sz="1100">
                 <a:solidFill>
-                  <a:srgbClr val="000000"/>
-                </a:solidFill>
-                <a:latin typeface="Consolas"/>
-              </a:rPr>
-              <a:t>print(f'LogLoss = {loss:.3f}')</a:t>
-            </a:r>
-          </a:p>
-        </p:txBody>
-      </p:sp>
-      <p:sp>
-        <p:nvSpPr>
-          <p:cNvPr id="6" name="TextBox 5"/>
+                  <a:srgbClr val="007020"/>
+                </a:solidFill>
+                <a:latin typeface="Consolas"/>
+              </a:rPr>
+              <a:t>print</a:t>
+            </a:r>
+            <a:r>
+              <a:rPr sz="1100">
+                <a:solidFill>
+                  <a:srgbClr val="000000"/>
+                </a:solidFill>
+                <a:latin typeface="Consolas"/>
+              </a:rPr>
+              <a:t>(</a:t>
+            </a:r>
+            <a:r>
+              <a:rPr sz="1100">
+                <a:solidFill>
+                  <a:srgbClr val="4070A0"/>
+                </a:solidFill>
+                <a:latin typeface="Consolas"/>
+              </a:rPr>
+              <a:t>f</a:t>
+            </a:r>
+            <a:r>
+              <a:rPr sz="1100">
+                <a:solidFill>
+                  <a:srgbClr val="4070A0"/>
+                </a:solidFill>
+                <a:latin typeface="Consolas"/>
+              </a:rPr>
+              <a:t>'</a:t>
+            </a:r>
+            <a:r>
+              <a:rPr sz="1100">
+                <a:solidFill>
+                  <a:srgbClr val="4070A0"/>
+                </a:solidFill>
+                <a:latin typeface="Consolas"/>
+              </a:rPr>
+              <a:t>LogLoss = </a:t>
+            </a:r>
+            <a:r>
+              <a:rPr sz="1100" i="1">
+                <a:solidFill>
+                  <a:srgbClr val="70A0D0"/>
+                </a:solidFill>
+                <a:latin typeface="Consolas"/>
+              </a:rPr>
+              <a:t>{</a:t>
+            </a:r>
+            <a:r>
+              <a:rPr sz="1100">
+                <a:solidFill>
+                  <a:srgbClr val="000000"/>
+                </a:solidFill>
+                <a:latin typeface="Consolas"/>
+              </a:rPr>
+              <a:t>loss</a:t>
+            </a:r>
+            <a:r>
+              <a:rPr sz="1100" i="1">
+                <a:solidFill>
+                  <a:srgbClr val="70A0D0"/>
+                </a:solidFill>
+                <a:latin typeface="Consolas"/>
+              </a:rPr>
+              <a:t>:</a:t>
+            </a:r>
+            <a:r>
+              <a:rPr sz="1100">
+                <a:solidFill>
+                  <a:srgbClr val="4070A0"/>
+                </a:solidFill>
+                <a:latin typeface="Consolas"/>
+              </a:rPr>
+              <a:t>.3f</a:t>
+            </a:r>
+            <a:r>
+              <a:rPr sz="1100" i="1">
+                <a:solidFill>
+                  <a:srgbClr val="70A0D0"/>
+                </a:solidFill>
+                <a:latin typeface="Consolas"/>
+              </a:rPr>
+              <a:t>}</a:t>
+            </a:r>
+            <a:r>
+              <a:rPr sz="1100">
+                <a:solidFill>
+                  <a:srgbClr val="4070A0"/>
+                </a:solidFill>
+                <a:latin typeface="Consolas"/>
+              </a:rPr>
+              <a:t>'</a:t>
+            </a:r>
+            <a:r>
+              <a:rPr sz="1100">
+                <a:solidFill>
+                  <a:srgbClr val="000000"/>
+                </a:solidFill>
+                <a:latin typeface="Consolas"/>
+              </a:rPr>
+              <a:t>)</a:t>
+            </a:r>
+            <a:r>
+              <a:rPr sz="1100">
+                <a:solidFill>
+                  <a:srgbClr val="BBBBBB"/>
+                </a:solidFill>
+                <a:latin typeface="Consolas"/>
+              </a:rPr>
+              <a:t>
+</a:t>
+            </a:r>
+          </a:p>
+        </p:txBody>
+      </p:sp>
+      <p:sp>
+        <p:nvSpPr>
+          <p:cNvPr id="9" name="TextBox 8"/>
           <p:cNvSpPr txBox="1"/>
           <p:nvPr/>
         </p:nvSpPr>
         <p:spPr>
           <a:xfrm>
-            <a:off x="640080" y="5349240"/>
+            <a:off x="640080" y="6492240"/>
             <a:ext cx="6172200" cy="201168"/>
           </a:xfrm>
           <a:prstGeom prst="rect">
@@ -10947,7 +14824,7 @@
       </p:sp>
       <p:pic>
         <p:nvPicPr>
-          <p:cNvPr id="7" name="Picture 6" descr="logloss_curves.png"/>
+          <p:cNvPr id="10" name="Picture 9" descr="logloss_curves.png"/>
           <p:cNvPicPr>
             <a:picLocks noChangeAspect="1"/>
           </p:cNvPicPr>
@@ -10961,8 +14838,8 @@
         </p:blipFill>
         <p:spPr>
           <a:xfrm>
-            <a:off x="7269480" y="1325880"/>
-            <a:ext cx="4465015" cy="3956939"/>
+            <a:off x="7269480" y="1371600"/>
+            <a:ext cx="4465015" cy="4059105"/>
           </a:xfrm>
           <a:prstGeom prst="rect">
             <a:avLst/>
@@ -11029,7 +14906,7 @@
         <p:spPr>
           <a:xfrm>
             <a:off x="640080" y="1371600"/>
-            <a:ext cx="6263640" cy="2971800"/>
+            <a:ext cx="6263640" cy="2788920"/>
           </a:xfrm>
           <a:prstGeom prst="rect">
             <a:avLst/>
@@ -11222,8 +15099,8 @@
         </p:nvSpPr>
         <p:spPr>
           <a:xfrm>
-            <a:off x="640080" y="4690872"/>
-            <a:ext cx="6172200" cy="630936"/>
+            <a:off x="640080" y="5832856"/>
+            <a:ext cx="6172200" cy="604520"/>
           </a:xfrm>
           <a:prstGeom prst="rect">
             <a:avLst/>
@@ -11267,21 +15144,27 @@
         </p:nvSpPr>
         <p:spPr>
           <a:xfrm>
-            <a:off x="713231" y="4727448"/>
-            <a:ext cx="6025896" cy="557784"/>
+            <a:off x="713231" y="5878576"/>
+            <a:ext cx="6025896" cy="139700"/>
           </a:xfrm>
           <a:prstGeom prst="rect">
             <a:avLst/>
           </a:prstGeom>
           <a:noFill/>
+          <a:ln>
+            <a:noFill/>
+          </a:ln>
         </p:spPr>
         <p:txBody>
-          <a:bodyPr wrap="none">
+          <a:bodyPr wrap="none" anchor="t" lIns="0" rIns="0" tIns="0" bIns="0">
             <a:noAutofit/>
           </a:bodyPr>
           <a:lstStyle/>
           <a:p>
             <a:pPr>
+              <a:spcBef>
+                <a:spcPts val="0"/>
+              </a:spcBef>
               <a:spcAft>
                 <a:spcPts val="0"/>
               </a:spcAft>
@@ -11293,11 +15176,176 @@
                 </a:solidFill>
                 <a:latin typeface="Consolas"/>
               </a:rPr>
-              <a:t>clf = LogisticRegression(max_iter=1000, random_state=42)</a:t>
-            </a:r>
-          </a:p>
+              <a:t>clf</a:t>
+            </a:r>
+            <a:r>
+              <a:rPr sz="1100">
+                <a:solidFill>
+                  <a:srgbClr val="000000"/>
+                </a:solidFill>
+                <a:latin typeface="Consolas"/>
+              </a:rPr>
+              <a:t> </a:t>
+            </a:r>
+            <a:r>
+              <a:rPr sz="1100">
+                <a:solidFill>
+                  <a:srgbClr val="666666"/>
+                </a:solidFill>
+                <a:latin typeface="Consolas"/>
+              </a:rPr>
+              <a:t>=</a:t>
+            </a:r>
+            <a:r>
+              <a:rPr sz="1100">
+                <a:solidFill>
+                  <a:srgbClr val="000000"/>
+                </a:solidFill>
+                <a:latin typeface="Consolas"/>
+              </a:rPr>
+              <a:t> </a:t>
+            </a:r>
+            <a:r>
+              <a:rPr sz="1100">
+                <a:solidFill>
+                  <a:srgbClr val="000000"/>
+                </a:solidFill>
+                <a:latin typeface="Consolas"/>
+              </a:rPr>
+              <a:t>LogisticRegression</a:t>
+            </a:r>
+            <a:r>
+              <a:rPr sz="1100">
+                <a:solidFill>
+                  <a:srgbClr val="000000"/>
+                </a:solidFill>
+                <a:latin typeface="Consolas"/>
+              </a:rPr>
+              <a:t>(</a:t>
+            </a:r>
+            <a:r>
+              <a:rPr sz="1100">
+                <a:solidFill>
+                  <a:srgbClr val="000000"/>
+                </a:solidFill>
+                <a:latin typeface="Consolas"/>
+              </a:rPr>
+              <a:t>max_iter</a:t>
+            </a:r>
+            <a:r>
+              <a:rPr sz="1100">
+                <a:solidFill>
+                  <a:srgbClr val="666666"/>
+                </a:solidFill>
+                <a:latin typeface="Consolas"/>
+              </a:rPr>
+              <a:t>=</a:t>
+            </a:r>
+            <a:r>
+              <a:rPr sz="1100">
+                <a:solidFill>
+                  <a:srgbClr val="40A070"/>
+                </a:solidFill>
+                <a:latin typeface="Consolas"/>
+              </a:rPr>
+              <a:t>1000</a:t>
+            </a:r>
+            <a:r>
+              <a:rPr sz="1100">
+                <a:solidFill>
+                  <a:srgbClr val="000000"/>
+                </a:solidFill>
+                <a:latin typeface="Consolas"/>
+              </a:rPr>
+              <a:t>,</a:t>
+            </a:r>
+            <a:r>
+              <a:rPr sz="1100">
+                <a:solidFill>
+                  <a:srgbClr val="000000"/>
+                </a:solidFill>
+                <a:latin typeface="Consolas"/>
+              </a:rPr>
+              <a:t> </a:t>
+            </a:r>
+            <a:r>
+              <a:rPr sz="1100">
+                <a:solidFill>
+                  <a:srgbClr val="000000"/>
+                </a:solidFill>
+                <a:latin typeface="Consolas"/>
+              </a:rPr>
+              <a:t>random_state</a:t>
+            </a:r>
+            <a:r>
+              <a:rPr sz="1100">
+                <a:solidFill>
+                  <a:srgbClr val="666666"/>
+                </a:solidFill>
+                <a:latin typeface="Consolas"/>
+              </a:rPr>
+              <a:t>=</a:t>
+            </a:r>
+            <a:r>
+              <a:rPr sz="1100">
+                <a:solidFill>
+                  <a:srgbClr val="40A070"/>
+                </a:solidFill>
+                <a:latin typeface="Consolas"/>
+              </a:rPr>
+              <a:t>42</a:t>
+            </a:r>
+            <a:r>
+              <a:rPr sz="1100">
+                <a:solidFill>
+                  <a:srgbClr val="000000"/>
+                </a:solidFill>
+                <a:latin typeface="Consolas"/>
+              </a:rPr>
+              <a:t>)</a:t>
+            </a:r>
+            <a:r>
+              <a:rPr sz="1100">
+                <a:solidFill>
+                  <a:srgbClr val="BBBBBB"/>
+                </a:solidFill>
+                <a:latin typeface="Consolas"/>
+              </a:rPr>
+              <a:t>
+</a:t>
+            </a:r>
+          </a:p>
+        </p:txBody>
+      </p:sp>
+      <p:sp>
+        <p:nvSpPr>
+          <p:cNvPr id="6" name="TextBox 5"/>
+          <p:cNvSpPr txBox="1"/>
+          <p:nvPr/>
+        </p:nvSpPr>
+        <p:spPr>
+          <a:xfrm>
+            <a:off x="713231" y="6018275"/>
+            <a:ext cx="6025896" cy="139700"/>
+          </a:xfrm>
+          <a:prstGeom prst="rect">
+            <a:avLst/>
+          </a:prstGeom>
+          <a:noFill/>
+          <a:ln>
+            <a:noFill/>
+          </a:ln>
+        </p:spPr>
+        <p:txBody>
+          <a:bodyPr wrap="none" anchor="t" lIns="0" rIns="0" tIns="0" bIns="0">
+            <a:noAutofit/>
+          </a:bodyPr>
+          <a:lstStyle/>
           <a:p>
             <a:pPr>
+              <a:spcBef>
+                <a:spcPts val="0"/>
+              </a:spcBef>
               <a:spcAft>
                 <a:spcPts val="0"/>
               </a:spcAft>
@@ -11309,11 +15357,122 @@
                 </a:solidFill>
                 <a:latin typeface="Consolas"/>
               </a:rPr>
-              <a:t>clf.fit(X_train, y_train)</a:t>
-            </a:r>
-          </a:p>
+              <a:t>clf</a:t>
+            </a:r>
+            <a:r>
+              <a:rPr sz="1100">
+                <a:solidFill>
+                  <a:srgbClr val="666666"/>
+                </a:solidFill>
+                <a:latin typeface="Consolas"/>
+              </a:rPr>
+              <a:t>.</a:t>
+            </a:r>
+            <a:r>
+              <a:rPr sz="1100">
+                <a:solidFill>
+                  <a:srgbClr val="000000"/>
+                </a:solidFill>
+                <a:latin typeface="Consolas"/>
+              </a:rPr>
+              <a:t>fit</a:t>
+            </a:r>
+            <a:r>
+              <a:rPr sz="1100">
+                <a:solidFill>
+                  <a:srgbClr val="000000"/>
+                </a:solidFill>
+                <a:latin typeface="Consolas"/>
+              </a:rPr>
+              <a:t>(</a:t>
+            </a:r>
+            <a:r>
+              <a:rPr sz="1100">
+                <a:solidFill>
+                  <a:srgbClr val="000000"/>
+                </a:solidFill>
+                <a:latin typeface="Consolas"/>
+              </a:rPr>
+              <a:t>X_train</a:t>
+            </a:r>
+            <a:r>
+              <a:rPr sz="1100">
+                <a:solidFill>
+                  <a:srgbClr val="000000"/>
+                </a:solidFill>
+                <a:latin typeface="Consolas"/>
+              </a:rPr>
+              <a:t>,</a:t>
+            </a:r>
+            <a:r>
+              <a:rPr sz="1100">
+                <a:solidFill>
+                  <a:srgbClr val="000000"/>
+                </a:solidFill>
+                <a:latin typeface="Consolas"/>
+              </a:rPr>
+              <a:t> </a:t>
+            </a:r>
+            <a:r>
+              <a:rPr sz="1100">
+                <a:solidFill>
+                  <a:srgbClr val="000000"/>
+                </a:solidFill>
+                <a:latin typeface="Consolas"/>
+              </a:rPr>
+              <a:t>y_train</a:t>
+            </a:r>
+            <a:r>
+              <a:rPr sz="1100">
+                <a:solidFill>
+                  <a:srgbClr val="000000"/>
+                </a:solidFill>
+                <a:latin typeface="Consolas"/>
+              </a:rPr>
+              <a:t>)</a:t>
+            </a:r>
+            <a:r>
+              <a:rPr sz="1100">
+                <a:solidFill>
+                  <a:srgbClr val="BBBBBB"/>
+                </a:solidFill>
+                <a:latin typeface="Consolas"/>
+              </a:rPr>
+              <a:t>
+</a:t>
+            </a:r>
+          </a:p>
+        </p:txBody>
+      </p:sp>
+      <p:sp>
+        <p:nvSpPr>
+          <p:cNvPr id="7" name="TextBox 6"/>
+          <p:cNvSpPr txBox="1"/>
+          <p:nvPr/>
+        </p:nvSpPr>
+        <p:spPr>
+          <a:xfrm>
+            <a:off x="713231" y="6157975"/>
+            <a:ext cx="6025896" cy="139700"/>
+          </a:xfrm>
+          <a:prstGeom prst="rect">
+            <a:avLst/>
+          </a:prstGeom>
+          <a:noFill/>
+          <a:ln>
+            <a:noFill/>
+          </a:ln>
+        </p:spPr>
+        <p:txBody>
+          <a:bodyPr wrap="none" anchor="t" lIns="0" rIns="0" tIns="0" bIns="0">
+            <a:noAutofit/>
+          </a:bodyPr>
+          <a:lstStyle/>
           <a:p>
             <a:pPr>
+              <a:spcBef>
+                <a:spcPts val="0"/>
+              </a:spcBef>
               <a:spcAft>
                 <a:spcPts val="0"/>
               </a:spcAft>
@@ -11325,20 +15484,165 @@
                 </a:solidFill>
                 <a:latin typeface="Consolas"/>
               </a:rPr>
-              <a:t>proba = clf.predict_proba(X_test)[:, 1]</a:t>
-            </a:r>
-          </a:p>
-        </p:txBody>
-      </p:sp>
-      <p:sp>
-        <p:nvSpPr>
-          <p:cNvPr id="6" name="TextBox 5"/>
+              <a:t>proba</a:t>
+            </a:r>
+            <a:r>
+              <a:rPr sz="1100">
+                <a:solidFill>
+                  <a:srgbClr val="000000"/>
+                </a:solidFill>
+                <a:latin typeface="Consolas"/>
+              </a:rPr>
+              <a:t> </a:t>
+            </a:r>
+            <a:r>
+              <a:rPr sz="1100">
+                <a:solidFill>
+                  <a:srgbClr val="666666"/>
+                </a:solidFill>
+                <a:latin typeface="Consolas"/>
+              </a:rPr>
+              <a:t>=</a:t>
+            </a:r>
+            <a:r>
+              <a:rPr sz="1100">
+                <a:solidFill>
+                  <a:srgbClr val="000000"/>
+                </a:solidFill>
+                <a:latin typeface="Consolas"/>
+              </a:rPr>
+              <a:t> </a:t>
+            </a:r>
+            <a:r>
+              <a:rPr sz="1100">
+                <a:solidFill>
+                  <a:srgbClr val="000000"/>
+                </a:solidFill>
+                <a:latin typeface="Consolas"/>
+              </a:rPr>
+              <a:t>clf</a:t>
+            </a:r>
+            <a:r>
+              <a:rPr sz="1100">
+                <a:solidFill>
+                  <a:srgbClr val="666666"/>
+                </a:solidFill>
+                <a:latin typeface="Consolas"/>
+              </a:rPr>
+              <a:t>.</a:t>
+            </a:r>
+            <a:r>
+              <a:rPr sz="1100">
+                <a:solidFill>
+                  <a:srgbClr val="000000"/>
+                </a:solidFill>
+                <a:latin typeface="Consolas"/>
+              </a:rPr>
+              <a:t>predict_proba</a:t>
+            </a:r>
+            <a:r>
+              <a:rPr sz="1100">
+                <a:solidFill>
+                  <a:srgbClr val="000000"/>
+                </a:solidFill>
+                <a:latin typeface="Consolas"/>
+              </a:rPr>
+              <a:t>(</a:t>
+            </a:r>
+            <a:r>
+              <a:rPr sz="1100">
+                <a:solidFill>
+                  <a:srgbClr val="000000"/>
+                </a:solidFill>
+                <a:latin typeface="Consolas"/>
+              </a:rPr>
+              <a:t>X_test</a:t>
+            </a:r>
+            <a:r>
+              <a:rPr sz="1100">
+                <a:solidFill>
+                  <a:srgbClr val="000000"/>
+                </a:solidFill>
+                <a:latin typeface="Consolas"/>
+              </a:rPr>
+              <a:t>)</a:t>
+            </a:r>
+            <a:r>
+              <a:rPr sz="1100">
+                <a:solidFill>
+                  <a:srgbClr val="000000"/>
+                </a:solidFill>
+                <a:latin typeface="Consolas"/>
+              </a:rPr>
+              <a:t>[</a:t>
+            </a:r>
+            <a:r>
+              <a:rPr sz="1100">
+                <a:solidFill>
+                  <a:srgbClr val="000000"/>
+                </a:solidFill>
+                <a:latin typeface="Consolas"/>
+              </a:rPr>
+              <a:t>:</a:t>
+            </a:r>
+            <a:r>
+              <a:rPr sz="1100">
+                <a:solidFill>
+                  <a:srgbClr val="000000"/>
+                </a:solidFill>
+                <a:latin typeface="Consolas"/>
+              </a:rPr>
+              <a:t>,</a:t>
+            </a:r>
+            <a:r>
+              <a:rPr sz="1100">
+                <a:solidFill>
+                  <a:srgbClr val="000000"/>
+                </a:solidFill>
+                <a:latin typeface="Consolas"/>
+              </a:rPr>
+              <a:t> </a:t>
+            </a:r>
+            <a:r>
+              <a:rPr sz="1100">
+                <a:solidFill>
+                  <a:srgbClr val="40A070"/>
+                </a:solidFill>
+                <a:latin typeface="Consolas"/>
+              </a:rPr>
+              <a:t>1</a:t>
+            </a:r>
+            <a:r>
+              <a:rPr sz="1100">
+                <a:solidFill>
+                  <a:srgbClr val="000000"/>
+                </a:solidFill>
+                <a:latin typeface="Consolas"/>
+              </a:rPr>
+              <a:t>]</a:t>
+            </a:r>
+            <a:r>
+              <a:rPr sz="1100">
+                <a:solidFill>
+                  <a:srgbClr val="BBBBBB"/>
+                </a:solidFill>
+                <a:latin typeface="Consolas"/>
+              </a:rPr>
+              <a:t>
+</a:t>
+            </a:r>
+          </a:p>
+        </p:txBody>
+      </p:sp>
+      <p:sp>
+        <p:nvSpPr>
+          <p:cNvPr id="8" name="TextBox 7"/>
           <p:cNvSpPr txBox="1"/>
           <p:nvPr/>
         </p:nvSpPr>
         <p:spPr>
           <a:xfrm>
-            <a:off x="640080" y="5376672"/>
+            <a:off x="640080" y="6492240"/>
             <a:ext cx="6172200" cy="201168"/>
           </a:xfrm>
           <a:prstGeom prst="rect">
@@ -11367,7 +15671,7 @@
       </p:sp>
       <p:pic>
         <p:nvPicPr>
-          <p:cNvPr id="7" name="Picture 6" descr="logreg_gradient_descent.png"/>
+          <p:cNvPr id="9" name="Picture 8" descr="logreg_gradient_descent.png"/>
           <p:cNvPicPr>
             <a:picLocks noChangeAspect="1"/>
           </p:cNvPicPr>
@@ -11381,8 +15685,8 @@
         </p:blipFill>
         <p:spPr>
           <a:xfrm>
-            <a:off x="7269480" y="1325880"/>
-            <a:ext cx="4465015" cy="3303820"/>
+            <a:off x="7269480" y="1371600"/>
+            <a:ext cx="4465015" cy="3036210"/>
           </a:xfrm>
           <a:prstGeom prst="rect">
             <a:avLst/>
@@ -11449,7 +15753,7 @@
         <p:spPr>
           <a:xfrm>
             <a:off x="640080" y="1371600"/>
-            <a:ext cx="6263640" cy="3246120"/>
+            <a:ext cx="6263640" cy="3063240"/>
           </a:xfrm>
           <a:prstGeom prst="rect">
             <a:avLst/>
@@ -11473,7 +15777,26 @@
                   <a:srgbClr val="000000"/>
                 </a:solidFill>
               </a:rPr>
-              <a:t xml:space="preserve">• В sklearn параметр `C` — </a:t>
+              <a:t xml:space="preserve">• В sklearn параметр </a:t>
+            </a:r>
+            <a:r>
+              <a:rPr lang="ru-RU" dirty="0" sz="2000">
+                <a:latin typeface="Consolas"/>
+                <a:cs typeface="Consolas"/>
+                <a:ea typeface="Consolas"/>
+                <a:solidFill>
+                  <a:srgbClr val="000000"/>
+                </a:solidFill>
+              </a:rPr>
+              <a:t>C</a:t>
+            </a:r>
+            <a:r>
+              <a:rPr lang="ru-RU" dirty="0" sz="2000">
+                <a:solidFill>
+                  <a:srgbClr val="000000"/>
+                </a:solidFill>
+              </a:rPr>
+              <a:t xml:space="preserve"> — </a:t>
             </a:r>
             <a:r>
               <a:rPr lang="ru-RU" dirty="0" sz="2000" b="1">
@@ -11581,7 +15904,26 @@
                   <a:srgbClr val="000000"/>
                 </a:solidFill>
               </a:rPr>
-              <a:t xml:space="preserve">• L2-регуляризация (`penalty='l2'`) </a:t>
+              <a:t>• L2-регуляризация (</a:t>
+            </a:r>
+            <a:r>
+              <a:rPr lang="ru-RU" dirty="0" sz="2000">
+                <a:latin typeface="Consolas"/>
+                <a:cs typeface="Consolas"/>
+                <a:ea typeface="Consolas"/>
+                <a:solidFill>
+                  <a:srgbClr val="000000"/>
+                </a:solidFill>
+              </a:rPr>
+              <a:t>penalty='l2'</a:t>
+            </a:r>
+            <a:r>
+              <a:rPr lang="ru-RU" dirty="0" sz="2000">
+                <a:solidFill>
+                  <a:srgbClr val="000000"/>
+                </a:solidFill>
+              </a:rPr>
+              <a:t xml:space="preserve">) </a:t>
             </a:r>
             <a:r>
               <a:rPr lang="ru-RU" dirty="0" sz="2000" b="1">
@@ -11618,8 +15960,8 @@
         </p:blipFill>
         <p:spPr>
           <a:xfrm>
-            <a:off x="7478448" y="1325880"/>
-            <a:ext cx="4047077" cy="4407407"/>
+            <a:off x="7269480" y="1371600"/>
+            <a:ext cx="4465015" cy="4059105"/>
           </a:xfrm>
           <a:prstGeom prst="rect">
             <a:avLst/>
